--- a/workspace/clients/brisken/deliverables/lead-generation/rome-2026/decks/brisken-digital-co-worker.pptx
+++ b/workspace/clients/brisken/deliverables/lead-generation/rome-2026/decks/brisken-digital-co-worker.pptx
@@ -5,20 +5,20 @@
     <p:sldMasterId id="2147483648" r:id="rId4"/>
   </p:sldMasterIdLst>
   <p:notesMasterIdLst>
-    <p:notesMasterId r:id="rId16"/>
+    <p:notesMasterId r:id="rId24"/>
   </p:notesMasterIdLst>
   <p:sldIdLst>
-    <p:sldId id="256" r:id="rId5"/>
-    <p:sldId id="257" r:id="rId6"/>
-    <p:sldId id="258" r:id="rId7"/>
-    <p:sldId id="259" r:id="rId8"/>
-    <p:sldId id="260" r:id="rId9"/>
-    <p:sldId id="261" r:id="rId10"/>
-    <p:sldId id="262" r:id="rId11"/>
-    <p:sldId id="263" r:id="rId12"/>
-    <p:sldId id="264" r:id="rId13"/>
-    <p:sldId id="265" r:id="rId14"/>
-    <p:sldId id="266" r:id="rId15"/>
+    <p:sldId id="289" r:id="rId6"/>
+    <p:sldId id="257" r:id="rId7"/>
+    <p:sldId id="258" r:id="rId8"/>
+    <p:sldId id="259" r:id="rId9"/>
+    <p:sldId id="260" r:id="rId10"/>
+    <p:sldId id="261" r:id="rId11"/>
+    <p:sldId id="262" r:id="rId12"/>
+    <p:sldId id="291" r:id="rId20"/>
+    <p:sldId id="292" r:id="rId21"/>
+    <p:sldId id="293" r:id="rId22"/>
+    <p:sldId id="266" r:id="rId23"/>
   </p:sldIdLst>
   <p:sldSz cx="12192000" cy="6858000"/>
   <p:notesSz cx="6858000" cy="12192000"/>
@@ -120,175 +120,6 @@
     </p:ext>
   </p:extLst>
 </p:presentation>
-</file>
-
-<file path=ppt/revisionInfo.xml><?xml version="1.0" encoding="utf-8"?>
-<p1510:revInfo xmlns:a="http://schemas.openxmlformats.org/drawingml/2006/main" xmlns:r="http://schemas.openxmlformats.org/officeDocument/2006/relationships" xmlns:p1510="http://schemas.microsoft.com/office/powerpoint/2015/10/main">
-  <p1510:revLst>
-    <p1510:client id="{2F3675BC-4B35-A944-89E3-D062F2B3AF1F}" v="1" dt="2026-07-09T12:46:00.459"/>
-  </p1510:revLst>
-</p1510:revInfo>
-</file>
-
-<file path=ppt/changesInfos/changesInfo1.xml><?xml version="1.0" encoding="utf-8"?>
-<pc:chgInfo xmlns:a="http://schemas.openxmlformats.org/drawingml/2006/main" xmlns:r="http://schemas.openxmlformats.org/officeDocument/2006/relationships" xmlns:ac="http://schemas.microsoft.com/office/drawing/2013/main/command" xmlns:pc="http://schemas.microsoft.com/office/powerpoint/2013/main/command">
-  <pc:docChgLst>
-    <pc:chgData name="Dirk Neumann" userId="3f083bcb-a186-44d0-81a0-918c73b145d9" providerId="ADAL" clId="{C1336F6D-DB6E-5C4A-B60A-95CF733899A6}"/>
-    <pc:docChg chg="custSel modSld">
-      <pc:chgData name="Dirk Neumann" userId="3f083bcb-a186-44d0-81a0-918c73b145d9" providerId="ADAL" clId="{C1336F6D-DB6E-5C4A-B60A-95CF733899A6}" dt="2026-07-09T12:51:50.730" v="65" actId="20577"/>
-      <pc:docMkLst>
-        <pc:docMk/>
-      </pc:docMkLst>
-      <pc:sldChg chg="modSp mod">
-        <pc:chgData name="Dirk Neumann" userId="3f083bcb-a186-44d0-81a0-918c73b145d9" providerId="ADAL" clId="{C1336F6D-DB6E-5C4A-B60A-95CF733899A6}" dt="2026-07-09T12:51:50.730" v="65" actId="20577"/>
-        <pc:sldMkLst>
-          <pc:docMk/>
-          <pc:sldMk cId="0" sldId="256"/>
-        </pc:sldMkLst>
-        <pc:spChg chg="mod">
-          <ac:chgData name="Dirk Neumann" userId="3f083bcb-a186-44d0-81a0-918c73b145d9" providerId="ADAL" clId="{C1336F6D-DB6E-5C4A-B60A-95CF733899A6}" dt="2026-07-09T12:51:50.730" v="65" actId="20577"/>
-          <ac:spMkLst>
-            <pc:docMk/>
-            <pc:sldMk cId="0" sldId="256"/>
-            <ac:spMk id="10" creationId="{00000000-0000-0000-0000-000000000000}"/>
-          </ac:spMkLst>
-        </pc:spChg>
-      </pc:sldChg>
-      <pc:sldChg chg="modSp mod">
-        <pc:chgData name="Dirk Neumann" userId="3f083bcb-a186-44d0-81a0-918c73b145d9" providerId="ADAL" clId="{C1336F6D-DB6E-5C4A-B60A-95CF733899A6}" dt="2026-07-09T12:50:41.702" v="44" actId="1076"/>
-        <pc:sldMkLst>
-          <pc:docMk/>
-          <pc:sldMk cId="0" sldId="259"/>
-        </pc:sldMkLst>
-        <pc:spChg chg="mod">
-          <ac:chgData name="Dirk Neumann" userId="3f083bcb-a186-44d0-81a0-918c73b145d9" providerId="ADAL" clId="{C1336F6D-DB6E-5C4A-B60A-95CF733899A6}" dt="2026-07-09T12:50:31.669" v="41" actId="14100"/>
-          <ac:spMkLst>
-            <pc:docMk/>
-            <pc:sldMk cId="0" sldId="259"/>
-            <ac:spMk id="5" creationId="{00000000-0000-0000-0000-000000000000}"/>
-          </ac:spMkLst>
-        </pc:spChg>
-        <pc:spChg chg="mod">
-          <ac:chgData name="Dirk Neumann" userId="3f083bcb-a186-44d0-81a0-918c73b145d9" providerId="ADAL" clId="{C1336F6D-DB6E-5C4A-B60A-95CF733899A6}" dt="2026-07-09T12:50:23.888" v="40" actId="14100"/>
-          <ac:spMkLst>
-            <pc:docMk/>
-            <pc:sldMk cId="0" sldId="259"/>
-            <ac:spMk id="9" creationId="{00000000-0000-0000-0000-000000000000}"/>
-          </ac:spMkLst>
-        </pc:spChg>
-        <pc:spChg chg="mod">
-          <ac:chgData name="Dirk Neumann" userId="3f083bcb-a186-44d0-81a0-918c73b145d9" providerId="ADAL" clId="{C1336F6D-DB6E-5C4A-B60A-95CF733899A6}" dt="2026-07-09T12:50:34.470" v="42" actId="14100"/>
-          <ac:spMkLst>
-            <pc:docMk/>
-            <pc:sldMk cId="0" sldId="259"/>
-            <ac:spMk id="11" creationId="{00000000-0000-0000-0000-000000000000}"/>
-          </ac:spMkLst>
-        </pc:spChg>
-        <pc:spChg chg="mod">
-          <ac:chgData name="Dirk Neumann" userId="3f083bcb-a186-44d0-81a0-918c73b145d9" providerId="ADAL" clId="{C1336F6D-DB6E-5C4A-B60A-95CF733899A6}" dt="2026-07-09T12:50:37.103" v="43" actId="14100"/>
-          <ac:spMkLst>
-            <pc:docMk/>
-            <pc:sldMk cId="0" sldId="259"/>
-            <ac:spMk id="17" creationId="{00000000-0000-0000-0000-000000000000}"/>
-          </ac:spMkLst>
-        </pc:spChg>
-        <pc:spChg chg="mod">
-          <ac:chgData name="Dirk Neumann" userId="3f083bcb-a186-44d0-81a0-918c73b145d9" providerId="ADAL" clId="{C1336F6D-DB6E-5C4A-B60A-95CF733899A6}" dt="2026-07-09T12:50:41.702" v="44" actId="1076"/>
-          <ac:spMkLst>
-            <pc:docMk/>
-            <pc:sldMk cId="0" sldId="259"/>
-            <ac:spMk id="22" creationId="{00000000-0000-0000-0000-000000000000}"/>
-          </ac:spMkLst>
-        </pc:spChg>
-      </pc:sldChg>
-      <pc:sldChg chg="delSp modSp mod">
-        <pc:chgData name="Dirk Neumann" userId="3f083bcb-a186-44d0-81a0-918c73b145d9" providerId="ADAL" clId="{C1336F6D-DB6E-5C4A-B60A-95CF733899A6}" dt="2026-07-09T12:47:32.920" v="39" actId="1037"/>
-        <pc:sldMkLst>
-          <pc:docMk/>
-          <pc:sldMk cId="0" sldId="261"/>
-        </pc:sldMkLst>
-        <pc:spChg chg="mod">
-          <ac:chgData name="Dirk Neumann" userId="3f083bcb-a186-44d0-81a0-918c73b145d9" providerId="ADAL" clId="{C1336F6D-DB6E-5C4A-B60A-95CF733899A6}" dt="2026-07-09T12:47:32.920" v="39" actId="1037"/>
-          <ac:spMkLst>
-            <pc:docMk/>
-            <pc:sldMk cId="0" sldId="261"/>
-            <ac:spMk id="14" creationId="{00000000-0000-0000-0000-000000000000}"/>
-          </ac:spMkLst>
-        </pc:spChg>
-        <pc:spChg chg="mod">
-          <ac:chgData name="Dirk Neumann" userId="3f083bcb-a186-44d0-81a0-918c73b145d9" providerId="ADAL" clId="{C1336F6D-DB6E-5C4A-B60A-95CF733899A6}" dt="2026-07-09T12:47:32.920" v="39" actId="1037"/>
-          <ac:spMkLst>
-            <pc:docMk/>
-            <pc:sldMk cId="0" sldId="261"/>
-            <ac:spMk id="15" creationId="{00000000-0000-0000-0000-000000000000}"/>
-          </ac:spMkLst>
-        </pc:spChg>
-        <pc:spChg chg="del">
-          <ac:chgData name="Dirk Neumann" userId="3f083bcb-a186-44d0-81a0-918c73b145d9" providerId="ADAL" clId="{C1336F6D-DB6E-5C4A-B60A-95CF733899A6}" dt="2026-07-09T12:47:12.318" v="9" actId="478"/>
-          <ac:spMkLst>
-            <pc:docMk/>
-            <pc:sldMk cId="0" sldId="261"/>
-            <ac:spMk id="17" creationId="{00000000-0000-0000-0000-000000000000}"/>
-          </ac:spMkLst>
-        </pc:spChg>
-        <pc:spChg chg="del">
-          <ac:chgData name="Dirk Neumann" userId="3f083bcb-a186-44d0-81a0-918c73b145d9" providerId="ADAL" clId="{C1336F6D-DB6E-5C4A-B60A-95CF733899A6}" dt="2026-07-09T12:47:10.357" v="7" actId="478"/>
-          <ac:spMkLst>
-            <pc:docMk/>
-            <pc:sldMk cId="0" sldId="261"/>
-            <ac:spMk id="19" creationId="{00000000-0000-0000-0000-000000000000}"/>
-          </ac:spMkLst>
-        </pc:spChg>
-        <pc:picChg chg="mod">
-          <ac:chgData name="Dirk Neumann" userId="3f083bcb-a186-44d0-81a0-918c73b145d9" providerId="ADAL" clId="{C1336F6D-DB6E-5C4A-B60A-95CF733899A6}" dt="2026-07-09T12:47:32.920" v="39" actId="1037"/>
-          <ac:picMkLst>
-            <pc:docMk/>
-            <pc:sldMk cId="0" sldId="261"/>
-            <ac:picMk id="16" creationId="{00000000-0000-0000-0000-000000000000}"/>
-          </ac:picMkLst>
-        </pc:picChg>
-        <pc:picChg chg="del">
-          <ac:chgData name="Dirk Neumann" userId="3f083bcb-a186-44d0-81a0-918c73b145d9" providerId="ADAL" clId="{C1336F6D-DB6E-5C4A-B60A-95CF733899A6}" dt="2026-07-09T12:47:11.138" v="8" actId="478"/>
-          <ac:picMkLst>
-            <pc:docMk/>
-            <pc:sldMk cId="0" sldId="261"/>
-            <ac:picMk id="18" creationId="{00000000-0000-0000-0000-000000000000}"/>
-          </ac:picMkLst>
-        </pc:picChg>
-      </pc:sldChg>
-      <pc:sldChg chg="modSp mod">
-        <pc:chgData name="Dirk Neumann" userId="3f083bcb-a186-44d0-81a0-918c73b145d9" providerId="ADAL" clId="{C1336F6D-DB6E-5C4A-B60A-95CF733899A6}" dt="2026-07-09T12:46:47.193" v="6" actId="20577"/>
-        <pc:sldMkLst>
-          <pc:docMk/>
-          <pc:sldMk cId="0" sldId="262"/>
-        </pc:sldMkLst>
-        <pc:spChg chg="mod">
-          <ac:chgData name="Dirk Neumann" userId="3f083bcb-a186-44d0-81a0-918c73b145d9" providerId="ADAL" clId="{C1336F6D-DB6E-5C4A-B60A-95CF733899A6}" dt="2026-07-09T12:46:47.193" v="6" actId="20577"/>
-          <ac:spMkLst>
-            <pc:docMk/>
-            <pc:sldMk cId="0" sldId="262"/>
-            <ac:spMk id="14" creationId="{00000000-0000-0000-0000-000000000000}"/>
-          </ac:spMkLst>
-        </pc:spChg>
-      </pc:sldChg>
-      <pc:sldChg chg="modSp mod">
-        <pc:chgData name="Dirk Neumann" userId="3f083bcb-a186-44d0-81a0-918c73b145d9" providerId="ADAL" clId="{C1336F6D-DB6E-5C4A-B60A-95CF733899A6}" dt="2026-07-09T12:45:51.155" v="2" actId="20577"/>
-        <pc:sldMkLst>
-          <pc:docMk/>
-          <pc:sldMk cId="0" sldId="265"/>
-        </pc:sldMkLst>
-        <pc:spChg chg="mod">
-          <ac:chgData name="Dirk Neumann" userId="3f083bcb-a186-44d0-81a0-918c73b145d9" providerId="ADAL" clId="{C1336F6D-DB6E-5C4A-B60A-95CF733899A6}" dt="2026-07-09T12:45:51.155" v="2" actId="20577"/>
-          <ac:spMkLst>
-            <pc:docMk/>
-            <pc:sldMk cId="0" sldId="265"/>
-            <ac:spMk id="5" creationId="{00000000-0000-0000-0000-000000000000}"/>
-          </ac:spMkLst>
-        </pc:spChg>
-      </pc:sldChg>
-    </pc:docChg>
-  </pc:docChgLst>
-</pc:chgInfo>
 </file>
 
 <file path=ppt/notesMasters/notesMaster1.xml><?xml version="1.0" encoding="utf-8"?>
@@ -416,7 +247,7 @@
 </p:notesMaster>
 </file>
 
-<file path=ppt/notesSlides/notesSlide1.xml><?xml version="1.0" encoding="utf-8"?>
+<file path=ppt/notesSlides/notesSlide16.xml><?xml version="1.0" encoding="utf-8"?>
 <p:notes xmlns:a="http://schemas.openxmlformats.org/drawingml/2006/main" xmlns:r="http://schemas.openxmlformats.org/officeDocument/2006/relationships" xmlns:p="http://schemas.openxmlformats.org/presentationml/2006/main">
   <p:cSld>
     <p:spTree>
@@ -481,7 +312,7 @@
           <a:p>
             <a:fld id="{F7021451-1387-4CA6-816F-3879F97B5CBC}" type="slidenum">
               <a:rPr lang="en-US"/>
-              <a:t>1</a:t>
+              <a:t>16</a:t>
             </a:fld>
             <a:endParaRPr lang="en-US"/>
           </a:p>
@@ -500,7 +331,7 @@
 </p:notes>
 </file>
 
-<file path=ppt/notesSlides/notesSlide10.xml><?xml version="1.0" encoding="utf-8"?>
+<file path=ppt/notesSlides/notesSlide17.xml><?xml version="1.0" encoding="utf-8"?>
 <p:notes xmlns:a="http://schemas.openxmlformats.org/drawingml/2006/main" xmlns:r="http://schemas.openxmlformats.org/officeDocument/2006/relationships" xmlns:p="http://schemas.openxmlformats.org/presentationml/2006/main">
   <p:cSld>
     <p:spTree>
@@ -565,7 +396,7 @@
           <a:p>
             <a:fld id="{F7021451-1387-4CA6-816F-3879F97B5CBC}" type="slidenum">
               <a:rPr lang="en-US"/>
-              <a:t>10</a:t>
+              <a:t>17</a:t>
             </a:fld>
             <a:endParaRPr lang="en-US"/>
           </a:p>
@@ -584,7 +415,7 @@
 </p:notes>
 </file>
 
-<file path=ppt/notesSlides/notesSlide11.xml><?xml version="1.0" encoding="utf-8"?>
+<file path=ppt/notesSlides/notesSlide18.xml><?xml version="1.0" encoding="utf-8"?>
 <p:notes xmlns:a="http://schemas.openxmlformats.org/drawingml/2006/main" xmlns:r="http://schemas.openxmlformats.org/officeDocument/2006/relationships" xmlns:p="http://schemas.openxmlformats.org/presentationml/2006/main">
   <p:cSld>
     <p:spTree>
@@ -649,7 +480,91 @@
           <a:p>
             <a:fld id="{F7021451-1387-4CA6-816F-3879F97B5CBC}" type="slidenum">
               <a:rPr lang="en-US"/>
-              <a:t>11</a:t>
+              <a:t>18</a:t>
+            </a:fld>
+            <a:endParaRPr lang="en-US"/>
+          </a:p>
+        </p:txBody>
+      </p:sp>
+    </p:spTree>
+    <p:extLst>
+      <p:ext uri="{BB962C8B-B14F-4D97-AF65-F5344CB8AC3E}">
+        <p14:creationId xmlns:p14="http://schemas.microsoft.com/office/powerpoint/2010/main" val="1024086991"/>
+      </p:ext>
+    </p:extLst>
+  </p:cSld>
+  <p:clrMapOvr>
+    <a:masterClrMapping/>
+  </p:clrMapOvr>
+</p:notes>
+</file>
+
+<file path=ppt/notesSlides/notesSlide19.xml><?xml version="1.0" encoding="utf-8"?>
+<p:notes xmlns:a="http://schemas.openxmlformats.org/drawingml/2006/main" xmlns:r="http://schemas.openxmlformats.org/officeDocument/2006/relationships" xmlns:p="http://schemas.openxmlformats.org/presentationml/2006/main">
+  <p:cSld>
+    <p:spTree>
+      <p:nvGrpSpPr>
+        <p:cNvPr id="1" name=""/>
+        <p:cNvGrpSpPr/>
+        <p:nvPr/>
+      </p:nvGrpSpPr>
+      <p:grpSpPr>
+        <a:xfrm>
+          <a:off x="0" y="0"/>
+          <a:ext cx="0" cy="0"/>
+          <a:chOff x="0" y="0"/>
+          <a:chExt cx="0" cy="0"/>
+        </a:xfrm>
+      </p:grpSpPr>
+      <p:sp>
+        <p:nvSpPr>
+          <p:cNvPr id="2" name="Slide Image Placeholder 1"/>
+          <p:cNvSpPr>
+            <a:spLocks noGrp="1" noRot="1" noChangeAspect="1"/>
+          </p:cNvSpPr>
+          <p:nvPr>
+            <p:ph type="sldImg"/>
+          </p:nvPr>
+        </p:nvSpPr>
+        <p:spPr/>
+      </p:sp>
+      <p:sp>
+        <p:nvSpPr>
+          <p:cNvPr id="3" name="Notes Placeholder 2"/>
+          <p:cNvSpPr>
+            <a:spLocks noGrp="1"/>
+          </p:cNvSpPr>
+          <p:nvPr>
+            <p:ph type="body" idx="1"/>
+          </p:nvPr>
+        </p:nvSpPr>
+        <p:spPr/>
+        <p:txBody>
+          <a:bodyPr/>
+          <a:lstStyle/>
+          <a:p>
+            <a:endParaRPr lang="en-US" dirty="0"/>
+          </a:p>
+        </p:txBody>
+      </p:sp>
+      <p:sp>
+        <p:nvSpPr>
+          <p:cNvPr id="4" name="Slide Number Placeholder 3"/>
+          <p:cNvSpPr>
+            <a:spLocks noGrp="1"/>
+          </p:cNvSpPr>
+          <p:nvPr>
+            <p:ph type="sldNum" sz="quarter" idx="10"/>
+          </p:nvPr>
+        </p:nvSpPr>
+        <p:spPr/>
+        <p:txBody>
+          <a:bodyPr/>
+          <a:lstStyle/>
+          <a:p>
+            <a:fld id="{F7021451-1387-4CA6-816F-3879F97B5CBC}" type="slidenum">
+              <a:rPr lang="en-US"/>
+              <a:t>19</a:t>
             </a:fld>
             <a:endParaRPr lang="en-US"/>
           </a:p>
@@ -742,7 +657,7 @@
     </p:spTree>
     <p:extLst>
       <p:ext uri="{BB962C8B-B14F-4D97-AF65-F5344CB8AC3E}">
-        <p14:creationId xmlns:p14="http://schemas.microsoft.com/office/powerpoint/2010/main" val="1024086991"/>
+        <p14:creationId xmlns:p14="http://schemas.microsoft.com/office/powerpoint/2010/main" val="241599770"/>
       </p:ext>
     </p:extLst>
   </p:cSld>
@@ -1238,90 +1153,6 @@
             <a:fld id="{F7021451-1387-4CA6-816F-3879F97B5CBC}" type="slidenum">
               <a:rPr lang="en-US"/>
               <a:t>8</a:t>
-            </a:fld>
-            <a:endParaRPr lang="en-US"/>
-          </a:p>
-        </p:txBody>
-      </p:sp>
-    </p:spTree>
-    <p:extLst>
-      <p:ext uri="{BB962C8B-B14F-4D97-AF65-F5344CB8AC3E}">
-        <p14:creationId xmlns:p14="http://schemas.microsoft.com/office/powerpoint/2010/main" val="1024086991"/>
-      </p:ext>
-    </p:extLst>
-  </p:cSld>
-  <p:clrMapOvr>
-    <a:masterClrMapping/>
-  </p:clrMapOvr>
-</p:notes>
-</file>
-
-<file path=ppt/notesSlides/notesSlide9.xml><?xml version="1.0" encoding="utf-8"?>
-<p:notes xmlns:a="http://schemas.openxmlformats.org/drawingml/2006/main" xmlns:r="http://schemas.openxmlformats.org/officeDocument/2006/relationships" xmlns:p="http://schemas.openxmlformats.org/presentationml/2006/main">
-  <p:cSld>
-    <p:spTree>
-      <p:nvGrpSpPr>
-        <p:cNvPr id="1" name=""/>
-        <p:cNvGrpSpPr/>
-        <p:nvPr/>
-      </p:nvGrpSpPr>
-      <p:grpSpPr>
-        <a:xfrm>
-          <a:off x="0" y="0"/>
-          <a:ext cx="0" cy="0"/>
-          <a:chOff x="0" y="0"/>
-          <a:chExt cx="0" cy="0"/>
-        </a:xfrm>
-      </p:grpSpPr>
-      <p:sp>
-        <p:nvSpPr>
-          <p:cNvPr id="2" name="Slide Image Placeholder 1"/>
-          <p:cNvSpPr>
-            <a:spLocks noGrp="1" noRot="1" noChangeAspect="1"/>
-          </p:cNvSpPr>
-          <p:nvPr>
-            <p:ph type="sldImg"/>
-          </p:nvPr>
-        </p:nvSpPr>
-        <p:spPr/>
-      </p:sp>
-      <p:sp>
-        <p:nvSpPr>
-          <p:cNvPr id="3" name="Notes Placeholder 2"/>
-          <p:cNvSpPr>
-            <a:spLocks noGrp="1"/>
-          </p:cNvSpPr>
-          <p:nvPr>
-            <p:ph type="body" idx="1"/>
-          </p:nvPr>
-        </p:nvSpPr>
-        <p:spPr/>
-        <p:txBody>
-          <a:bodyPr/>
-          <a:lstStyle/>
-          <a:p>
-            <a:endParaRPr lang="en-US" dirty="0"/>
-          </a:p>
-        </p:txBody>
-      </p:sp>
-      <p:sp>
-        <p:nvSpPr>
-          <p:cNvPr id="4" name="Slide Number Placeholder 3"/>
-          <p:cNvSpPr>
-            <a:spLocks noGrp="1"/>
-          </p:cNvSpPr>
-          <p:nvPr>
-            <p:ph type="sldNum" sz="quarter" idx="10"/>
-          </p:nvPr>
-        </p:nvSpPr>
-        <p:spPr/>
-        <p:txBody>
-          <a:bodyPr/>
-          <a:lstStyle/>
-          <a:p>
-            <a:fld id="{F7021451-1387-4CA6-816F-3879F97B5CBC}" type="slidenum">
-              <a:rPr lang="en-US"/>
-              <a:t>9</a:t>
             </a:fld>
             <a:endParaRPr lang="en-US"/>
           </a:p>
@@ -1652,9 +1483,9 @@
 </p:sldMaster>
 </file>
 
-<file path=ppt/slides/slide1.xml><?xml version="1.0" encoding="utf-8"?>
+<file path=ppt/slides/slide16.xml><?xml version="1.0" encoding="utf-8"?>
 <p:sld xmlns:a="http://schemas.openxmlformats.org/drawingml/2006/main" xmlns:r="http://schemas.openxmlformats.org/officeDocument/2006/relationships" xmlns:p="http://schemas.openxmlformats.org/presentationml/2006/main">
-  <p:cSld name="Slide 1">
+  <p:cSld name="Slide 8">
     <p:bg>
       <p:bgPr>
         <a:solidFill>
@@ -1685,167 +1516,7 @@
         </p:nvSpPr>
         <p:spPr>
           <a:xfrm>
-            <a:off x="6949440" y="-1097280"/>
-            <a:ext cx="6035040" cy="6035040"/>
-          </a:xfrm>
-          <a:prstGeom prst="ellipse">
-            <a:avLst/>
-          </a:prstGeom>
-          <a:solidFill>
-            <a:srgbClr val="3BE3E0">
-              <a:alpha val="7000"/>
-            </a:srgbClr>
-          </a:solidFill>
-          <a:ln w="12700">
-            <a:solidFill>
-              <a:srgbClr val="333333"/>
-            </a:solidFill>
-            <a:prstDash val="solid"/>
-          </a:ln>
-        </p:spPr>
-        <p:txBody>
-          <a:bodyPr/>
-          <a:lstStyle/>
-          <a:p>
-            <a:endParaRPr lang="en-US"/>
-          </a:p>
-        </p:txBody>
-      </p:sp>
-      <p:sp>
-        <p:nvSpPr>
-          <p:cNvPr id="3" name="Shape 1"/>
-          <p:cNvSpPr/>
-          <p:nvPr/>
-        </p:nvSpPr>
-        <p:spPr>
-          <a:xfrm>
-            <a:off x="8321040" y="274320"/>
-            <a:ext cx="3291840" cy="3291840"/>
-          </a:xfrm>
-          <a:prstGeom prst="ellipse">
-            <a:avLst/>
-          </a:prstGeom>
-          <a:solidFill>
-            <a:srgbClr val="3BE3E0">
-              <a:alpha val="12000"/>
-            </a:srgbClr>
-          </a:solidFill>
-          <a:ln w="12700">
-            <a:solidFill>
-              <a:srgbClr val="333333"/>
-            </a:solidFill>
-            <a:prstDash val="solid"/>
-          </a:ln>
-        </p:spPr>
-        <p:txBody>
-          <a:bodyPr/>
-          <a:lstStyle/>
-          <a:p>
-            <a:endParaRPr lang="en-US"/>
-          </a:p>
-        </p:txBody>
-      </p:sp>
-      <p:sp>
-        <p:nvSpPr>
-          <p:cNvPr id="4" name="Shape 2"/>
-          <p:cNvSpPr/>
-          <p:nvPr/>
-        </p:nvSpPr>
-        <p:spPr>
-          <a:xfrm>
-            <a:off x="-1737360" y="3017520"/>
-            <a:ext cx="6035040" cy="6035040"/>
-          </a:xfrm>
-          <a:prstGeom prst="ellipse">
-            <a:avLst/>
-          </a:prstGeom>
-          <a:solidFill>
-            <a:srgbClr val="5A6BFF">
-              <a:alpha val="7000"/>
-            </a:srgbClr>
-          </a:solidFill>
-          <a:ln w="12700">
-            <a:solidFill>
-              <a:srgbClr val="333333"/>
-            </a:solidFill>
-            <a:prstDash val="solid"/>
-          </a:ln>
-        </p:spPr>
-        <p:txBody>
-          <a:bodyPr/>
-          <a:lstStyle/>
-          <a:p>
-            <a:endParaRPr lang="en-US"/>
-          </a:p>
-        </p:txBody>
-      </p:sp>
-      <p:sp>
-        <p:nvSpPr>
-          <p:cNvPr id="5" name="Shape 3"/>
-          <p:cNvSpPr/>
-          <p:nvPr/>
-        </p:nvSpPr>
-        <p:spPr>
-          <a:xfrm>
-            <a:off x="-365760" y="4389120"/>
-            <a:ext cx="3291840" cy="3291840"/>
-          </a:xfrm>
-          <a:prstGeom prst="ellipse">
-            <a:avLst/>
-          </a:prstGeom>
-          <a:solidFill>
-            <a:srgbClr val="5A6BFF">
-              <a:alpha val="12000"/>
-            </a:srgbClr>
-          </a:solidFill>
-          <a:ln w="12700">
-            <a:solidFill>
-              <a:srgbClr val="333333"/>
-            </a:solidFill>
-            <a:prstDash val="solid"/>
-          </a:ln>
-        </p:spPr>
-        <p:txBody>
-          <a:bodyPr/>
-          <a:lstStyle/>
-          <a:p>
-            <a:endParaRPr lang="en-US"/>
-          </a:p>
-        </p:txBody>
-      </p:sp>
-      <p:pic>
-        <p:nvPicPr>
-          <p:cNvPr id="6" name="Image 0" descr="C:/Users/neuma_p1qrsic/Repo/agentic-ops1/.scratch/brisken-logo-light.png"/>
-          <p:cNvPicPr>
-            <a:picLocks noChangeAspect="1"/>
-          </p:cNvPicPr>
-          <p:nvPr/>
-        </p:nvPicPr>
-        <p:blipFill>
-          <a:blip r:embed="rId3"/>
-          <a:stretch>
-            <a:fillRect/>
-          </a:stretch>
-        </p:blipFill>
-        <p:spPr>
-          <a:xfrm>
-            <a:off x="566928" y="548640"/>
-            <a:ext cx="1417320" cy="310896"/>
-          </a:xfrm>
-          <a:prstGeom prst="rect">
-            <a:avLst/>
-          </a:prstGeom>
-        </p:spPr>
-      </p:pic>
-      <p:sp>
-        <p:nvSpPr>
-          <p:cNvPr id="7" name="Shape 4"/>
-          <p:cNvSpPr/>
-          <p:nvPr/>
-        </p:nvSpPr>
-        <p:spPr>
-          <a:xfrm>
-            <a:off x="566928" y="2624328"/>
+            <a:off x="566928" y="585216"/>
             <a:ext cx="45720" cy="219456"/>
           </a:xfrm>
           <a:prstGeom prst="rect">
@@ -1871,13 +1542,13 @@
       </p:sp>
       <p:sp>
         <p:nvSpPr>
-          <p:cNvPr id="8" name="Text 5"/>
-          <p:cNvSpPr/>
-          <p:nvPr/>
-        </p:nvSpPr>
-        <p:spPr>
-          <a:xfrm>
-            <a:off x="713232" y="2551176"/>
+          <p:cNvPr id="3" name="Text 1"/>
+          <p:cNvSpPr/>
+          <p:nvPr/>
+        </p:nvSpPr>
+        <p:spPr>
+          <a:xfrm>
+            <a:off x="713232" y="512064"/>
             <a:ext cx="8229600" cy="329184"/>
           </a:xfrm>
           <a:prstGeom prst="rect">
@@ -1902,7 +1573,7 @@
                 <a:ea typeface="Segoe UI Semibold" pitchFamily="34" charset="-122"/>
                 <a:cs typeface="Segoe UI Semibold" pitchFamily="34" charset="-120"/>
               </a:rPr>
-              <a:t>ONEPILOT · DIGITAL CO-WORKER</a:t>
+              <a:t>WHY IT IS SAFE TO LET IT RUN</a:t>
             </a:r>
             <a:endParaRPr lang="en-US" sz="1200" dirty="0"/>
           </a:p>
@@ -1910,14 +1581,14 @@
       </p:sp>
       <p:sp>
         <p:nvSpPr>
-          <p:cNvPr id="9" name="Text 6"/>
-          <p:cNvSpPr/>
-          <p:nvPr/>
-        </p:nvSpPr>
-        <p:spPr>
-          <a:xfrm>
-            <a:off x="539496" y="2880360"/>
-            <a:ext cx="11155680" cy="1371600"/>
+          <p:cNvPr id="4" name="Text 2"/>
+          <p:cNvSpPr/>
+          <p:nvPr/>
+        </p:nvSpPr>
+        <p:spPr>
+          <a:xfrm>
+            <a:off x="566928" y="960120"/>
+            <a:ext cx="10789920" cy="731520"/>
           </a:xfrm>
           <a:prstGeom prst="rect">
             <a:avLst/>
@@ -1933,7 +1604,7 @@
               <a:buNone/>
             </a:pPr>
             <a:r>
-              <a:rPr lang="en-US" sz="6800" b="1" dirty="0">
+              <a:rPr lang="en-US" sz="2800" b="1" dirty="0">
                 <a:solidFill>
                   <a:srgbClr val="F3F6FB"/>
                 </a:solidFill>
@@ -1941,74 +1612,55 @@
                 <a:ea typeface="Segoe UI Semibold" pitchFamily="34" charset="-122"/>
                 <a:cs typeface="Segoe UI Semibold" pitchFamily="34" charset="-120"/>
               </a:rPr>
-              <a:t>Digital Co-Worker</a:t>
-            </a:r>
-            <a:endParaRPr lang="en-US" sz="6800" dirty="0"/>
-          </a:p>
-        </p:txBody>
-      </p:sp>
-      <p:sp>
-        <p:nvSpPr>
-          <p:cNvPr id="10" name="Text 7"/>
-          <p:cNvSpPr/>
-          <p:nvPr/>
-        </p:nvSpPr>
-        <p:spPr>
-          <a:xfrm>
-            <a:off x="566928" y="4206240"/>
-            <a:ext cx="10332720" cy="822960"/>
-          </a:xfrm>
-          <a:prstGeom prst="rect">
-            <a:avLst/>
-          </a:prstGeom>
-          <a:noFill/>
-          <a:ln/>
-        </p:spPr>
-        <p:txBody>
-          <a:bodyPr wrap="square" rtlCol="0" anchor="t"/>
-          <a:lstStyle/>
-          <a:p>
-            <a:pPr marL="0" indent="0">
-              <a:lnSpc>
-                <a:spcPct val="115000"/>
-              </a:lnSpc>
-              <a:buNone/>
-            </a:pPr>
-            <a:r>
-              <a:rPr lang="en-US" sz="2000" dirty="0">
-                <a:solidFill>
-                  <a:srgbClr val="AAB6C7"/>
-                </a:solidFill>
-                <a:latin typeface="Segoe UI" pitchFamily="34" charset="0"/>
-                <a:ea typeface="Segoe UI" pitchFamily="34" charset="-122"/>
-                <a:cs typeface="Segoe UI" pitchFamily="34" charset="-120"/>
-              </a:rPr>
-              <a:t>An AI co-worker for every person on your team. </a:t>
-            </a:r>
-            <a:r>
-              <a:rPr lang="en-US" sz="2000" dirty="0">
-                <a:solidFill>
-                  <a:srgbClr val="3BE3E0"/>
-                </a:solidFill>
-                <a:latin typeface="Segoe UI" pitchFamily="34" charset="0"/>
-                <a:ea typeface="Segoe UI" pitchFamily="34" charset="-122"/>
-                <a:cs typeface="Segoe UI" pitchFamily="34" charset="-120"/>
-              </a:rPr>
-              <a:t>It does the busywork across your systems, in plain chat or in the background.</a:t>
-            </a:r>
-            <a:endParaRPr lang="en-US" sz="2000" dirty="0"/>
-          </a:p>
-        </p:txBody>
-      </p:sp>
-      <p:sp>
-        <p:nvSpPr>
-          <p:cNvPr id="11" name="Shape 8"/>
-          <p:cNvSpPr/>
-          <p:nvPr/>
-        </p:nvSpPr>
-        <p:spPr>
-          <a:xfrm>
-            <a:off x="566928" y="5532120"/>
+              <a:t>The controls are built in, not bolted on.</a:t>
+            </a:r>
+            <a:endParaRPr lang="en-US" sz="2800" dirty="0"/>
+          </a:p>
+        </p:txBody>
+      </p:sp>
+      <p:sp>
+        <p:nvSpPr>
+          <p:cNvPr id="5" name="Shape 3"/>
+          <p:cNvSpPr/>
+          <p:nvPr/>
+        </p:nvSpPr>
+        <p:spPr>
+          <a:xfrm>
+            <a:off x="566928" y="2194560"/>
+            <a:ext cx="5346040" cy="1188720"/>
+          </a:xfrm>
+          <a:prstGeom prst="roundRect">
+            <a:avLst>
+              <a:gd name="adj" fmla="val 6154"/>
+            </a:avLst>
+          </a:prstGeom>
+          <a:solidFill>
+            <a:srgbClr val="141A25"/>
+          </a:solidFill>
+          <a:ln w="13970">
+            <a:solidFill>
+              <a:srgbClr val="36414F"/>
+            </a:solidFill>
+            <a:prstDash val="solid"/>
+          </a:ln>
+        </p:spPr>
+        <p:txBody>
+          <a:bodyPr/>
+          <a:lstStyle/>
+          <a:p>
+            <a:endParaRPr lang="en-US"/>
+          </a:p>
+        </p:txBody>
+      </p:sp>
+      <p:sp>
+        <p:nvSpPr>
+          <p:cNvPr id="6" name="Shape 4"/>
+          <p:cNvSpPr/>
+          <p:nvPr/>
+        </p:nvSpPr>
+        <p:spPr>
+          <a:xfrm>
+            <a:off x="822960" y="2496312"/>
             <a:ext cx="566928" cy="566928"/>
           </a:xfrm>
           <a:prstGeom prst="roundRect">
@@ -2036,21 +1688,21 @@
       </p:sp>
       <p:pic>
         <p:nvPicPr>
-          <p:cNvPr id="12" name="Image 1" descr="C:/Users/neuma_p1qrsic/Repo/agentic-ops1/.scratch/icons/spark.png"/>
+          <p:cNvPr id="7" name="Image 0" descr="C:/Users/neuma_p1qrsic/Repo/agentic-ops1/.scratch/icons/list.png"/>
           <p:cNvPicPr>
             <a:picLocks noChangeAspect="1"/>
           </p:cNvPicPr>
           <p:nvPr/>
         </p:nvPicPr>
         <p:blipFill>
-          <a:blip r:embed="rId4"/>
+          <a:blip r:embed="rId3"/>
           <a:stretch>
             <a:fillRect/>
           </a:stretch>
         </p:blipFill>
         <p:spPr>
           <a:xfrm>
-            <a:off x="702991" y="5668183"/>
+            <a:off x="959023" y="2632375"/>
             <a:ext cx="294803" cy="294803"/>
           </a:xfrm>
           <a:prstGeom prst="rect">
@@ -2060,14 +1712,14 @@
       </p:pic>
       <p:sp>
         <p:nvSpPr>
-          <p:cNvPr id="13" name="Text 9"/>
-          <p:cNvSpPr/>
-          <p:nvPr/>
-        </p:nvSpPr>
-        <p:spPr>
-          <a:xfrm>
-            <a:off x="1252728" y="5532120"/>
-            <a:ext cx="2743200" cy="566928"/>
+          <p:cNvPr id="8" name="Text 5"/>
+          <p:cNvSpPr/>
+          <p:nvPr/>
+        </p:nvSpPr>
+        <p:spPr>
+          <a:xfrm>
+            <a:off x="1572768" y="2414016"/>
+            <a:ext cx="4111600" cy="384048"/>
           </a:xfrm>
           <a:prstGeom prst="rect">
             <a:avLst/>
@@ -2083,41 +1735,83 @@
               <a:buNone/>
             </a:pPr>
             <a:r>
-              <a:rPr lang="en-US" sz="1300" dirty="0">
+              <a:rPr lang="en-US" sz="1600" b="1" dirty="0">
                 <a:solidFill>
                   <a:srgbClr val="F3F6FB"/>
+                </a:solidFill>
+                <a:latin typeface="Segoe UI Semibold" pitchFamily="34" charset="0"/>
+                <a:ea typeface="Segoe UI Semibold" pitchFamily="34" charset="-122"/>
+                <a:cs typeface="Segoe UI Semibold" pitchFamily="34" charset="-120"/>
+              </a:rPr>
+              <a:t>A full audit trail</a:t>
+            </a:r>
+            <a:endParaRPr lang="en-US" sz="1600" dirty="0"/>
+          </a:p>
+        </p:txBody>
+      </p:sp>
+      <p:sp>
+        <p:nvSpPr>
+          <p:cNvPr id="9" name="Text 6"/>
+          <p:cNvSpPr/>
+          <p:nvPr/>
+        </p:nvSpPr>
+        <p:spPr>
+          <a:xfrm>
+            <a:off x="1572768" y="2798064"/>
+            <a:ext cx="4111600" cy="457200"/>
+          </a:xfrm>
+          <a:prstGeom prst="rect">
+            <a:avLst/>
+          </a:prstGeom>
+          <a:noFill/>
+          <a:ln/>
+        </p:spPr>
+        <p:txBody>
+          <a:bodyPr wrap="square" rtlCol="0" anchor="ctr"/>
+          <a:lstStyle/>
+          <a:p>
+            <a:pPr marL="0" indent="0">
+              <a:buNone/>
+            </a:pPr>
+            <a:r>
+              <a:rPr lang="en-US" sz="1250" dirty="0">
+                <a:solidFill>
+                  <a:srgbClr val="AAB6C7"/>
                 </a:solidFill>
                 <a:latin typeface="Segoe UI" pitchFamily="34" charset="0"/>
                 <a:ea typeface="Segoe UI" pitchFamily="34" charset="-122"/>
                 <a:cs typeface="Segoe UI" pitchFamily="34" charset="-120"/>
               </a:rPr>
-              <a:t>Ask in plain language</a:t>
-            </a:r>
-            <a:endParaRPr lang="en-US" sz="1300" dirty="0"/>
-          </a:p>
-        </p:txBody>
-      </p:sp>
-      <p:sp>
-        <p:nvSpPr>
-          <p:cNvPr id="14" name="Shape 10"/>
-          <p:cNvSpPr/>
-          <p:nvPr/>
-        </p:nvSpPr>
-        <p:spPr>
-          <a:xfrm>
-            <a:off x="3995928" y="5815584"/>
-            <a:ext cx="640080" cy="0"/>
-          </a:xfrm>
-          <a:prstGeom prst="line">
-            <a:avLst/>
-          </a:prstGeom>
-          <a:noFill/>
-          <a:ln w="25400">
+              <a:t>Every action the co-worker takes is recorded, end to end.</a:t>
+            </a:r>
+            <a:endParaRPr lang="en-US" sz="1250" dirty="0"/>
+          </a:p>
+        </p:txBody>
+      </p:sp>
+      <p:sp>
+        <p:nvSpPr>
+          <p:cNvPr id="10" name="Shape 7"/>
+          <p:cNvSpPr/>
+          <p:nvPr/>
+        </p:nvSpPr>
+        <p:spPr>
+          <a:xfrm>
+            <a:off x="6278728" y="2194560"/>
+            <a:ext cx="5346040" cy="1188720"/>
+          </a:xfrm>
+          <a:prstGeom prst="roundRect">
+            <a:avLst>
+              <a:gd name="adj" fmla="val 6154"/>
+            </a:avLst>
+          </a:prstGeom>
+          <a:solidFill>
+            <a:srgbClr val="141A25"/>
+          </a:solidFill>
+          <a:ln w="13970">
             <a:solidFill>
-              <a:srgbClr val="3BE3E0"/>
+              <a:srgbClr val="36414F"/>
             </a:solidFill>
             <a:prstDash val="solid"/>
-            <a:tailEnd type="triangle"/>
           </a:ln>
         </p:spPr>
         <p:txBody>
@@ -2130,83 +1824,13 @@
       </p:sp>
       <p:sp>
         <p:nvSpPr>
-          <p:cNvPr id="15" name="Text 11"/>
-          <p:cNvSpPr/>
-          <p:nvPr/>
-        </p:nvSpPr>
-        <p:spPr>
-          <a:xfrm>
-            <a:off x="4727448" y="5532120"/>
-            <a:ext cx="2103120" cy="566928"/>
-          </a:xfrm>
-          <a:prstGeom prst="rect">
-            <a:avLst/>
-          </a:prstGeom>
-          <a:noFill/>
-          <a:ln/>
-        </p:spPr>
-        <p:txBody>
-          <a:bodyPr wrap="square" rtlCol="0" anchor="ctr"/>
-          <a:lstStyle/>
-          <a:p>
-            <a:pPr marL="0" indent="0" algn="ctr">
-              <a:buNone/>
-            </a:pPr>
-            <a:r>
-              <a:rPr lang="en-US" sz="1200" i="1" dirty="0">
-                <a:solidFill>
-                  <a:srgbClr val="3BE3E0"/>
-                </a:solidFill>
-                <a:latin typeface="Segoe UI" pitchFamily="34" charset="0"/>
-                <a:ea typeface="Segoe UI" pitchFamily="34" charset="-122"/>
-                <a:cs typeface="Segoe UI" pitchFamily="34" charset="-120"/>
-              </a:rPr>
-              <a:t>Digital Co-Worker</a:t>
-            </a:r>
-            <a:endParaRPr lang="en-US" sz="1200" dirty="0"/>
-          </a:p>
-        </p:txBody>
-      </p:sp>
-      <p:sp>
-        <p:nvSpPr>
-          <p:cNvPr id="16" name="Shape 12"/>
-          <p:cNvSpPr/>
-          <p:nvPr/>
-        </p:nvSpPr>
-        <p:spPr>
-          <a:xfrm>
-            <a:off x="6876288" y="5815584"/>
-            <a:ext cx="640080" cy="0"/>
-          </a:xfrm>
-          <a:prstGeom prst="line">
-            <a:avLst/>
-          </a:prstGeom>
-          <a:noFill/>
-          <a:ln w="25400">
-            <a:solidFill>
-              <a:srgbClr val="3BE3E0"/>
-            </a:solidFill>
-            <a:prstDash val="solid"/>
-            <a:tailEnd type="triangle"/>
-          </a:ln>
-        </p:spPr>
-        <p:txBody>
-          <a:bodyPr/>
-          <a:lstStyle/>
-          <a:p>
-            <a:endParaRPr lang="en-US"/>
-          </a:p>
-        </p:txBody>
-      </p:sp>
-      <p:sp>
-        <p:nvSpPr>
-          <p:cNvPr id="17" name="Shape 13"/>
-          <p:cNvSpPr/>
-          <p:nvPr/>
-        </p:nvSpPr>
-        <p:spPr>
-          <a:xfrm>
-            <a:off x="7653528" y="5532120"/>
+          <p:cNvPr id="11" name="Shape 8"/>
+          <p:cNvSpPr/>
+          <p:nvPr/>
+        </p:nvSpPr>
+        <p:spPr>
+          <a:xfrm>
+            <a:off x="6534760" y="2496312"/>
             <a:ext cx="566928" cy="566928"/>
           </a:xfrm>
           <a:prstGeom prst="roundRect">
@@ -2234,7 +1858,177 @@
       </p:sp>
       <p:pic>
         <p:nvPicPr>
-          <p:cNvPr id="18" name="Image 2" descr="C:/Users/neuma_p1qrsic/Repo/agentic-ops1/.scratch/icons/database.png"/>
+          <p:cNvPr id="12" name="Image 1" descr="C:/Users/neuma_p1qrsic/Repo/agentic-ops1/.scratch/icons/shield.png"/>
+          <p:cNvPicPr>
+            <a:picLocks noChangeAspect="1"/>
+          </p:cNvPicPr>
+          <p:nvPr/>
+        </p:nvPicPr>
+        <p:blipFill>
+          <a:blip r:embed="rId4"/>
+          <a:stretch>
+            <a:fillRect/>
+          </a:stretch>
+        </p:blipFill>
+        <p:spPr>
+          <a:xfrm>
+            <a:off x="6670822" y="2632375"/>
+            <a:ext cx="294803" cy="294803"/>
+          </a:xfrm>
+          <a:prstGeom prst="rect">
+            <a:avLst/>
+          </a:prstGeom>
+        </p:spPr>
+      </p:pic>
+      <p:sp>
+        <p:nvSpPr>
+          <p:cNvPr id="13" name="Text 9"/>
+          <p:cNvSpPr/>
+          <p:nvPr/>
+        </p:nvSpPr>
+        <p:spPr>
+          <a:xfrm>
+            <a:off x="7284568" y="2414016"/>
+            <a:ext cx="4111600" cy="384048"/>
+          </a:xfrm>
+          <a:prstGeom prst="rect">
+            <a:avLst/>
+          </a:prstGeom>
+          <a:noFill/>
+          <a:ln/>
+        </p:spPr>
+        <p:txBody>
+          <a:bodyPr wrap="square" rtlCol="0" anchor="ctr"/>
+          <a:lstStyle/>
+          <a:p>
+            <a:pPr marL="0" indent="0">
+              <a:buNone/>
+            </a:pPr>
+            <a:r>
+              <a:rPr lang="en-US" sz="1600" b="1" dirty="0">
+                <a:solidFill>
+                  <a:srgbClr val="F3F6FB"/>
+                </a:solidFill>
+                <a:latin typeface="Segoe UI Semibold" pitchFamily="34" charset="0"/>
+                <a:ea typeface="Segoe UI Semibold" pitchFamily="34" charset="-122"/>
+                <a:cs typeface="Segoe UI Semibold" pitchFamily="34" charset="-120"/>
+              </a:rPr>
+              <a:t>Approvals where you want them</a:t>
+            </a:r>
+            <a:endParaRPr lang="en-US" sz="1600" dirty="0"/>
+          </a:p>
+        </p:txBody>
+      </p:sp>
+      <p:sp>
+        <p:nvSpPr>
+          <p:cNvPr id="14" name="Text 10"/>
+          <p:cNvSpPr/>
+          <p:nvPr/>
+        </p:nvSpPr>
+        <p:spPr>
+          <a:xfrm>
+            <a:off x="7284568" y="2798064"/>
+            <a:ext cx="4111600" cy="457200"/>
+          </a:xfrm>
+          <a:prstGeom prst="rect">
+            <a:avLst/>
+          </a:prstGeom>
+          <a:noFill/>
+          <a:ln/>
+        </p:spPr>
+        <p:txBody>
+          <a:bodyPr wrap="square" rtlCol="0" anchor="ctr"/>
+          <a:lstStyle/>
+          <a:p>
+            <a:pPr marL="0" indent="0">
+              <a:buNone/>
+            </a:pPr>
+            <a:r>
+              <a:rPr lang="en-US" sz="1250" dirty="0">
+                <a:solidFill>
+                  <a:srgbClr val="AAB6C7"/>
+                </a:solidFill>
+                <a:latin typeface="Segoe UI" pitchFamily="34" charset="0"/>
+                <a:ea typeface="Segoe UI" pitchFamily="34" charset="-122"/>
+                <a:cs typeface="Segoe UI" pitchFamily="34" charset="-120"/>
+              </a:rPr>
+              <a:t>The moves that matter wait for a person to sign off.</a:t>
+            </a:r>
+            <a:endParaRPr lang="en-US" sz="1250" dirty="0"/>
+          </a:p>
+        </p:txBody>
+      </p:sp>
+      <p:sp>
+        <p:nvSpPr>
+          <p:cNvPr id="15" name="Shape 11"/>
+          <p:cNvSpPr/>
+          <p:nvPr/>
+        </p:nvSpPr>
+        <p:spPr>
+          <a:xfrm>
+            <a:off x="566928" y="3547872"/>
+            <a:ext cx="5346040" cy="1188720"/>
+          </a:xfrm>
+          <a:prstGeom prst="roundRect">
+            <a:avLst>
+              <a:gd name="adj" fmla="val 6154"/>
+            </a:avLst>
+          </a:prstGeom>
+          <a:solidFill>
+            <a:srgbClr val="141A25"/>
+          </a:solidFill>
+          <a:ln w="13970">
+            <a:solidFill>
+              <a:srgbClr val="36414F"/>
+            </a:solidFill>
+            <a:prstDash val="solid"/>
+          </a:ln>
+        </p:spPr>
+        <p:txBody>
+          <a:bodyPr/>
+          <a:lstStyle/>
+          <a:p>
+            <a:endParaRPr lang="en-US"/>
+          </a:p>
+        </p:txBody>
+      </p:sp>
+      <p:sp>
+        <p:nvSpPr>
+          <p:cNvPr id="16" name="Shape 12"/>
+          <p:cNvSpPr/>
+          <p:nvPr/>
+        </p:nvSpPr>
+        <p:spPr>
+          <a:xfrm>
+            <a:off x="822960" y="3849624"/>
+            <a:ext cx="566928" cy="566928"/>
+          </a:xfrm>
+          <a:prstGeom prst="roundRect">
+            <a:avLst>
+              <a:gd name="adj" fmla="val 17742"/>
+            </a:avLst>
+          </a:prstGeom>
+          <a:solidFill>
+            <a:srgbClr val="1B2330"/>
+          </a:solidFill>
+          <a:ln w="15240">
+            <a:solidFill>
+              <a:srgbClr val="3BE3E0"/>
+            </a:solidFill>
+            <a:prstDash val="solid"/>
+          </a:ln>
+        </p:spPr>
+        <p:txBody>
+          <a:bodyPr/>
+          <a:lstStyle/>
+          <a:p>
+            <a:endParaRPr lang="en-US"/>
+          </a:p>
+        </p:txBody>
+      </p:sp>
+      <p:pic>
+        <p:nvPicPr>
+          <p:cNvPr id="17" name="Image 2" descr="C:/Users/neuma_p1qrsic/Repo/agentic-ops1/.scratch/icons/eye.png"/>
           <p:cNvPicPr>
             <a:picLocks noChangeAspect="1"/>
           </p:cNvPicPr>
@@ -2248,7 +2042,7 @@
         </p:blipFill>
         <p:spPr>
           <a:xfrm>
-            <a:off x="7789591" y="5668183"/>
+            <a:off x="959023" y="3985687"/>
             <a:ext cx="294803" cy="294803"/>
           </a:xfrm>
           <a:prstGeom prst="rect">
@@ -2258,14 +2052,53 @@
       </p:pic>
       <p:sp>
         <p:nvSpPr>
+          <p:cNvPr id="18" name="Text 13"/>
+          <p:cNvSpPr/>
+          <p:nvPr/>
+        </p:nvSpPr>
+        <p:spPr>
+          <a:xfrm>
+            <a:off x="1572768" y="3767328"/>
+            <a:ext cx="4111600" cy="384048"/>
+          </a:xfrm>
+          <a:prstGeom prst="rect">
+            <a:avLst/>
+          </a:prstGeom>
+          <a:noFill/>
+          <a:ln/>
+        </p:spPr>
+        <p:txBody>
+          <a:bodyPr wrap="square" rtlCol="0" anchor="ctr"/>
+          <a:lstStyle/>
+          <a:p>
+            <a:pPr marL="0" indent="0">
+              <a:buNone/>
+            </a:pPr>
+            <a:r>
+              <a:rPr lang="en-US" sz="1600" b="1" dirty="0">
+                <a:solidFill>
+                  <a:srgbClr val="F3F6FB"/>
+                </a:solidFill>
+                <a:latin typeface="Segoe UI Semibold" pitchFamily="34" charset="0"/>
+                <a:ea typeface="Segoe UI Semibold" pitchFamily="34" charset="-122"/>
+                <a:cs typeface="Segoe UI Semibold" pitchFamily="34" charset="-120"/>
+              </a:rPr>
+              <a:t>Automatic checks</a:t>
+            </a:r>
+            <a:endParaRPr lang="en-US" sz="1600" dirty="0"/>
+          </a:p>
+        </p:txBody>
+      </p:sp>
+      <p:sp>
+        <p:nvSpPr>
           <p:cNvPr id="19" name="Text 14"/>
           <p:cNvSpPr/>
           <p:nvPr/>
         </p:nvSpPr>
         <p:spPr>
           <a:xfrm>
-            <a:off x="8339328" y="5532120"/>
-            <a:ext cx="2743200" cy="566928"/>
+            <a:off x="1572768" y="4151376"/>
+            <a:ext cx="4111600" cy="457200"/>
           </a:xfrm>
           <a:prstGeom prst="rect">
             <a:avLst/>
@@ -2281,21 +2114,655 @@
               <a:buNone/>
             </a:pPr>
             <a:r>
-              <a:rPr lang="en-US" sz="1300" dirty="0">
-                <a:solidFill>
-                  <a:srgbClr val="F3F6FB"/>
+              <a:rPr lang="en-US" sz="1250" dirty="0">
+                <a:solidFill>
+                  <a:srgbClr val="AAB6C7"/>
                 </a:solidFill>
                 <a:latin typeface="Segoe UI" pitchFamily="34" charset="0"/>
                 <a:ea typeface="Segoe UI" pitchFamily="34" charset="-122"/>
                 <a:cs typeface="Segoe UI" pitchFamily="34" charset="-120"/>
               </a:rPr>
-              <a:t>Done in your systems</a:t>
-            </a:r>
-            <a:endParaRPr lang="en-US" sz="1300" dirty="0"/>
+              <a:t>Odd or bad data is caught before it reaches a system.</a:t>
+            </a:r>
+            <a:endParaRPr lang="en-US" sz="1250" dirty="0"/>
+          </a:p>
+        </p:txBody>
+      </p:sp>
+      <p:sp>
+        <p:nvSpPr>
+          <p:cNvPr id="20" name="Shape 15"/>
+          <p:cNvSpPr/>
+          <p:nvPr/>
+        </p:nvSpPr>
+        <p:spPr>
+          <a:xfrm>
+            <a:off x="6278728" y="3547872"/>
+            <a:ext cx="5346040" cy="1188720"/>
+          </a:xfrm>
+          <a:prstGeom prst="roundRect">
+            <a:avLst>
+              <a:gd name="adj" fmla="val 6154"/>
+            </a:avLst>
+          </a:prstGeom>
+          <a:solidFill>
+            <a:srgbClr val="141A25"/>
+          </a:solidFill>
+          <a:ln w="13970">
+            <a:solidFill>
+              <a:srgbClr val="36414F"/>
+            </a:solidFill>
+            <a:prstDash val="solid"/>
+          </a:ln>
+        </p:spPr>
+        <p:txBody>
+          <a:bodyPr/>
+          <a:lstStyle/>
+          <a:p>
+            <a:endParaRPr lang="en-US"/>
+          </a:p>
+        </p:txBody>
+      </p:sp>
+      <p:sp>
+        <p:nvSpPr>
+          <p:cNvPr id="21" name="Shape 16"/>
+          <p:cNvSpPr/>
+          <p:nvPr/>
+        </p:nvSpPr>
+        <p:spPr>
+          <a:xfrm>
+            <a:off x="6534760" y="3849624"/>
+            <a:ext cx="566928" cy="566928"/>
+          </a:xfrm>
+          <a:prstGeom prst="roundRect">
+            <a:avLst>
+              <a:gd name="adj" fmla="val 17742"/>
+            </a:avLst>
+          </a:prstGeom>
+          <a:solidFill>
+            <a:srgbClr val="1B2330"/>
+          </a:solidFill>
+          <a:ln w="15240">
+            <a:solidFill>
+              <a:srgbClr val="3BE3E0"/>
+            </a:solidFill>
+            <a:prstDash val="solid"/>
+          </a:ln>
+        </p:spPr>
+        <p:txBody>
+          <a:bodyPr/>
+          <a:lstStyle/>
+          <a:p>
+            <a:endParaRPr lang="en-US"/>
+          </a:p>
+        </p:txBody>
+      </p:sp>
+      <p:pic>
+        <p:nvPicPr>
+          <p:cNvPr id="22" name="Image 3" descr="C:/Users/neuma_p1qrsic/Repo/agentic-ops1/.scratch/icons/bell.png"/>
+          <p:cNvPicPr>
+            <a:picLocks noChangeAspect="1"/>
+          </p:cNvPicPr>
+          <p:nvPr/>
+        </p:nvPicPr>
+        <p:blipFill>
+          <a:blip r:embed="rId6"/>
+          <a:stretch>
+            <a:fillRect/>
+          </a:stretch>
+        </p:blipFill>
+        <p:spPr>
+          <a:xfrm>
+            <a:off x="6670822" y="3985687"/>
+            <a:ext cx="294803" cy="294803"/>
+          </a:xfrm>
+          <a:prstGeom prst="rect">
+            <a:avLst/>
+          </a:prstGeom>
+        </p:spPr>
+      </p:pic>
+      <p:sp>
+        <p:nvSpPr>
+          <p:cNvPr id="23" name="Text 17"/>
+          <p:cNvSpPr/>
+          <p:nvPr/>
+        </p:nvSpPr>
+        <p:spPr>
+          <a:xfrm>
+            <a:off x="7284568" y="3767328"/>
+            <a:ext cx="4111600" cy="384048"/>
+          </a:xfrm>
+          <a:prstGeom prst="rect">
+            <a:avLst/>
+          </a:prstGeom>
+          <a:noFill/>
+          <a:ln/>
+        </p:spPr>
+        <p:txBody>
+          <a:bodyPr wrap="square" rtlCol="0" anchor="ctr"/>
+          <a:lstStyle/>
+          <a:p>
+            <a:pPr marL="0" indent="0">
+              <a:buNone/>
+            </a:pPr>
+            <a:r>
+              <a:rPr lang="en-US" sz="1600" b="1" dirty="0">
+                <a:solidFill>
+                  <a:srgbClr val="F3F6FB"/>
+                </a:solidFill>
+                <a:latin typeface="Segoe UI Semibold" pitchFamily="34" charset="0"/>
+                <a:ea typeface="Segoe UI Semibold" pitchFamily="34" charset="-122"/>
+                <a:cs typeface="Segoe UI Semibold" pitchFamily="34" charset="-120"/>
+              </a:rPr>
+              <a:t>Alerts on exceptions</a:t>
+            </a:r>
+            <a:endParaRPr lang="en-US" sz="1600" dirty="0"/>
+          </a:p>
+        </p:txBody>
+      </p:sp>
+      <p:sp>
+        <p:nvSpPr>
+          <p:cNvPr id="24" name="Text 18"/>
+          <p:cNvSpPr/>
+          <p:nvPr/>
+        </p:nvSpPr>
+        <p:spPr>
+          <a:xfrm>
+            <a:off x="7284568" y="4151376"/>
+            <a:ext cx="4111600" cy="457200"/>
+          </a:xfrm>
+          <a:prstGeom prst="rect">
+            <a:avLst/>
+          </a:prstGeom>
+          <a:noFill/>
+          <a:ln/>
+        </p:spPr>
+        <p:txBody>
+          <a:bodyPr wrap="square" rtlCol="0" anchor="ctr"/>
+          <a:lstStyle/>
+          <a:p>
+            <a:pPr marL="0" indent="0">
+              <a:buNone/>
+            </a:pPr>
+            <a:r>
+              <a:rPr lang="en-US" sz="1250" dirty="0">
+                <a:solidFill>
+                  <a:srgbClr val="AAB6C7"/>
+                </a:solidFill>
+                <a:latin typeface="Segoe UI" pitchFamily="34" charset="0"/>
+                <a:ea typeface="Segoe UI" pitchFamily="34" charset="-122"/>
+                <a:cs typeface="Segoe UI" pitchFamily="34" charset="-120"/>
+              </a:rPr>
+              <a:t>You hear about the odd one out; the rest just runs.</a:t>
+            </a:r>
+            <a:endParaRPr lang="en-US" sz="1250" dirty="0"/>
+          </a:p>
+        </p:txBody>
+      </p:sp>
+      <p:sp>
+        <p:nvSpPr>
+          <p:cNvPr id="25" name="Shape 19"/>
+          <p:cNvSpPr/>
+          <p:nvPr/>
+        </p:nvSpPr>
+        <p:spPr>
+          <a:xfrm>
+            <a:off x="566928" y="4901184"/>
+            <a:ext cx="5346040" cy="1188720"/>
+          </a:xfrm>
+          <a:prstGeom prst="roundRect">
+            <a:avLst>
+              <a:gd name="adj" fmla="val 6154"/>
+            </a:avLst>
+          </a:prstGeom>
+          <a:solidFill>
+            <a:srgbClr val="141A25"/>
+          </a:solidFill>
+          <a:ln w="13970">
+            <a:solidFill>
+              <a:srgbClr val="36414F"/>
+            </a:solidFill>
+            <a:prstDash val="solid"/>
+          </a:ln>
+        </p:spPr>
+        <p:txBody>
+          <a:bodyPr/>
+          <a:lstStyle/>
+          <a:p>
+            <a:endParaRPr lang="en-US"/>
+          </a:p>
+        </p:txBody>
+      </p:sp>
+      <p:sp>
+        <p:nvSpPr>
+          <p:cNvPr id="26" name="Shape 20"/>
+          <p:cNvSpPr/>
+          <p:nvPr/>
+        </p:nvSpPr>
+        <p:spPr>
+          <a:xfrm>
+            <a:off x="822960" y="5202936"/>
+            <a:ext cx="566928" cy="566928"/>
+          </a:xfrm>
+          <a:prstGeom prst="roundRect">
+            <a:avLst>
+              <a:gd name="adj" fmla="val 17742"/>
+            </a:avLst>
+          </a:prstGeom>
+          <a:solidFill>
+            <a:srgbClr val="1B2330"/>
+          </a:solidFill>
+          <a:ln w="15240">
+            <a:solidFill>
+              <a:srgbClr val="3BE3E0"/>
+            </a:solidFill>
+            <a:prstDash val="solid"/>
+          </a:ln>
+        </p:spPr>
+        <p:txBody>
+          <a:bodyPr/>
+          <a:lstStyle/>
+          <a:p>
+            <a:endParaRPr lang="en-US"/>
+          </a:p>
+        </p:txBody>
+      </p:sp>
+      <p:pic>
+        <p:nvPicPr>
+          <p:cNvPr id="27" name="Image 4" descr="C:/Users/neuma_p1qrsic/Repo/agentic-ops1/.scratch/icons/blocks.png"/>
+          <p:cNvPicPr>
+            <a:picLocks noChangeAspect="1"/>
+          </p:cNvPicPr>
+          <p:nvPr/>
+        </p:nvPicPr>
+        <p:blipFill>
+          <a:blip r:embed="rId7"/>
+          <a:stretch>
+            <a:fillRect/>
+          </a:stretch>
+        </p:blipFill>
+        <p:spPr>
+          <a:xfrm>
+            <a:off x="959023" y="5338999"/>
+            <a:ext cx="294803" cy="294803"/>
+          </a:xfrm>
+          <a:prstGeom prst="rect">
+            <a:avLst/>
+          </a:prstGeom>
+        </p:spPr>
+      </p:pic>
+      <p:sp>
+        <p:nvSpPr>
+          <p:cNvPr id="28" name="Text 21"/>
+          <p:cNvSpPr/>
+          <p:nvPr/>
+        </p:nvSpPr>
+        <p:spPr>
+          <a:xfrm>
+            <a:off x="1572768" y="5120640"/>
+            <a:ext cx="4111600" cy="384048"/>
+          </a:xfrm>
+          <a:prstGeom prst="rect">
+            <a:avLst/>
+          </a:prstGeom>
+          <a:noFill/>
+          <a:ln/>
+        </p:spPr>
+        <p:txBody>
+          <a:bodyPr wrap="square" rtlCol="0" anchor="ctr"/>
+          <a:lstStyle/>
+          <a:p>
+            <a:pPr marL="0" indent="0">
+              <a:buNone/>
+            </a:pPr>
+            <a:r>
+              <a:rPr lang="en-US" sz="1600" b="1" dirty="0">
+                <a:solidFill>
+                  <a:srgbClr val="F3F6FB"/>
+                </a:solidFill>
+                <a:latin typeface="Segoe UI Semibold" pitchFamily="34" charset="0"/>
+                <a:ea typeface="Segoe UI Semibold" pitchFamily="34" charset="-122"/>
+                <a:cs typeface="Segoe UI Semibold" pitchFamily="34" charset="-120"/>
+              </a:rPr>
+              <a:t>No code to change it</a:t>
+            </a:r>
+            <a:endParaRPr lang="en-US" sz="1600" dirty="0"/>
+          </a:p>
+        </p:txBody>
+      </p:sp>
+      <p:sp>
+        <p:nvSpPr>
+          <p:cNvPr id="29" name="Text 22"/>
+          <p:cNvSpPr/>
+          <p:nvPr/>
+        </p:nvSpPr>
+        <p:spPr>
+          <a:xfrm>
+            <a:off x="1572768" y="5504688"/>
+            <a:ext cx="4111600" cy="457200"/>
+          </a:xfrm>
+          <a:prstGeom prst="rect">
+            <a:avLst/>
+          </a:prstGeom>
+          <a:noFill/>
+          <a:ln/>
+        </p:spPr>
+        <p:txBody>
+          <a:bodyPr wrap="square" rtlCol="0" anchor="ctr"/>
+          <a:lstStyle/>
+          <a:p>
+            <a:pPr marL="0" indent="0">
+              <a:buNone/>
+            </a:pPr>
+            <a:r>
+              <a:rPr lang="en-US" sz="1250" dirty="0">
+                <a:solidFill>
+                  <a:srgbClr val="AAB6C7"/>
+                </a:solidFill>
+                <a:latin typeface="Segoe UI" pitchFamily="34" charset="0"/>
+                <a:ea typeface="Segoe UI" pitchFamily="34" charset="-122"/>
+                <a:cs typeface="Segoe UI" pitchFamily="34" charset="-120"/>
+              </a:rPr>
+              <a:t>Your rules, changed by your team, no IT project.</a:t>
+            </a:r>
+            <a:endParaRPr lang="en-US" sz="1250" dirty="0"/>
+          </a:p>
+        </p:txBody>
+      </p:sp>
+      <p:sp>
+        <p:nvSpPr>
+          <p:cNvPr id="30" name="Shape 23"/>
+          <p:cNvSpPr/>
+          <p:nvPr/>
+        </p:nvSpPr>
+        <p:spPr>
+          <a:xfrm>
+            <a:off x="6278728" y="4901184"/>
+            <a:ext cx="5346040" cy="1188720"/>
+          </a:xfrm>
+          <a:prstGeom prst="roundRect">
+            <a:avLst>
+              <a:gd name="adj" fmla="val 6154"/>
+            </a:avLst>
+          </a:prstGeom>
+          <a:solidFill>
+            <a:srgbClr val="141A25"/>
+          </a:solidFill>
+          <a:ln w="13970">
+            <a:solidFill>
+              <a:srgbClr val="36414F"/>
+            </a:solidFill>
+            <a:prstDash val="solid"/>
+          </a:ln>
+        </p:spPr>
+        <p:txBody>
+          <a:bodyPr/>
+          <a:lstStyle/>
+          <a:p>
+            <a:endParaRPr lang="en-US"/>
+          </a:p>
+        </p:txBody>
+      </p:sp>
+      <p:sp>
+        <p:nvSpPr>
+          <p:cNvPr id="31" name="Shape 24"/>
+          <p:cNvSpPr/>
+          <p:nvPr/>
+        </p:nvSpPr>
+        <p:spPr>
+          <a:xfrm>
+            <a:off x="6534760" y="5202936"/>
+            <a:ext cx="566928" cy="566928"/>
+          </a:xfrm>
+          <a:prstGeom prst="roundRect">
+            <a:avLst>
+              <a:gd name="adj" fmla="val 17742"/>
+            </a:avLst>
+          </a:prstGeom>
+          <a:solidFill>
+            <a:srgbClr val="1B2330"/>
+          </a:solidFill>
+          <a:ln w="15240">
+            <a:solidFill>
+              <a:srgbClr val="3BE3E0"/>
+            </a:solidFill>
+            <a:prstDash val="solid"/>
+          </a:ln>
+        </p:spPr>
+        <p:txBody>
+          <a:bodyPr/>
+          <a:lstStyle/>
+          <a:p>
+            <a:endParaRPr lang="en-US"/>
+          </a:p>
+        </p:txBody>
+      </p:sp>
+      <p:pic>
+        <p:nvPicPr>
+          <p:cNvPr id="32" name="Image 5" descr="C:/Users/neuma_p1qrsic/Repo/agentic-ops1/.scratch/icons/lock.png"/>
+          <p:cNvPicPr>
+            <a:picLocks noChangeAspect="1"/>
+          </p:cNvPicPr>
+          <p:nvPr/>
+        </p:nvPicPr>
+        <p:blipFill>
+          <a:blip r:embed="rId8"/>
+          <a:stretch>
+            <a:fillRect/>
+          </a:stretch>
+        </p:blipFill>
+        <p:spPr>
+          <a:xfrm>
+            <a:off x="6670822" y="5338999"/>
+            <a:ext cx="294803" cy="294803"/>
+          </a:xfrm>
+          <a:prstGeom prst="rect">
+            <a:avLst/>
+          </a:prstGeom>
+        </p:spPr>
+      </p:pic>
+      <p:sp>
+        <p:nvSpPr>
+          <p:cNvPr id="33" name="Text 25"/>
+          <p:cNvSpPr/>
+          <p:nvPr/>
+        </p:nvSpPr>
+        <p:spPr>
+          <a:xfrm>
+            <a:off x="7284568" y="5120640"/>
+            <a:ext cx="4111600" cy="384048"/>
+          </a:xfrm>
+          <a:prstGeom prst="rect">
+            <a:avLst/>
+          </a:prstGeom>
+          <a:noFill/>
+          <a:ln/>
+        </p:spPr>
+        <p:txBody>
+          <a:bodyPr wrap="square" rtlCol="0" anchor="ctr"/>
+          <a:lstStyle/>
+          <a:p>
+            <a:pPr marL="0" indent="0">
+              <a:buNone/>
+            </a:pPr>
+            <a:r>
+              <a:rPr lang="en-US" sz="1600" b="1" dirty="0">
+                <a:solidFill>
+                  <a:srgbClr val="F3F6FB"/>
+                </a:solidFill>
+                <a:latin typeface="Segoe UI Semibold" pitchFamily="34" charset="0"/>
+                <a:ea typeface="Segoe UI Semibold" pitchFamily="34" charset="-122"/>
+                <a:cs typeface="Segoe UI Semibold" pitchFamily="34" charset="-120"/>
+              </a:rPr>
+              <a:t>ISO 27001 and SOC 1</a:t>
+            </a:r>
+            <a:endParaRPr lang="en-US" sz="1600" dirty="0"/>
+          </a:p>
+        </p:txBody>
+      </p:sp>
+      <p:sp>
+        <p:nvSpPr>
+          <p:cNvPr id="34" name="Text 26"/>
+          <p:cNvSpPr/>
+          <p:nvPr/>
+        </p:nvSpPr>
+        <p:spPr>
+          <a:xfrm>
+            <a:off x="7284568" y="5504688"/>
+            <a:ext cx="4111600" cy="457200"/>
+          </a:xfrm>
+          <a:prstGeom prst="rect">
+            <a:avLst/>
+          </a:prstGeom>
+          <a:noFill/>
+          <a:ln/>
+        </p:spPr>
+        <p:txBody>
+          <a:bodyPr wrap="square" rtlCol="0" anchor="ctr"/>
+          <a:lstStyle/>
+          <a:p>
+            <a:pPr marL="0" indent="0">
+              <a:buNone/>
+            </a:pPr>
+            <a:r>
+              <a:rPr lang="en-US" sz="1250" dirty="0">
+                <a:solidFill>
+                  <a:srgbClr val="AAB6C7"/>
+                </a:solidFill>
+                <a:latin typeface="Segoe UI" pitchFamily="34" charset="0"/>
+                <a:ea typeface="Segoe UI" pitchFamily="34" charset="-122"/>
+                <a:cs typeface="Segoe UI" pitchFamily="34" charset="-120"/>
+              </a:rPr>
+              <a:t>The security controls your auditors already expect.</a:t>
+            </a:r>
+            <a:endParaRPr lang="en-US" sz="1250" dirty="0"/>
+          </a:p>
+        </p:txBody>
+      </p:sp>
+      <p:sp>
+        <p:nvSpPr>
+          <p:cNvPr id="35" name="Text 27"/>
+          <p:cNvSpPr/>
+          <p:nvPr/>
+        </p:nvSpPr>
+        <p:spPr>
+          <a:xfrm>
+            <a:off x="566928" y="6400800"/>
+            <a:ext cx="8229600" cy="274320"/>
+          </a:xfrm>
+          <a:prstGeom prst="rect">
+            <a:avLst/>
+          </a:prstGeom>
+          <a:noFill/>
+          <a:ln/>
+        </p:spPr>
+        <p:txBody>
+          <a:bodyPr wrap="square" rtlCol="0" anchor="ctr"/>
+          <a:lstStyle/>
+          <a:p>
+            <a:pPr marL="0" indent="0" algn="l">
+              <a:buNone/>
+            </a:pPr>
+            <a:r>
+              <a:rPr lang="en-US" sz="900" b="1" dirty="0">
+                <a:solidFill>
+                  <a:srgbClr val="AAB6C7"/>
+                </a:solidFill>
+                <a:latin typeface="Segoe UI" pitchFamily="34" charset="0"/>
+                <a:ea typeface="Segoe UI" pitchFamily="34" charset="-122"/>
+                <a:cs typeface="Segoe UI" pitchFamily="34" charset="-120"/>
+              </a:rPr>
+              <a:t>Brisken</a:t>
+            </a:r>
+            <a:r>
+              <a:rPr lang="en-US" sz="900" dirty="0">
+                <a:solidFill>
+                  <a:srgbClr val="7C8A9B"/>
+                </a:solidFill>
+                <a:latin typeface="Segoe UI" pitchFamily="34" charset="0"/>
+                <a:ea typeface="Segoe UI" pitchFamily="34" charset="-122"/>
+                <a:cs typeface="Segoe UI" pitchFamily="34" charset="-120"/>
+              </a:rPr>
+              <a:t>   OnePilot</a:t>
+            </a:r>
+            <a:endParaRPr lang="en-US" sz="900" dirty="0"/>
+          </a:p>
+        </p:txBody>
+      </p:sp>
+      <p:sp>
+        <p:nvSpPr>
+          <p:cNvPr id="36" name="Text 28"/>
+          <p:cNvSpPr/>
+          <p:nvPr/>
+        </p:nvSpPr>
+        <p:spPr>
+          <a:xfrm>
+            <a:off x="10527487" y="6400800"/>
+            <a:ext cx="1097280" cy="274320"/>
+          </a:xfrm>
+          <a:prstGeom prst="rect">
+            <a:avLst/>
+          </a:prstGeom>
+          <a:noFill/>
+          <a:ln/>
+        </p:spPr>
+        <p:txBody>
+          <a:bodyPr wrap="square" rtlCol="0" anchor="ctr"/>
+          <a:lstStyle/>
+          <a:p>
+            <a:pPr marL="0" indent="0" algn="r">
+              <a:buNone/>
+            </a:pPr>
+            <a:r>
+              <a:rPr lang="en-US" sz="900">
+                <a:solidFill>
+                  <a:srgbClr val="AAB6C7"/>
+                </a:solidFill>
+                <a:latin typeface="Segoe UI" pitchFamily="34" charset="0"/>
+                <a:ea typeface="Segoe UI" pitchFamily="34" charset="-122"/>
+                <a:cs typeface="Segoe UI" pitchFamily="34" charset="-120"/>
+              </a:rPr>
+              <a:t>08 / 11</a:t>
+            </a:r>
+            <a:endParaRPr lang="en-US" sz="900" dirty="0"/>
+          </a:p>
+        </p:txBody>
+      </p:sp>
+      <p:sp>
+        <p:nvSpPr>
+          <p:cNvPr id="37" name="Shape 29"/>
+          <p:cNvSpPr/>
+          <p:nvPr/>
+        </p:nvSpPr>
+        <p:spPr>
+          <a:xfrm>
+            <a:off x="566928" y="6327648"/>
+            <a:ext cx="11057839" cy="0"/>
+          </a:xfrm>
+          <a:prstGeom prst="line">
+            <a:avLst/>
+          </a:prstGeom>
+          <a:noFill/>
+          <a:ln w="9525">
+            <a:solidFill>
+              <a:srgbClr val="36414F"/>
+            </a:solidFill>
+            <a:prstDash val="solid"/>
+          </a:ln>
+        </p:spPr>
+        <p:txBody>
+          <a:bodyPr/>
+          <a:lstStyle/>
+          <a:p>
+            <a:endParaRPr lang="en-US"/>
           </a:p>
         </p:txBody>
       </p:sp>
     </p:spTree>
+    <p:extLst>
+      <p:ext uri="{BB962C8B-B14F-4D97-AF65-F5344CB8AC3E}">
+        <p14:creationId xmlns:p14="http://schemas.microsoft.com/office/powerpoint/2010/main" val="2005252428"/>
+      </p:ext>
+    </p:extLst>
   </p:cSld>
   <p:clrMapOvr>
     <a:masterClrMapping/>
@@ -2303,7 +2770,862 @@
 </p:sld>
 </file>
 
-<file path=ppt/slides/slide10.xml><?xml version="1.0" encoding="utf-8"?>
+<file path=ppt/slides/slide17.xml><?xml version="1.0" encoding="utf-8"?>
+<p:sld xmlns:a="http://schemas.openxmlformats.org/drawingml/2006/main" xmlns:r="http://schemas.openxmlformats.org/officeDocument/2006/relationships" xmlns:p="http://schemas.openxmlformats.org/presentationml/2006/main">
+  <p:cSld name="Slide 9">
+    <p:bg>
+      <p:bgPr>
+        <a:solidFill>
+          <a:srgbClr val="0E121B"/>
+        </a:solidFill>
+        <a:effectLst/>
+      </p:bgPr>
+    </p:bg>
+    <p:spTree>
+      <p:nvGrpSpPr>
+        <p:cNvPr id="1" name=""/>
+        <p:cNvGrpSpPr/>
+        <p:nvPr/>
+      </p:nvGrpSpPr>
+      <p:grpSpPr>
+        <a:xfrm>
+          <a:off x="0" y="0"/>
+          <a:ext cx="0" cy="0"/>
+          <a:chOff x="0" y="0"/>
+          <a:chExt cx="0" cy="0"/>
+        </a:xfrm>
+      </p:grpSpPr>
+      <p:sp>
+        <p:nvSpPr>
+          <p:cNvPr id="2" name="Shape 0"/>
+          <p:cNvSpPr/>
+          <p:nvPr/>
+        </p:nvSpPr>
+        <p:spPr>
+          <a:xfrm>
+            <a:off x="566928" y="585216"/>
+            <a:ext cx="45720" cy="219456"/>
+          </a:xfrm>
+          <a:prstGeom prst="rect">
+            <a:avLst/>
+          </a:prstGeom>
+          <a:solidFill>
+            <a:srgbClr val="3BE3E0"/>
+          </a:solidFill>
+          <a:ln w="12700">
+            <a:solidFill>
+              <a:srgbClr val="333333"/>
+            </a:solidFill>
+            <a:prstDash val="solid"/>
+          </a:ln>
+        </p:spPr>
+        <p:txBody>
+          <a:bodyPr/>
+          <a:lstStyle/>
+          <a:p>
+            <a:endParaRPr lang="en-US"/>
+          </a:p>
+        </p:txBody>
+      </p:sp>
+      <p:sp>
+        <p:nvSpPr>
+          <p:cNvPr id="3" name="Text 1"/>
+          <p:cNvSpPr/>
+          <p:nvPr/>
+        </p:nvSpPr>
+        <p:spPr>
+          <a:xfrm>
+            <a:off x="713232" y="512064"/>
+            <a:ext cx="8229600" cy="329184"/>
+          </a:xfrm>
+          <a:prstGeom prst="rect">
+            <a:avLst/>
+          </a:prstGeom>
+          <a:noFill/>
+          <a:ln/>
+        </p:spPr>
+        <p:txBody>
+          <a:bodyPr wrap="square" rtlCol="0" anchor="ctr"/>
+          <a:lstStyle/>
+          <a:p>
+            <a:pPr marL="0" indent="0" algn="l">
+              <a:buNone/>
+            </a:pPr>
+            <a:r>
+              <a:rPr lang="en-US" sz="1200" b="1" kern="0" spc="200" dirty="0">
+                <a:solidFill>
+                  <a:srgbClr val="3BE3E0"/>
+                </a:solidFill>
+                <a:latin typeface="Segoe UI Semibold" pitchFamily="34" charset="0"/>
+                <a:ea typeface="Segoe UI Semibold" pitchFamily="34" charset="-122"/>
+                <a:cs typeface="Segoe UI Semibold" pitchFamily="34" charset="-120"/>
+              </a:rPr>
+              <a:t>WHAT IT RUNS ON</a:t>
+            </a:r>
+            <a:endParaRPr lang="en-US" sz="1200" dirty="0"/>
+          </a:p>
+        </p:txBody>
+      </p:sp>
+      <p:sp>
+        <p:nvSpPr>
+          <p:cNvPr id="4" name="Text 2"/>
+          <p:cNvSpPr/>
+          <p:nvPr/>
+        </p:nvSpPr>
+        <p:spPr>
+          <a:xfrm>
+            <a:off x="566928" y="960120"/>
+            <a:ext cx="10789920" cy="731520"/>
+          </a:xfrm>
+          <a:prstGeom prst="rect">
+            <a:avLst/>
+          </a:prstGeom>
+          <a:noFill/>
+          <a:ln/>
+        </p:spPr>
+        <p:txBody>
+          <a:bodyPr wrap="square" rtlCol="0" anchor="ctr"/>
+          <a:lstStyle/>
+          <a:p>
+            <a:pPr marL="0" indent="0">
+              <a:buNone/>
+            </a:pPr>
+            <a:r>
+              <a:rPr lang="en-US" sz="2900" b="1" dirty="0">
+                <a:solidFill>
+                  <a:srgbClr val="F3F6FB"/>
+                </a:solidFill>
+                <a:latin typeface="Segoe UI Semibold" pitchFamily="34" charset="0"/>
+                <a:ea typeface="Segoe UI Semibold" pitchFamily="34" charset="-122"/>
+                <a:cs typeface="Segoe UI Semibold" pitchFamily="34" charset="-120"/>
+              </a:rPr>
+              <a:t>Digital Co-Worker is one app on </a:t>
+            </a:r>
+            <a:r>
+              <a:rPr lang="en-US" sz="2900" b="1" dirty="0">
+                <a:solidFill>
+                  <a:srgbClr val="3BE3E0"/>
+                </a:solidFill>
+                <a:latin typeface="Segoe UI Semibold" pitchFamily="34" charset="0"/>
+                <a:ea typeface="Segoe UI Semibold" pitchFamily="34" charset="-122"/>
+                <a:cs typeface="Segoe UI Semibold" pitchFamily="34" charset="-120"/>
+              </a:rPr>
+              <a:t>OnePilot</a:t>
+            </a:r>
+            <a:r>
+              <a:rPr lang="en-US" sz="2900" b="1" dirty="0">
+                <a:solidFill>
+                  <a:srgbClr val="F3F6FB"/>
+                </a:solidFill>
+                <a:latin typeface="Segoe UI Semibold" pitchFamily="34" charset="0"/>
+                <a:ea typeface="Segoe UI Semibold" pitchFamily="34" charset="-122"/>
+                <a:cs typeface="Segoe UI Semibold" pitchFamily="34" charset="-120"/>
+              </a:rPr>
+              <a:t>.</a:t>
+            </a:r>
+            <a:endParaRPr lang="en-US" sz="2900" dirty="0"/>
+          </a:p>
+        </p:txBody>
+      </p:sp>
+      <p:sp>
+        <p:nvSpPr>
+          <p:cNvPr id="5" name="Text 3"/>
+          <p:cNvSpPr/>
+          <p:nvPr/>
+        </p:nvSpPr>
+        <p:spPr>
+          <a:xfrm>
+            <a:off x="566928" y="1828800"/>
+            <a:ext cx="10607040" cy="1051560"/>
+          </a:xfrm>
+          <a:prstGeom prst="rect">
+            <a:avLst/>
+          </a:prstGeom>
+          <a:noFill/>
+          <a:ln/>
+        </p:spPr>
+        <p:txBody>
+          <a:bodyPr wrap="square" rtlCol="0" anchor="ctr"/>
+          <a:lstStyle/>
+          <a:p>
+            <a:pPr marL="0" indent="0">
+              <a:lnSpc>
+                <a:spcPct val="130000"/>
+              </a:lnSpc>
+              <a:buNone/>
+            </a:pPr>
+            <a:r>
+              <a:rPr lang="en-US" sz="1600" dirty="0">
+                <a:solidFill>
+                  <a:srgbClr val="AAB6C7"/>
+                </a:solidFill>
+                <a:latin typeface="Segoe UI" pitchFamily="34" charset="0"/>
+                <a:ea typeface="Segoe UI" pitchFamily="34" charset="-122"/>
+                <a:cs typeface="Segoe UI" pitchFamily="34" charset="-120"/>
+              </a:rPr>
+              <a:t>OnePilot is the layer underneath. It moves your data cleanly between systems, both ways, across SAP and everything else, with the checks and the AI built in. One way to connect to all of it:</a:t>
+            </a:r>
+            <a:endParaRPr lang="en-US" sz="1600" dirty="0"/>
+          </a:p>
+        </p:txBody>
+      </p:sp>
+      <p:sp>
+        <p:nvSpPr>
+          <p:cNvPr id="6" name="Shape 4"/>
+          <p:cNvSpPr/>
+          <p:nvPr/>
+        </p:nvSpPr>
+        <p:spPr>
+          <a:xfrm>
+            <a:off x="566928" y="3246120"/>
+            <a:ext cx="1992112" cy="1554480"/>
+          </a:xfrm>
+          <a:prstGeom prst="roundRect">
+            <a:avLst>
+              <a:gd name="adj" fmla="val 5882"/>
+            </a:avLst>
+          </a:prstGeom>
+          <a:solidFill>
+            <a:srgbClr val="141A25"/>
+          </a:solidFill>
+          <a:ln w="13970">
+            <a:solidFill>
+              <a:srgbClr val="36414F"/>
+            </a:solidFill>
+            <a:prstDash val="solid"/>
+          </a:ln>
+        </p:spPr>
+        <p:txBody>
+          <a:bodyPr/>
+          <a:lstStyle/>
+          <a:p>
+            <a:endParaRPr lang="en-US"/>
+          </a:p>
+        </p:txBody>
+      </p:sp>
+      <p:pic>
+        <p:nvPicPr>
+          <p:cNvPr id="7" name="Image 0" descr="C:/Users/neuma_p1qrsic/Repo/agentic-ops1/.scratch/icons/database.png"/>
+          <p:cNvPicPr>
+            <a:picLocks noChangeAspect="1"/>
+          </p:cNvPicPr>
+          <p:nvPr/>
+        </p:nvPicPr>
+        <p:blipFill>
+          <a:blip r:embed="rId3"/>
+          <a:stretch>
+            <a:fillRect/>
+          </a:stretch>
+        </p:blipFill>
+        <p:spPr>
+          <a:xfrm>
+            <a:off x="1252088" y="3538728"/>
+            <a:ext cx="621792" cy="621792"/>
+          </a:xfrm>
+          <a:prstGeom prst="rect">
+            <a:avLst/>
+          </a:prstGeom>
+        </p:spPr>
+      </p:pic>
+      <p:sp>
+        <p:nvSpPr>
+          <p:cNvPr id="8" name="Text 5"/>
+          <p:cNvSpPr/>
+          <p:nvPr/>
+        </p:nvSpPr>
+        <p:spPr>
+          <a:xfrm>
+            <a:off x="640080" y="4233672"/>
+            <a:ext cx="1845808" cy="457200"/>
+          </a:xfrm>
+          <a:prstGeom prst="rect">
+            <a:avLst/>
+          </a:prstGeom>
+          <a:noFill/>
+          <a:ln/>
+        </p:spPr>
+        <p:txBody>
+          <a:bodyPr wrap="square" rtlCol="0" anchor="ctr"/>
+          <a:lstStyle/>
+          <a:p>
+            <a:pPr marL="0" indent="0" algn="ctr">
+              <a:buNone/>
+            </a:pPr>
+            <a:r>
+              <a:rPr lang="en-US" sz="1300" dirty="0">
+                <a:solidFill>
+                  <a:srgbClr val="F3F6FB"/>
+                </a:solidFill>
+                <a:latin typeface="Segoe UI" pitchFamily="34" charset="0"/>
+                <a:ea typeface="Segoe UI" pitchFamily="34" charset="-122"/>
+                <a:cs typeface="Segoe UI" pitchFamily="34" charset="-120"/>
+              </a:rPr>
+              <a:t>SAP systems</a:t>
+            </a:r>
+            <a:endParaRPr lang="en-US" sz="1300" dirty="0"/>
+          </a:p>
+        </p:txBody>
+      </p:sp>
+      <p:sp>
+        <p:nvSpPr>
+          <p:cNvPr id="9" name="Shape 6"/>
+          <p:cNvSpPr/>
+          <p:nvPr/>
+        </p:nvSpPr>
+        <p:spPr>
+          <a:xfrm>
+            <a:off x="2833360" y="3246120"/>
+            <a:ext cx="1992112" cy="1554480"/>
+          </a:xfrm>
+          <a:prstGeom prst="roundRect">
+            <a:avLst>
+              <a:gd name="adj" fmla="val 5882"/>
+            </a:avLst>
+          </a:prstGeom>
+          <a:solidFill>
+            <a:srgbClr val="141A25"/>
+          </a:solidFill>
+          <a:ln w="13970">
+            <a:solidFill>
+              <a:srgbClr val="36414F"/>
+            </a:solidFill>
+            <a:prstDash val="solid"/>
+          </a:ln>
+        </p:spPr>
+        <p:txBody>
+          <a:bodyPr/>
+          <a:lstStyle/>
+          <a:p>
+            <a:endParaRPr lang="en-US"/>
+          </a:p>
+        </p:txBody>
+      </p:sp>
+      <p:pic>
+        <p:nvPicPr>
+          <p:cNvPr id="10" name="Image 1" descr="C:/Users/neuma_p1qrsic/Repo/agentic-ops1/.scratch/icons/sheet.png"/>
+          <p:cNvPicPr>
+            <a:picLocks noChangeAspect="1"/>
+          </p:cNvPicPr>
+          <p:nvPr/>
+        </p:nvPicPr>
+        <p:blipFill>
+          <a:blip r:embed="rId4"/>
+          <a:stretch>
+            <a:fillRect/>
+          </a:stretch>
+        </p:blipFill>
+        <p:spPr>
+          <a:xfrm>
+            <a:off x="3518520" y="3538728"/>
+            <a:ext cx="621792" cy="621792"/>
+          </a:xfrm>
+          <a:prstGeom prst="rect">
+            <a:avLst/>
+          </a:prstGeom>
+        </p:spPr>
+      </p:pic>
+      <p:sp>
+        <p:nvSpPr>
+          <p:cNvPr id="11" name="Text 7"/>
+          <p:cNvSpPr/>
+          <p:nvPr/>
+        </p:nvSpPr>
+        <p:spPr>
+          <a:xfrm>
+            <a:off x="2906512" y="4233672"/>
+            <a:ext cx="1845808" cy="457200"/>
+          </a:xfrm>
+          <a:prstGeom prst="rect">
+            <a:avLst/>
+          </a:prstGeom>
+          <a:noFill/>
+          <a:ln/>
+        </p:spPr>
+        <p:txBody>
+          <a:bodyPr wrap="square" rtlCol="0" anchor="ctr"/>
+          <a:lstStyle/>
+          <a:p>
+            <a:pPr marL="0" indent="0" algn="ctr">
+              <a:buNone/>
+            </a:pPr>
+            <a:r>
+              <a:rPr lang="en-US" sz="1300" dirty="0">
+                <a:solidFill>
+                  <a:srgbClr val="F3F6FB"/>
+                </a:solidFill>
+                <a:latin typeface="Segoe UI" pitchFamily="34" charset="0"/>
+                <a:ea typeface="Segoe UI" pitchFamily="34" charset="-122"/>
+                <a:cs typeface="Segoe UI" pitchFamily="34" charset="-120"/>
+              </a:rPr>
+              <a:t>Spreadsheets &amp; files</a:t>
+            </a:r>
+            <a:endParaRPr lang="en-US" sz="1300" dirty="0"/>
+          </a:p>
+        </p:txBody>
+      </p:sp>
+      <p:sp>
+        <p:nvSpPr>
+          <p:cNvPr id="12" name="Shape 8"/>
+          <p:cNvSpPr/>
+          <p:nvPr/>
+        </p:nvSpPr>
+        <p:spPr>
+          <a:xfrm>
+            <a:off x="5099792" y="3246120"/>
+            <a:ext cx="1992112" cy="1554480"/>
+          </a:xfrm>
+          <a:prstGeom prst="roundRect">
+            <a:avLst>
+              <a:gd name="adj" fmla="val 5882"/>
+            </a:avLst>
+          </a:prstGeom>
+          <a:solidFill>
+            <a:srgbClr val="141A25"/>
+          </a:solidFill>
+          <a:ln w="13970">
+            <a:solidFill>
+              <a:srgbClr val="36414F"/>
+            </a:solidFill>
+            <a:prstDash val="solid"/>
+          </a:ln>
+        </p:spPr>
+        <p:txBody>
+          <a:bodyPr/>
+          <a:lstStyle/>
+          <a:p>
+            <a:endParaRPr lang="en-US"/>
+          </a:p>
+        </p:txBody>
+      </p:sp>
+      <p:pic>
+        <p:nvPicPr>
+          <p:cNvPr id="13" name="Image 2" descr="C:/Users/neuma_p1qrsic/Repo/agentic-ops1/.scratch/icons/mail.png"/>
+          <p:cNvPicPr>
+            <a:picLocks noChangeAspect="1"/>
+          </p:cNvPicPr>
+          <p:nvPr/>
+        </p:nvPicPr>
+        <p:blipFill>
+          <a:blip r:embed="rId5"/>
+          <a:stretch>
+            <a:fillRect/>
+          </a:stretch>
+        </p:blipFill>
+        <p:spPr>
+          <a:xfrm>
+            <a:off x="5784952" y="3538728"/>
+            <a:ext cx="621792" cy="621792"/>
+          </a:xfrm>
+          <a:prstGeom prst="rect">
+            <a:avLst/>
+          </a:prstGeom>
+        </p:spPr>
+      </p:pic>
+      <p:sp>
+        <p:nvSpPr>
+          <p:cNvPr id="14" name="Text 9"/>
+          <p:cNvSpPr/>
+          <p:nvPr/>
+        </p:nvSpPr>
+        <p:spPr>
+          <a:xfrm>
+            <a:off x="5172944" y="4233672"/>
+            <a:ext cx="1845808" cy="457200"/>
+          </a:xfrm>
+          <a:prstGeom prst="rect">
+            <a:avLst/>
+          </a:prstGeom>
+          <a:noFill/>
+          <a:ln/>
+        </p:spPr>
+        <p:txBody>
+          <a:bodyPr wrap="square" rtlCol="0" anchor="ctr"/>
+          <a:lstStyle/>
+          <a:p>
+            <a:pPr marL="0" indent="0" algn="ctr">
+              <a:buNone/>
+            </a:pPr>
+            <a:r>
+              <a:rPr lang="en-US" sz="1300" dirty="0">
+                <a:solidFill>
+                  <a:srgbClr val="F3F6FB"/>
+                </a:solidFill>
+                <a:latin typeface="Segoe UI" pitchFamily="34" charset="0"/>
+                <a:ea typeface="Segoe UI" pitchFamily="34" charset="-122"/>
+                <a:cs typeface="Segoe UI" pitchFamily="34" charset="-120"/>
+              </a:rPr>
+              <a:t>Email</a:t>
+            </a:r>
+            <a:endParaRPr lang="en-US" sz="1300" dirty="0"/>
+          </a:p>
+        </p:txBody>
+      </p:sp>
+      <p:sp>
+        <p:nvSpPr>
+          <p:cNvPr id="15" name="Shape 10"/>
+          <p:cNvSpPr/>
+          <p:nvPr/>
+        </p:nvSpPr>
+        <p:spPr>
+          <a:xfrm>
+            <a:off x="7366224" y="3246120"/>
+            <a:ext cx="1992112" cy="1554480"/>
+          </a:xfrm>
+          <a:prstGeom prst="roundRect">
+            <a:avLst>
+              <a:gd name="adj" fmla="val 5882"/>
+            </a:avLst>
+          </a:prstGeom>
+          <a:solidFill>
+            <a:srgbClr val="141A25"/>
+          </a:solidFill>
+          <a:ln w="13970">
+            <a:solidFill>
+              <a:srgbClr val="36414F"/>
+            </a:solidFill>
+            <a:prstDash val="solid"/>
+          </a:ln>
+        </p:spPr>
+        <p:txBody>
+          <a:bodyPr/>
+          <a:lstStyle/>
+          <a:p>
+            <a:endParaRPr lang="en-US"/>
+          </a:p>
+        </p:txBody>
+      </p:sp>
+      <p:pic>
+        <p:nvPicPr>
+          <p:cNvPr id="16" name="Image 3" descr="C:/Users/neuma_p1qrsic/Repo/agentic-ops1/.scratch/icons/globe.png"/>
+          <p:cNvPicPr>
+            <a:picLocks noChangeAspect="1"/>
+          </p:cNvPicPr>
+          <p:nvPr/>
+        </p:nvPicPr>
+        <p:blipFill>
+          <a:blip r:embed="rId6"/>
+          <a:stretch>
+            <a:fillRect/>
+          </a:stretch>
+        </p:blipFill>
+        <p:spPr>
+          <a:xfrm>
+            <a:off x="8051383" y="3538728"/>
+            <a:ext cx="621792" cy="621792"/>
+          </a:xfrm>
+          <a:prstGeom prst="rect">
+            <a:avLst/>
+          </a:prstGeom>
+        </p:spPr>
+      </p:pic>
+      <p:sp>
+        <p:nvSpPr>
+          <p:cNvPr id="17" name="Text 11"/>
+          <p:cNvSpPr/>
+          <p:nvPr/>
+        </p:nvSpPr>
+        <p:spPr>
+          <a:xfrm>
+            <a:off x="7439376" y="4233672"/>
+            <a:ext cx="1845808" cy="457200"/>
+          </a:xfrm>
+          <a:prstGeom prst="rect">
+            <a:avLst/>
+          </a:prstGeom>
+          <a:noFill/>
+          <a:ln/>
+        </p:spPr>
+        <p:txBody>
+          <a:bodyPr wrap="square" rtlCol="0" anchor="ctr"/>
+          <a:lstStyle/>
+          <a:p>
+            <a:pPr marL="0" indent="0" algn="ctr">
+              <a:buNone/>
+            </a:pPr>
+            <a:r>
+              <a:rPr lang="en-US" sz="1300" dirty="0">
+                <a:solidFill>
+                  <a:srgbClr val="F3F6FB"/>
+                </a:solidFill>
+                <a:latin typeface="Segoe UI" pitchFamily="34" charset="0"/>
+                <a:ea typeface="Segoe UI" pitchFamily="34" charset="-122"/>
+                <a:cs typeface="Segoe UI" pitchFamily="34" charset="-120"/>
+              </a:rPr>
+              <a:t>Web &amp; APIs</a:t>
+            </a:r>
+            <a:endParaRPr lang="en-US" sz="1300" dirty="0"/>
+          </a:p>
+        </p:txBody>
+      </p:sp>
+      <p:sp>
+        <p:nvSpPr>
+          <p:cNvPr id="18" name="Shape 12"/>
+          <p:cNvSpPr/>
+          <p:nvPr/>
+        </p:nvSpPr>
+        <p:spPr>
+          <a:xfrm>
+            <a:off x="9632655" y="3246120"/>
+            <a:ext cx="1992112" cy="1554480"/>
+          </a:xfrm>
+          <a:prstGeom prst="roundRect">
+            <a:avLst>
+              <a:gd name="adj" fmla="val 5882"/>
+            </a:avLst>
+          </a:prstGeom>
+          <a:solidFill>
+            <a:srgbClr val="141A25"/>
+          </a:solidFill>
+          <a:ln w="13970">
+            <a:solidFill>
+              <a:srgbClr val="36414F"/>
+            </a:solidFill>
+            <a:prstDash val="solid"/>
+          </a:ln>
+        </p:spPr>
+        <p:txBody>
+          <a:bodyPr/>
+          <a:lstStyle/>
+          <a:p>
+            <a:endParaRPr lang="en-US"/>
+          </a:p>
+        </p:txBody>
+      </p:sp>
+      <p:pic>
+        <p:nvPicPr>
+          <p:cNvPr id="19" name="Image 4" descr="C:/Users/neuma_p1qrsic/Repo/agentic-ops1/.scratch/icons/spark.png"/>
+          <p:cNvPicPr>
+            <a:picLocks noChangeAspect="1"/>
+          </p:cNvPicPr>
+          <p:nvPr/>
+        </p:nvPicPr>
+        <p:blipFill>
+          <a:blip r:embed="rId7"/>
+          <a:stretch>
+            <a:fillRect/>
+          </a:stretch>
+        </p:blipFill>
+        <p:spPr>
+          <a:xfrm>
+            <a:off x="10317815" y="3538728"/>
+            <a:ext cx="621792" cy="621792"/>
+          </a:xfrm>
+          <a:prstGeom prst="rect">
+            <a:avLst/>
+          </a:prstGeom>
+        </p:spPr>
+      </p:pic>
+      <p:sp>
+        <p:nvSpPr>
+          <p:cNvPr id="20" name="Text 13"/>
+          <p:cNvSpPr/>
+          <p:nvPr/>
+        </p:nvSpPr>
+        <p:spPr>
+          <a:xfrm>
+            <a:off x="9705807" y="4233672"/>
+            <a:ext cx="1845808" cy="457200"/>
+          </a:xfrm>
+          <a:prstGeom prst="rect">
+            <a:avLst/>
+          </a:prstGeom>
+          <a:noFill/>
+          <a:ln/>
+        </p:spPr>
+        <p:txBody>
+          <a:bodyPr wrap="square" rtlCol="0" anchor="ctr"/>
+          <a:lstStyle/>
+          <a:p>
+            <a:pPr marL="0" indent="0" algn="ctr">
+              <a:buNone/>
+            </a:pPr>
+            <a:r>
+              <a:rPr lang="en-US" sz="1300" dirty="0">
+                <a:solidFill>
+                  <a:srgbClr val="F3F6FB"/>
+                </a:solidFill>
+                <a:latin typeface="Segoe UI" pitchFamily="34" charset="0"/>
+                <a:ea typeface="Segoe UI" pitchFamily="34" charset="-122"/>
+                <a:cs typeface="Segoe UI" pitchFamily="34" charset="-120"/>
+              </a:rPr>
+              <a:t>AI</a:t>
+            </a:r>
+            <a:endParaRPr lang="en-US" sz="1300" dirty="0"/>
+          </a:p>
+        </p:txBody>
+      </p:sp>
+      <p:sp>
+        <p:nvSpPr>
+          <p:cNvPr id="21" name="Text 14"/>
+          <p:cNvSpPr/>
+          <p:nvPr/>
+        </p:nvSpPr>
+        <p:spPr>
+          <a:xfrm>
+            <a:off x="566928" y="5166360"/>
+            <a:ext cx="11057839" cy="457200"/>
+          </a:xfrm>
+          <a:prstGeom prst="rect">
+            <a:avLst/>
+          </a:prstGeom>
+          <a:noFill/>
+          <a:ln/>
+        </p:spPr>
+        <p:txBody>
+          <a:bodyPr wrap="square" rtlCol="0" anchor="ctr"/>
+          <a:lstStyle/>
+          <a:p>
+            <a:pPr marL="0" indent="0">
+              <a:buNone/>
+            </a:pPr>
+            <a:r>
+              <a:rPr lang="en-US" sz="1450" dirty="0">
+                <a:solidFill>
+                  <a:srgbClr val="3BE3E0"/>
+                </a:solidFill>
+                <a:latin typeface="Segoe UI" pitchFamily="34" charset="0"/>
+                <a:ea typeface="Segoe UI" pitchFamily="34" charset="-122"/>
+                <a:cs typeface="Segoe UI" pitchFamily="34" charset="-120"/>
+              </a:rPr>
+              <a:t>It reads and writes to each of them, so the work lands where it needs to with nothing re-typed.</a:t>
+            </a:r>
+            <a:endParaRPr lang="en-US" sz="1450" dirty="0"/>
+          </a:p>
+        </p:txBody>
+      </p:sp>
+      <p:sp>
+        <p:nvSpPr>
+          <p:cNvPr id="22" name="Text 15"/>
+          <p:cNvSpPr/>
+          <p:nvPr/>
+        </p:nvSpPr>
+        <p:spPr>
+          <a:xfrm>
+            <a:off x="566928" y="6400800"/>
+            <a:ext cx="8229600" cy="274320"/>
+          </a:xfrm>
+          <a:prstGeom prst="rect">
+            <a:avLst/>
+          </a:prstGeom>
+          <a:noFill/>
+          <a:ln/>
+        </p:spPr>
+        <p:txBody>
+          <a:bodyPr wrap="square" rtlCol="0" anchor="ctr"/>
+          <a:lstStyle/>
+          <a:p>
+            <a:pPr marL="0" indent="0" algn="l">
+              <a:buNone/>
+            </a:pPr>
+            <a:r>
+              <a:rPr lang="en-US" sz="900" b="1" dirty="0">
+                <a:solidFill>
+                  <a:srgbClr val="AAB6C7"/>
+                </a:solidFill>
+                <a:latin typeface="Segoe UI" pitchFamily="34" charset="0"/>
+                <a:ea typeface="Segoe UI" pitchFamily="34" charset="-122"/>
+                <a:cs typeface="Segoe UI" pitchFamily="34" charset="-120"/>
+              </a:rPr>
+              <a:t>Brisken</a:t>
+            </a:r>
+            <a:r>
+              <a:rPr lang="en-US" sz="900" dirty="0">
+                <a:solidFill>
+                  <a:srgbClr val="7C8A9B"/>
+                </a:solidFill>
+                <a:latin typeface="Segoe UI" pitchFamily="34" charset="0"/>
+                <a:ea typeface="Segoe UI" pitchFamily="34" charset="-122"/>
+                <a:cs typeface="Segoe UI" pitchFamily="34" charset="-120"/>
+              </a:rPr>
+              <a:t>   OnePilot</a:t>
+            </a:r>
+            <a:endParaRPr lang="en-US" sz="900" dirty="0"/>
+          </a:p>
+        </p:txBody>
+      </p:sp>
+      <p:sp>
+        <p:nvSpPr>
+          <p:cNvPr id="23" name="Text 16"/>
+          <p:cNvSpPr/>
+          <p:nvPr/>
+        </p:nvSpPr>
+        <p:spPr>
+          <a:xfrm>
+            <a:off x="10527487" y="6400800"/>
+            <a:ext cx="1097280" cy="274320"/>
+          </a:xfrm>
+          <a:prstGeom prst="rect">
+            <a:avLst/>
+          </a:prstGeom>
+          <a:noFill/>
+          <a:ln/>
+        </p:spPr>
+        <p:txBody>
+          <a:bodyPr wrap="square" rtlCol="0" anchor="ctr"/>
+          <a:lstStyle/>
+          <a:p>
+            <a:pPr marL="0" indent="0" algn="r">
+              <a:buNone/>
+            </a:pPr>
+            <a:r>
+              <a:rPr lang="en-US" sz="900">
+                <a:solidFill>
+                  <a:srgbClr val="AAB6C7"/>
+                </a:solidFill>
+                <a:latin typeface="Segoe UI" pitchFamily="34" charset="0"/>
+                <a:ea typeface="Segoe UI" pitchFamily="34" charset="-122"/>
+                <a:cs typeface="Segoe UI" pitchFamily="34" charset="-120"/>
+              </a:rPr>
+              <a:t>09 / 11</a:t>
+            </a:r>
+            <a:endParaRPr lang="en-US" sz="900" dirty="0"/>
+          </a:p>
+        </p:txBody>
+      </p:sp>
+      <p:sp>
+        <p:nvSpPr>
+          <p:cNvPr id="24" name="Shape 17"/>
+          <p:cNvSpPr/>
+          <p:nvPr/>
+        </p:nvSpPr>
+        <p:spPr>
+          <a:xfrm>
+            <a:off x="566928" y="6327648"/>
+            <a:ext cx="11057839" cy="0"/>
+          </a:xfrm>
+          <a:prstGeom prst="line">
+            <a:avLst/>
+          </a:prstGeom>
+          <a:noFill/>
+          <a:ln w="9525">
+            <a:solidFill>
+              <a:srgbClr val="36414F"/>
+            </a:solidFill>
+            <a:prstDash val="solid"/>
+          </a:ln>
+        </p:spPr>
+        <p:txBody>
+          <a:bodyPr/>
+          <a:lstStyle/>
+          <a:p>
+            <a:endParaRPr lang="en-US"/>
+          </a:p>
+        </p:txBody>
+      </p:sp>
+    </p:spTree>
+    <p:extLst>
+      <p:ext uri="{BB962C8B-B14F-4D97-AF65-F5344CB8AC3E}">
+        <p14:creationId xmlns:p14="http://schemas.microsoft.com/office/powerpoint/2010/main" val="616649514"/>
+      </p:ext>
+    </p:extLst>
+  </p:cSld>
+  <p:clrMapOvr>
+    <a:masterClrMapping/>
+  </p:clrMapOvr>
+</p:sld>
+</file>
+
+<file path=ppt/slides/slide18.xml><?xml version="1.0" encoding="utf-8"?>
 <p:sld xmlns:a="http://schemas.openxmlformats.org/drawingml/2006/main" xmlns:r="http://schemas.openxmlformats.org/officeDocument/2006/relationships" xmlns:p="http://schemas.openxmlformats.org/presentationml/2006/main">
   <p:cSld name="Slide 10">
     <p:bg>
@@ -2975,7 +4297,7 @@
                 <a:ea typeface="Segoe UI" pitchFamily="34" charset="-122"/>
                 <a:cs typeface="Segoe UI" pitchFamily="34" charset="-120"/>
               </a:rPr>
-              <a:t>No code. Role-based co-workers your team sets up. Evonik and RWZ already build on the platform.</a:t>
+              <a:t>No code. Role-based co-workers your team sets up. Customer teams already build on the platform.</a:t>
             </a:r>
             <a:endParaRPr lang="en-US" sz="1300" dirty="0"/>
           </a:p>
@@ -3162,7 +4484,7 @@
               <a:buNone/>
             </a:pPr>
             <a:r>
-              <a:rPr lang="en-US" sz="3800" b="1" dirty="0">
+              <a:rPr lang="en-US" sz="3800" b="1">
                 <a:solidFill>
                   <a:srgbClr val="3BE3E0"/>
                 </a:solidFill>
@@ -3259,7 +4581,7 @@
                 <a:ea typeface="Segoe UI" pitchFamily="34" charset="-122"/>
                 <a:cs typeface="Segoe UI" pitchFamily="34" charset="-120"/>
               </a:rPr>
-              <a:t>   Digital Co-Worker, part of OnePilot</a:t>
+              <a:t>   OnePilot</a:t>
             </a:r>
             <a:endParaRPr lang="en-US" sz="900" dirty="0"/>
           </a:p>
@@ -3290,7 +4612,7 @@
               <a:buNone/>
             </a:pPr>
             <a:r>
-              <a:rPr lang="en-US" sz="900" dirty="0">
+              <a:rPr lang="en-US" sz="900">
                 <a:solidFill>
                   <a:srgbClr val="AAB6C7"/>
                 </a:solidFill>
@@ -3335,6 +4657,11 @@
         </p:txBody>
       </p:sp>
     </p:spTree>
+    <p:extLst>
+      <p:ext uri="{BB962C8B-B14F-4D97-AF65-F5344CB8AC3E}">
+        <p14:creationId xmlns:p14="http://schemas.microsoft.com/office/powerpoint/2010/main" val="2519876542"/>
+      </p:ext>
+    </p:extLst>
   </p:cSld>
   <p:clrMapOvr>
     <a:masterClrMapping/>
@@ -3342,7 +4669,7 @@
 </p:sld>
 </file>
 
-<file path=ppt/slides/slide11.xml><?xml version="1.0" encoding="utf-8"?>
+<file path=ppt/slides/slide19.xml><?xml version="1.0" encoding="utf-8"?>
 <p:sld xmlns:a="http://schemas.openxmlformats.org/drawingml/2006/main" xmlns:r="http://schemas.openxmlformats.org/officeDocument/2006/relationships" xmlns:p="http://schemas.openxmlformats.org/presentationml/2006/main">
   <p:cSld name="Slide 11">
     <p:bg>
@@ -3662,6 +4989,662 @@
 
 <file path=ppt/slides/slide2.xml><?xml version="1.0" encoding="utf-8"?>
 <p:sld xmlns:a="http://schemas.openxmlformats.org/drawingml/2006/main" xmlns:r="http://schemas.openxmlformats.org/officeDocument/2006/relationships" xmlns:p="http://schemas.openxmlformats.org/presentationml/2006/main">
+  <p:cSld>
+    <p:bg>
+      <p:bgPr>
+        <a:solidFill>
+          <a:srgbClr val="0B0E14"/>
+        </a:solidFill>
+        <a:effectLst/>
+      </p:bgPr>
+    </p:bg>
+    <p:spTree>
+      <p:nvGrpSpPr>
+        <p:cNvPr id="1" name=""/>
+        <p:cNvGrpSpPr/>
+        <p:nvPr/>
+      </p:nvGrpSpPr>
+      <p:grpSpPr>
+        <a:xfrm>
+          <a:off x="0" y="0"/>
+          <a:ext cx="0" cy="0"/>
+          <a:chOff x="0" y="0"/>
+          <a:chExt cx="0" cy="0"/>
+        </a:xfrm>
+      </p:grpSpPr>
+      <p:sp>
+        <p:nvSpPr>
+          <p:cNvPr id="2" name="Shape 0"/>
+          <p:cNvSpPr/>
+          <p:nvPr/>
+        </p:nvSpPr>
+        <p:spPr>
+          <a:xfrm>
+            <a:off x="6949440" y="-1097280"/>
+            <a:ext cx="6035040" cy="6035040"/>
+          </a:xfrm>
+          <a:prstGeom prst="ellipse">
+            <a:avLst/>
+          </a:prstGeom>
+          <a:solidFill>
+            <a:srgbClr val="3BE3E0">
+              <a:alpha val="7000"/>
+            </a:srgbClr>
+          </a:solidFill>
+          <a:ln w="12700">
+            <a:solidFill>
+              <a:srgbClr val="333333"/>
+            </a:solidFill>
+            <a:prstDash val="solid"/>
+          </a:ln>
+        </p:spPr>
+        <p:txBody>
+          <a:bodyPr/>
+          <a:lstStyle/>
+          <a:p>
+            <a:endParaRPr lang="en-US"/>
+          </a:p>
+        </p:txBody>
+      </p:sp>
+      <p:sp>
+        <p:nvSpPr>
+          <p:cNvPr id="3" name="Shape 1"/>
+          <p:cNvSpPr/>
+          <p:nvPr/>
+        </p:nvSpPr>
+        <p:spPr>
+          <a:xfrm>
+            <a:off x="8321040" y="274320"/>
+            <a:ext cx="3291840" cy="3291840"/>
+          </a:xfrm>
+          <a:prstGeom prst="ellipse">
+            <a:avLst/>
+          </a:prstGeom>
+          <a:solidFill>
+            <a:srgbClr val="3BE3E0">
+              <a:alpha val="12000"/>
+            </a:srgbClr>
+          </a:solidFill>
+          <a:ln w="12700">
+            <a:solidFill>
+              <a:srgbClr val="333333"/>
+            </a:solidFill>
+            <a:prstDash val="solid"/>
+          </a:ln>
+        </p:spPr>
+        <p:txBody>
+          <a:bodyPr/>
+          <a:lstStyle/>
+          <a:p>
+            <a:endParaRPr lang="en-US"/>
+          </a:p>
+        </p:txBody>
+      </p:sp>
+      <p:sp>
+        <p:nvSpPr>
+          <p:cNvPr id="4" name="Shape 2"/>
+          <p:cNvSpPr/>
+          <p:nvPr/>
+        </p:nvSpPr>
+        <p:spPr>
+          <a:xfrm>
+            <a:off x="-1737360" y="3017520"/>
+            <a:ext cx="6035040" cy="6035040"/>
+          </a:xfrm>
+          <a:prstGeom prst="ellipse">
+            <a:avLst/>
+          </a:prstGeom>
+          <a:solidFill>
+            <a:srgbClr val="5A6BFF">
+              <a:alpha val="7000"/>
+            </a:srgbClr>
+          </a:solidFill>
+          <a:ln w="12700">
+            <a:solidFill>
+              <a:srgbClr val="333333"/>
+            </a:solidFill>
+            <a:prstDash val="solid"/>
+          </a:ln>
+        </p:spPr>
+        <p:txBody>
+          <a:bodyPr/>
+          <a:lstStyle/>
+          <a:p>
+            <a:endParaRPr lang="en-US"/>
+          </a:p>
+        </p:txBody>
+      </p:sp>
+      <p:sp>
+        <p:nvSpPr>
+          <p:cNvPr id="5" name="Shape 3"/>
+          <p:cNvSpPr/>
+          <p:nvPr/>
+        </p:nvSpPr>
+        <p:spPr>
+          <a:xfrm>
+            <a:off x="-365760" y="4389120"/>
+            <a:ext cx="3291840" cy="3291840"/>
+          </a:xfrm>
+          <a:prstGeom prst="ellipse">
+            <a:avLst/>
+          </a:prstGeom>
+          <a:solidFill>
+            <a:srgbClr val="5A6BFF">
+              <a:alpha val="12000"/>
+            </a:srgbClr>
+          </a:solidFill>
+          <a:ln w="12700">
+            <a:solidFill>
+              <a:srgbClr val="333333"/>
+            </a:solidFill>
+            <a:prstDash val="solid"/>
+          </a:ln>
+        </p:spPr>
+        <p:txBody>
+          <a:bodyPr/>
+          <a:lstStyle/>
+          <a:p>
+            <a:endParaRPr lang="en-US"/>
+          </a:p>
+        </p:txBody>
+      </p:sp>
+      <p:sp>
+        <p:nvSpPr>
+          <p:cNvPr id="7" name="Shape 4"/>
+          <p:cNvSpPr/>
+          <p:nvPr/>
+        </p:nvSpPr>
+        <p:spPr>
+          <a:xfrm>
+            <a:off x="566928" y="2624328"/>
+            <a:ext cx="45720" cy="219456"/>
+          </a:xfrm>
+          <a:prstGeom prst="rect">
+            <a:avLst/>
+          </a:prstGeom>
+          <a:solidFill>
+            <a:srgbClr val="3BE3E0"/>
+          </a:solidFill>
+          <a:ln w="12700">
+            <a:solidFill>
+              <a:srgbClr val="333333"/>
+            </a:solidFill>
+            <a:prstDash val="solid"/>
+          </a:ln>
+        </p:spPr>
+        <p:txBody>
+          <a:bodyPr/>
+          <a:lstStyle/>
+          <a:p>
+            <a:endParaRPr lang="en-US"/>
+          </a:p>
+        </p:txBody>
+      </p:sp>
+      <p:sp>
+        <p:nvSpPr>
+          <p:cNvPr id="8" name="Text 5"/>
+          <p:cNvSpPr/>
+          <p:nvPr/>
+        </p:nvSpPr>
+        <p:spPr>
+          <a:xfrm>
+            <a:off x="713232" y="2551176"/>
+            <a:ext cx="8229600" cy="329184"/>
+          </a:xfrm>
+          <a:prstGeom prst="rect">
+            <a:avLst/>
+          </a:prstGeom>
+          <a:noFill/>
+          <a:ln/>
+        </p:spPr>
+        <p:txBody>
+          <a:bodyPr wrap="square" rtlCol="0" anchor="ctr"/>
+          <a:lstStyle/>
+          <a:p>
+            <a:pPr marL="0" indent="0" algn="l">
+              <a:buNone/>
+            </a:pPr>
+            <a:r>
+              <a:rPr lang="en-US" sz="1200" b="1" kern="0" spc="200" dirty="0">
+                <a:solidFill>
+                  <a:srgbClr val="3BE3E0"/>
+                </a:solidFill>
+                <a:latin typeface="Segoe UI Semibold" pitchFamily="34" charset="0"/>
+                <a:ea typeface="Segoe UI Semibold" pitchFamily="34" charset="-122"/>
+                <a:cs typeface="Segoe UI Semibold" pitchFamily="34" charset="-120"/>
+              </a:rPr>
+              <a:t>ONEPILOT · DIGITAL CO-WORKER</a:t>
+            </a:r>
+            <a:endParaRPr lang="en-US" sz="1200" dirty="0"/>
+          </a:p>
+        </p:txBody>
+      </p:sp>
+      <p:sp>
+        <p:nvSpPr>
+          <p:cNvPr id="9" name="Text 6"/>
+          <p:cNvSpPr/>
+          <p:nvPr/>
+        </p:nvSpPr>
+        <p:spPr>
+          <a:xfrm>
+            <a:off x="539496" y="2880360"/>
+            <a:ext cx="11155680" cy="1371600"/>
+          </a:xfrm>
+          <a:prstGeom prst="rect">
+            <a:avLst/>
+          </a:prstGeom>
+          <a:noFill/>
+          <a:ln/>
+        </p:spPr>
+        <p:txBody>
+          <a:bodyPr wrap="square" rtlCol="0" anchor="ctr"/>
+          <a:lstStyle/>
+          <a:p>
+            <a:pPr marL="0" indent="0">
+              <a:buNone/>
+            </a:pPr>
+            <a:r>
+              <a:rPr lang="en-US" sz="6800" b="1" dirty="0">
+                <a:solidFill>
+                  <a:srgbClr val="F3F6FB"/>
+                </a:solidFill>
+                <a:latin typeface="Segoe UI Semibold" pitchFamily="34" charset="0"/>
+                <a:ea typeface="Segoe UI Semibold" pitchFamily="34" charset="-122"/>
+                <a:cs typeface="Segoe UI Semibold" pitchFamily="34" charset="-120"/>
+              </a:rPr>
+              <a:t>Digital Co-Worker</a:t>
+            </a:r>
+            <a:endParaRPr lang="en-US" sz="6800" dirty="0"/>
+          </a:p>
+        </p:txBody>
+      </p:sp>
+      <p:sp>
+        <p:nvSpPr>
+          <p:cNvPr id="10" name="Text 7"/>
+          <p:cNvSpPr/>
+          <p:nvPr/>
+        </p:nvSpPr>
+        <p:spPr>
+          <a:xfrm>
+            <a:off x="566928" y="4206240"/>
+            <a:ext cx="10332720" cy="822960"/>
+          </a:xfrm>
+          <a:prstGeom prst="rect">
+            <a:avLst/>
+          </a:prstGeom>
+          <a:noFill/>
+          <a:ln/>
+        </p:spPr>
+        <p:txBody>
+          <a:bodyPr wrap="square" rtlCol="0" anchor="t"/>
+          <a:lstStyle/>
+          <a:p>
+            <a:pPr marL="0" indent="0">
+              <a:lnSpc>
+                <a:spcPct val="115000"/>
+              </a:lnSpc>
+              <a:buNone/>
+            </a:pPr>
+            <a:r>
+              <a:rPr lang="en-US" sz="2000" dirty="0">
+                <a:solidFill>
+                  <a:srgbClr val="AAB6C7"/>
+                </a:solidFill>
+                <a:latin typeface="Segoe UI" pitchFamily="34" charset="0"/>
+                <a:ea typeface="Segoe UI" pitchFamily="34" charset="-122"/>
+                <a:cs typeface="Segoe UI" pitchFamily="34" charset="-120"/>
+              </a:rPr>
+              <a:t>An AI co-worker for every person on your team. </a:t>
+            </a:r>
+            <a:r>
+              <a:rPr lang="en-US" sz="2000" dirty="0">
+                <a:solidFill>
+                  <a:srgbClr val="3BE3E0"/>
+                </a:solidFill>
+                <a:latin typeface="Segoe UI" pitchFamily="34" charset="0"/>
+                <a:ea typeface="Segoe UI" pitchFamily="34" charset="-122"/>
+                <a:cs typeface="Segoe UI" pitchFamily="34" charset="-120"/>
+              </a:rPr>
+              <a:t>It does the busywork across your systems, in plain chat or in the background.</a:t>
+            </a:r>
+            <a:endParaRPr lang="en-US" sz="2000" dirty="0"/>
+          </a:p>
+        </p:txBody>
+      </p:sp>
+      <p:sp>
+        <p:nvSpPr>
+          <p:cNvPr id="11" name="Shape 8"/>
+          <p:cNvSpPr/>
+          <p:nvPr/>
+        </p:nvSpPr>
+        <p:spPr>
+          <a:xfrm>
+            <a:off x="566928" y="5532120"/>
+            <a:ext cx="566928" cy="566928"/>
+          </a:xfrm>
+          <a:prstGeom prst="roundRect">
+            <a:avLst>
+              <a:gd name="adj" fmla="val 17742"/>
+            </a:avLst>
+          </a:prstGeom>
+          <a:solidFill>
+            <a:srgbClr val="1B2330"/>
+          </a:solidFill>
+          <a:ln w="15240">
+            <a:solidFill>
+              <a:srgbClr val="3BE3E0"/>
+            </a:solidFill>
+            <a:prstDash val="solid"/>
+          </a:ln>
+        </p:spPr>
+        <p:txBody>
+          <a:bodyPr/>
+          <a:lstStyle/>
+          <a:p>
+            <a:endParaRPr lang="en-US"/>
+          </a:p>
+        </p:txBody>
+      </p:sp>
+      <p:sp>
+        <p:nvSpPr>
+          <p:cNvPr id="13" name="Text 9"/>
+          <p:cNvSpPr/>
+          <p:nvPr/>
+        </p:nvSpPr>
+        <p:spPr>
+          <a:xfrm>
+            <a:off x="1252728" y="5532120"/>
+            <a:ext cx="2743200" cy="566928"/>
+          </a:xfrm>
+          <a:prstGeom prst="rect">
+            <a:avLst/>
+          </a:prstGeom>
+          <a:noFill/>
+          <a:ln/>
+        </p:spPr>
+        <p:txBody>
+          <a:bodyPr wrap="square" rtlCol="0" anchor="ctr"/>
+          <a:lstStyle/>
+          <a:p>
+            <a:pPr marL="0" indent="0">
+              <a:buNone/>
+            </a:pPr>
+            <a:r>
+              <a:rPr lang="en-US" sz="1300" dirty="0">
+                <a:solidFill>
+                  <a:srgbClr val="F3F6FB"/>
+                </a:solidFill>
+                <a:latin typeface="Segoe UI" pitchFamily="34" charset="0"/>
+                <a:ea typeface="Segoe UI" pitchFamily="34" charset="-122"/>
+                <a:cs typeface="Segoe UI" pitchFamily="34" charset="-120"/>
+              </a:rPr>
+              <a:t>Ask in plain language</a:t>
+            </a:r>
+            <a:endParaRPr lang="en-US" sz="1300" dirty="0"/>
+          </a:p>
+        </p:txBody>
+      </p:sp>
+      <p:sp>
+        <p:nvSpPr>
+          <p:cNvPr id="14" name="Shape 10"/>
+          <p:cNvSpPr/>
+          <p:nvPr/>
+        </p:nvSpPr>
+        <p:spPr>
+          <a:xfrm>
+            <a:off x="3995928" y="5815584"/>
+            <a:ext cx="640080" cy="0"/>
+          </a:xfrm>
+          <a:prstGeom prst="line">
+            <a:avLst/>
+          </a:prstGeom>
+          <a:noFill/>
+          <a:ln w="25400">
+            <a:solidFill>
+              <a:srgbClr val="3BE3E0"/>
+            </a:solidFill>
+            <a:prstDash val="solid"/>
+            <a:tailEnd type="triangle"/>
+          </a:ln>
+        </p:spPr>
+        <p:txBody>
+          <a:bodyPr/>
+          <a:lstStyle/>
+          <a:p>
+            <a:endParaRPr lang="en-US"/>
+          </a:p>
+        </p:txBody>
+      </p:sp>
+      <p:sp>
+        <p:nvSpPr>
+          <p:cNvPr id="15" name="Text 11"/>
+          <p:cNvSpPr/>
+          <p:nvPr/>
+        </p:nvSpPr>
+        <p:spPr>
+          <a:xfrm>
+            <a:off x="4727448" y="5532120"/>
+            <a:ext cx="2103120" cy="566928"/>
+          </a:xfrm>
+          <a:prstGeom prst="rect">
+            <a:avLst/>
+          </a:prstGeom>
+          <a:noFill/>
+          <a:ln/>
+        </p:spPr>
+        <p:txBody>
+          <a:bodyPr wrap="square" rtlCol="0" anchor="ctr"/>
+          <a:lstStyle/>
+          <a:p>
+            <a:pPr marL="0" indent="0" algn="ctr">
+              <a:buNone/>
+            </a:pPr>
+            <a:r>
+              <a:rPr lang="en-US" sz="1200" i="1" dirty="0">
+                <a:solidFill>
+                  <a:srgbClr val="3BE3E0"/>
+                </a:solidFill>
+                <a:latin typeface="Segoe UI" pitchFamily="34" charset="0"/>
+                <a:ea typeface="Segoe UI" pitchFamily="34" charset="-122"/>
+                <a:cs typeface="Segoe UI" pitchFamily="34" charset="-120"/>
+              </a:rPr>
+              <a:t>Digital Co-Worker</a:t>
+            </a:r>
+            <a:endParaRPr lang="en-US" sz="1200" dirty="0"/>
+          </a:p>
+        </p:txBody>
+      </p:sp>
+      <p:sp>
+        <p:nvSpPr>
+          <p:cNvPr id="16" name="Shape 12"/>
+          <p:cNvSpPr/>
+          <p:nvPr/>
+        </p:nvSpPr>
+        <p:spPr>
+          <a:xfrm>
+            <a:off x="6876288" y="5815584"/>
+            <a:ext cx="640080" cy="0"/>
+          </a:xfrm>
+          <a:prstGeom prst="line">
+            <a:avLst/>
+          </a:prstGeom>
+          <a:noFill/>
+          <a:ln w="25400">
+            <a:solidFill>
+              <a:srgbClr val="3BE3E0"/>
+            </a:solidFill>
+            <a:prstDash val="solid"/>
+            <a:tailEnd type="triangle"/>
+          </a:ln>
+        </p:spPr>
+        <p:txBody>
+          <a:bodyPr/>
+          <a:lstStyle/>
+          <a:p>
+            <a:endParaRPr lang="en-US"/>
+          </a:p>
+        </p:txBody>
+      </p:sp>
+      <p:sp>
+        <p:nvSpPr>
+          <p:cNvPr id="17" name="Shape 13"/>
+          <p:cNvSpPr/>
+          <p:nvPr/>
+        </p:nvSpPr>
+        <p:spPr>
+          <a:xfrm>
+            <a:off x="7653528" y="5532120"/>
+            <a:ext cx="566928" cy="566928"/>
+          </a:xfrm>
+          <a:prstGeom prst="roundRect">
+            <a:avLst>
+              <a:gd name="adj" fmla="val 17742"/>
+            </a:avLst>
+          </a:prstGeom>
+          <a:solidFill>
+            <a:srgbClr val="1B2330"/>
+          </a:solidFill>
+          <a:ln w="15240">
+            <a:solidFill>
+              <a:srgbClr val="3BE3E0"/>
+            </a:solidFill>
+            <a:prstDash val="solid"/>
+          </a:ln>
+        </p:spPr>
+        <p:txBody>
+          <a:bodyPr/>
+          <a:lstStyle/>
+          <a:p>
+            <a:endParaRPr lang="en-US"/>
+          </a:p>
+        </p:txBody>
+      </p:sp>
+      <p:sp>
+        <p:nvSpPr>
+          <p:cNvPr id="19" name="Text 14"/>
+          <p:cNvSpPr/>
+          <p:nvPr/>
+        </p:nvSpPr>
+        <p:spPr>
+          <a:xfrm>
+            <a:off x="8339328" y="5532120"/>
+            <a:ext cx="2743200" cy="566928"/>
+          </a:xfrm>
+          <a:prstGeom prst="rect">
+            <a:avLst/>
+          </a:prstGeom>
+          <a:noFill/>
+          <a:ln/>
+        </p:spPr>
+        <p:txBody>
+          <a:bodyPr wrap="square" rtlCol="0" anchor="ctr"/>
+          <a:lstStyle/>
+          <a:p>
+            <a:pPr marL="0" indent="0">
+              <a:buNone/>
+            </a:pPr>
+            <a:r>
+              <a:rPr lang="en-US" sz="1300" dirty="0">
+                <a:solidFill>
+                  <a:srgbClr val="F3F6FB"/>
+                </a:solidFill>
+                <a:latin typeface="Segoe UI" pitchFamily="34" charset="0"/>
+                <a:ea typeface="Segoe UI" pitchFamily="34" charset="-122"/>
+                <a:cs typeface="Segoe UI" pitchFamily="34" charset="-120"/>
+              </a:rPr>
+              <a:t>Done in your systems</a:t>
+            </a:r>
+            <a:endParaRPr lang="en-US" sz="1300" dirty="0"/>
+          </a:p>
+        </p:txBody>
+      </p:sp>
+      <p:pic>
+        <p:nvPicPr>
+          <p:cNvPr id="20" name="Picture 19" descr="image.png"/>
+          <p:cNvPicPr>
+            <a:picLocks noChangeAspect="1"/>
+          </p:cNvPicPr>
+          <p:nvPr/>
+        </p:nvPicPr>
+        <p:blipFill>
+          <a:blip r:embed="rId3"/>
+          <a:stretch>
+            <a:fillRect/>
+          </a:stretch>
+        </p:blipFill>
+        <p:spPr>
+          <a:xfrm>
+            <a:off x="566928" y="548640"/>
+            <a:ext cx="1417320" cy="310896"/>
+          </a:xfrm>
+          <a:prstGeom prst="rect">
+            <a:avLst/>
+          </a:prstGeom>
+        </p:spPr>
+      </p:pic>
+      <p:pic>
+        <p:nvPicPr>
+          <p:cNvPr id="21" name="Picture 20" descr="image.png"/>
+          <p:cNvPicPr>
+            <a:picLocks noChangeAspect="1"/>
+          </p:cNvPicPr>
+          <p:nvPr/>
+        </p:nvPicPr>
+        <p:blipFill>
+          <a:blip r:embed="rId4"/>
+          <a:stretch>
+            <a:fillRect/>
+          </a:stretch>
+        </p:blipFill>
+        <p:spPr>
+          <a:xfrm>
+            <a:off x="702991" y="5668183"/>
+            <a:ext cx="294803" cy="294803"/>
+          </a:xfrm>
+          <a:prstGeom prst="rect">
+            <a:avLst/>
+          </a:prstGeom>
+        </p:spPr>
+      </p:pic>
+      <p:pic>
+        <p:nvPicPr>
+          <p:cNvPr id="22" name="Picture 21" descr="image.png"/>
+          <p:cNvPicPr>
+            <a:picLocks noChangeAspect="1"/>
+          </p:cNvPicPr>
+          <p:nvPr/>
+        </p:nvPicPr>
+        <p:blipFill>
+          <a:blip r:embed="rId5"/>
+          <a:stretch>
+            <a:fillRect/>
+          </a:stretch>
+        </p:blipFill>
+        <p:spPr>
+          <a:xfrm>
+            <a:off x="7789591" y="5668183"/>
+            <a:ext cx="294803" cy="294803"/>
+          </a:xfrm>
+          <a:prstGeom prst="rect">
+            <a:avLst/>
+          </a:prstGeom>
+        </p:spPr>
+      </p:pic>
+    </p:spTree>
+    <p:extLst>
+      <p:ext uri="{BB962C8B-B14F-4D97-AF65-F5344CB8AC3E}">
+        <p14:creationId xmlns:p14="http://schemas.microsoft.com/office/powerpoint/2010/main" val="512368719"/>
+      </p:ext>
+    </p:extLst>
+  </p:cSld>
+  <p:clrMapOvr>
+    <a:masterClrMapping/>
+  </p:clrMapOvr>
+</p:sld>
+</file>
+
+<file path=ppt/slides/slide3.xml><?xml version="1.0" encoding="utf-8"?>
+<p:sld xmlns:a="http://schemas.openxmlformats.org/drawingml/2006/main" xmlns:r="http://schemas.openxmlformats.org/officeDocument/2006/relationships" xmlns:p="http://schemas.openxmlformats.org/presentationml/2006/main">
   <p:cSld name="Slide 2">
     <p:bg>
       <p:bgPr>
@@ -4465,7 +6448,7 @@
               <a:buNone/>
             </a:pPr>
             <a:r>
-              <a:rPr lang="en-US" sz="900" dirty="0">
+              <a:rPr lang="en-US" sz="900">
                 <a:solidFill>
                   <a:srgbClr val="AAB6C7"/>
                 </a:solidFill>
@@ -4517,7 +6500,7 @@
 </p:sld>
 </file>
 
-<file path=ppt/slides/slide3.xml><?xml version="1.0" encoding="utf-8"?>
+<file path=ppt/slides/slide4.xml><?xml version="1.0" encoding="utf-8"?>
 <p:sld xmlns:a="http://schemas.openxmlformats.org/drawingml/2006/main" xmlns:r="http://schemas.openxmlformats.org/officeDocument/2006/relationships" xmlns:p="http://schemas.openxmlformats.org/presentationml/2006/main">
   <p:cSld name="Slide 3">
     <p:bg>
@@ -5431,7 +7414,7 @@
               <a:buNone/>
             </a:pPr>
             <a:r>
-              <a:rPr lang="en-US" sz="900" dirty="0">
+              <a:rPr lang="en-US" sz="900">
                 <a:solidFill>
                   <a:srgbClr val="AAB6C7"/>
                 </a:solidFill>
@@ -5483,7 +7466,7 @@
 </p:sld>
 </file>
 
-<file path=ppt/slides/slide4.xml><?xml version="1.0" encoding="utf-8"?>
+<file path=ppt/slides/slide5.xml><?xml version="1.0" encoding="utf-8"?>
 <p:sld xmlns:a="http://schemas.openxmlformats.org/drawingml/2006/main" xmlns:r="http://schemas.openxmlformats.org/officeDocument/2006/relationships" xmlns:p="http://schemas.openxmlformats.org/presentationml/2006/main">
   <p:cSld name="Slide 4">
     <p:bg>
@@ -6362,7 +8345,7 @@
               <a:buNone/>
             </a:pPr>
             <a:r>
-              <a:rPr lang="en-US" sz="900" dirty="0">
+              <a:rPr lang="en-US" sz="900">
                 <a:solidFill>
                   <a:srgbClr val="AAB6C7"/>
                 </a:solidFill>
@@ -6414,7 +8397,7 @@
 </p:sld>
 </file>
 
-<file path=ppt/slides/slide5.xml><?xml version="1.0" encoding="utf-8"?>
+<file path=ppt/slides/slide6.xml><?xml version="1.0" encoding="utf-8"?>
 <p:sld xmlns:a="http://schemas.openxmlformats.org/drawingml/2006/main" xmlns:r="http://schemas.openxmlformats.org/officeDocument/2006/relationships" xmlns:p="http://schemas.openxmlformats.org/presentationml/2006/main">
   <p:cSld name="Slide 5">
     <p:bg>
@@ -7724,7 +9707,7 @@
               <a:buNone/>
             </a:pPr>
             <a:r>
-              <a:rPr lang="en-US" sz="900" dirty="0">
+              <a:rPr lang="en-US" sz="900">
                 <a:solidFill>
                   <a:srgbClr val="AAB6C7"/>
                 </a:solidFill>
@@ -7776,7 +9759,7 @@
 </p:sld>
 </file>
 
-<file path=ppt/slides/slide6.xml><?xml version="1.0" encoding="utf-8"?>
+<file path=ppt/slides/slide7.xml><?xml version="1.0" encoding="utf-8"?>
 <p:sld xmlns:a="http://schemas.openxmlformats.org/drawingml/2006/main" xmlns:r="http://schemas.openxmlformats.org/officeDocument/2006/relationships" xmlns:p="http://schemas.openxmlformats.org/presentationml/2006/main">
   <p:cSld name="Slide 6">
     <p:bg>
@@ -8384,7 +10367,7 @@
               <a:buNone/>
             </a:pPr>
             <a:r>
-              <a:rPr lang="en-US" sz="900" dirty="0">
+              <a:rPr lang="en-US" sz="900">
                 <a:solidFill>
                   <a:srgbClr val="AAB6C7"/>
                 </a:solidFill>
@@ -8436,7 +10419,7 @@
 </p:sld>
 </file>
 
-<file path=ppt/slides/slide7.xml><?xml version="1.0" encoding="utf-8"?>
+<file path=ppt/slides/slide8.xml><?xml version="1.0" encoding="utf-8"?>
 <p:sld xmlns:a="http://schemas.openxmlformats.org/drawingml/2006/main" xmlns:r="http://schemas.openxmlformats.org/officeDocument/2006/relationships" xmlns:p="http://schemas.openxmlformats.org/presentationml/2006/main">
   <p:cSld name="Slide 7">
     <p:bg>
@@ -9434,7 +11417,7 @@
               <a:buNone/>
             </a:pPr>
             <a:r>
-              <a:rPr lang="en-US" sz="900" dirty="0">
+              <a:rPr lang="en-US" sz="900">
                 <a:solidFill>
                   <a:srgbClr val="AAB6C7"/>
                 </a:solidFill>
@@ -9451,2138 +11434,6 @@
       <p:sp>
         <p:nvSpPr>
           <p:cNvPr id="27" name="Shape 21"/>
-          <p:cNvSpPr/>
-          <p:nvPr/>
-        </p:nvSpPr>
-        <p:spPr>
-          <a:xfrm>
-            <a:off x="566928" y="6327648"/>
-            <a:ext cx="11057839" cy="0"/>
-          </a:xfrm>
-          <a:prstGeom prst="line">
-            <a:avLst/>
-          </a:prstGeom>
-          <a:noFill/>
-          <a:ln w="9525">
-            <a:solidFill>
-              <a:srgbClr val="36414F"/>
-            </a:solidFill>
-            <a:prstDash val="solid"/>
-          </a:ln>
-        </p:spPr>
-        <p:txBody>
-          <a:bodyPr/>
-          <a:lstStyle/>
-          <a:p>
-            <a:endParaRPr lang="en-US"/>
-          </a:p>
-        </p:txBody>
-      </p:sp>
-    </p:spTree>
-  </p:cSld>
-  <p:clrMapOvr>
-    <a:masterClrMapping/>
-  </p:clrMapOvr>
-</p:sld>
-</file>
-
-<file path=ppt/slides/slide8.xml><?xml version="1.0" encoding="utf-8"?>
-<p:sld xmlns:a="http://schemas.openxmlformats.org/drawingml/2006/main" xmlns:r="http://schemas.openxmlformats.org/officeDocument/2006/relationships" xmlns:p="http://schemas.openxmlformats.org/presentationml/2006/main">
-  <p:cSld name="Slide 8">
-    <p:bg>
-      <p:bgPr>
-        <a:solidFill>
-          <a:srgbClr val="0B0E14"/>
-        </a:solidFill>
-        <a:effectLst/>
-      </p:bgPr>
-    </p:bg>
-    <p:spTree>
-      <p:nvGrpSpPr>
-        <p:cNvPr id="1" name=""/>
-        <p:cNvGrpSpPr/>
-        <p:nvPr/>
-      </p:nvGrpSpPr>
-      <p:grpSpPr>
-        <a:xfrm>
-          <a:off x="0" y="0"/>
-          <a:ext cx="0" cy="0"/>
-          <a:chOff x="0" y="0"/>
-          <a:chExt cx="0" cy="0"/>
-        </a:xfrm>
-      </p:grpSpPr>
-      <p:sp>
-        <p:nvSpPr>
-          <p:cNvPr id="2" name="Shape 0"/>
-          <p:cNvSpPr/>
-          <p:nvPr/>
-        </p:nvSpPr>
-        <p:spPr>
-          <a:xfrm>
-            <a:off x="566928" y="585216"/>
-            <a:ext cx="45720" cy="219456"/>
-          </a:xfrm>
-          <a:prstGeom prst="rect">
-            <a:avLst/>
-          </a:prstGeom>
-          <a:solidFill>
-            <a:srgbClr val="3BE3E0"/>
-          </a:solidFill>
-          <a:ln w="12700">
-            <a:solidFill>
-              <a:srgbClr val="333333"/>
-            </a:solidFill>
-            <a:prstDash val="solid"/>
-          </a:ln>
-        </p:spPr>
-        <p:txBody>
-          <a:bodyPr/>
-          <a:lstStyle/>
-          <a:p>
-            <a:endParaRPr lang="en-US"/>
-          </a:p>
-        </p:txBody>
-      </p:sp>
-      <p:sp>
-        <p:nvSpPr>
-          <p:cNvPr id="3" name="Text 1"/>
-          <p:cNvSpPr/>
-          <p:nvPr/>
-        </p:nvSpPr>
-        <p:spPr>
-          <a:xfrm>
-            <a:off x="713232" y="512064"/>
-            <a:ext cx="8229600" cy="329184"/>
-          </a:xfrm>
-          <a:prstGeom prst="rect">
-            <a:avLst/>
-          </a:prstGeom>
-          <a:noFill/>
-          <a:ln/>
-        </p:spPr>
-        <p:txBody>
-          <a:bodyPr wrap="square" rtlCol="0" anchor="ctr"/>
-          <a:lstStyle/>
-          <a:p>
-            <a:pPr marL="0" indent="0" algn="l">
-              <a:buNone/>
-            </a:pPr>
-            <a:r>
-              <a:rPr lang="en-US" sz="1200" b="1" kern="0" spc="200" dirty="0">
-                <a:solidFill>
-                  <a:srgbClr val="3BE3E0"/>
-                </a:solidFill>
-                <a:latin typeface="Segoe UI Semibold" pitchFamily="34" charset="0"/>
-                <a:ea typeface="Segoe UI Semibold" pitchFamily="34" charset="-122"/>
-                <a:cs typeface="Segoe UI Semibold" pitchFamily="34" charset="-120"/>
-              </a:rPr>
-              <a:t>WHY IT IS SAFE TO LET IT RUN</a:t>
-            </a:r>
-            <a:endParaRPr lang="en-US" sz="1200" dirty="0"/>
-          </a:p>
-        </p:txBody>
-      </p:sp>
-      <p:sp>
-        <p:nvSpPr>
-          <p:cNvPr id="4" name="Text 2"/>
-          <p:cNvSpPr/>
-          <p:nvPr/>
-        </p:nvSpPr>
-        <p:spPr>
-          <a:xfrm>
-            <a:off x="566928" y="960120"/>
-            <a:ext cx="10789920" cy="731520"/>
-          </a:xfrm>
-          <a:prstGeom prst="rect">
-            <a:avLst/>
-          </a:prstGeom>
-          <a:noFill/>
-          <a:ln/>
-        </p:spPr>
-        <p:txBody>
-          <a:bodyPr wrap="square" rtlCol="0" anchor="ctr"/>
-          <a:lstStyle/>
-          <a:p>
-            <a:pPr marL="0" indent="0">
-              <a:buNone/>
-            </a:pPr>
-            <a:r>
-              <a:rPr lang="en-US" sz="2800" b="1" dirty="0">
-                <a:solidFill>
-                  <a:srgbClr val="F3F6FB"/>
-                </a:solidFill>
-                <a:latin typeface="Segoe UI Semibold" pitchFamily="34" charset="0"/>
-                <a:ea typeface="Segoe UI Semibold" pitchFamily="34" charset="-122"/>
-                <a:cs typeface="Segoe UI Semibold" pitchFamily="34" charset="-120"/>
-              </a:rPr>
-              <a:t>The controls are built in, not bolted on.</a:t>
-            </a:r>
-            <a:endParaRPr lang="en-US" sz="2800" dirty="0"/>
-          </a:p>
-        </p:txBody>
-      </p:sp>
-      <p:sp>
-        <p:nvSpPr>
-          <p:cNvPr id="5" name="Shape 3"/>
-          <p:cNvSpPr/>
-          <p:nvPr/>
-        </p:nvSpPr>
-        <p:spPr>
-          <a:xfrm>
-            <a:off x="566928" y="2194560"/>
-            <a:ext cx="5346040" cy="1188720"/>
-          </a:xfrm>
-          <a:prstGeom prst="roundRect">
-            <a:avLst>
-              <a:gd name="adj" fmla="val 6154"/>
-            </a:avLst>
-          </a:prstGeom>
-          <a:solidFill>
-            <a:srgbClr val="141A25"/>
-          </a:solidFill>
-          <a:ln w="13970">
-            <a:solidFill>
-              <a:srgbClr val="36414F"/>
-            </a:solidFill>
-            <a:prstDash val="solid"/>
-          </a:ln>
-        </p:spPr>
-        <p:txBody>
-          <a:bodyPr/>
-          <a:lstStyle/>
-          <a:p>
-            <a:endParaRPr lang="en-US"/>
-          </a:p>
-        </p:txBody>
-      </p:sp>
-      <p:sp>
-        <p:nvSpPr>
-          <p:cNvPr id="6" name="Shape 4"/>
-          <p:cNvSpPr/>
-          <p:nvPr/>
-        </p:nvSpPr>
-        <p:spPr>
-          <a:xfrm>
-            <a:off x="822960" y="2496312"/>
-            <a:ext cx="566928" cy="566928"/>
-          </a:xfrm>
-          <a:prstGeom prst="roundRect">
-            <a:avLst>
-              <a:gd name="adj" fmla="val 17742"/>
-            </a:avLst>
-          </a:prstGeom>
-          <a:solidFill>
-            <a:srgbClr val="1B2330"/>
-          </a:solidFill>
-          <a:ln w="15240">
-            <a:solidFill>
-              <a:srgbClr val="3BE3E0"/>
-            </a:solidFill>
-            <a:prstDash val="solid"/>
-          </a:ln>
-        </p:spPr>
-        <p:txBody>
-          <a:bodyPr/>
-          <a:lstStyle/>
-          <a:p>
-            <a:endParaRPr lang="en-US"/>
-          </a:p>
-        </p:txBody>
-      </p:sp>
-      <p:pic>
-        <p:nvPicPr>
-          <p:cNvPr id="7" name="Image 0" descr="C:/Users/neuma_p1qrsic/Repo/agentic-ops1/.scratch/icons/list.png"/>
-          <p:cNvPicPr>
-            <a:picLocks noChangeAspect="1"/>
-          </p:cNvPicPr>
-          <p:nvPr/>
-        </p:nvPicPr>
-        <p:blipFill>
-          <a:blip r:embed="rId3"/>
-          <a:stretch>
-            <a:fillRect/>
-          </a:stretch>
-        </p:blipFill>
-        <p:spPr>
-          <a:xfrm>
-            <a:off x="959023" y="2632375"/>
-            <a:ext cx="294803" cy="294803"/>
-          </a:xfrm>
-          <a:prstGeom prst="rect">
-            <a:avLst/>
-          </a:prstGeom>
-        </p:spPr>
-      </p:pic>
-      <p:sp>
-        <p:nvSpPr>
-          <p:cNvPr id="8" name="Text 5"/>
-          <p:cNvSpPr/>
-          <p:nvPr/>
-        </p:nvSpPr>
-        <p:spPr>
-          <a:xfrm>
-            <a:off x="1572768" y="2414016"/>
-            <a:ext cx="4111600" cy="384048"/>
-          </a:xfrm>
-          <a:prstGeom prst="rect">
-            <a:avLst/>
-          </a:prstGeom>
-          <a:noFill/>
-          <a:ln/>
-        </p:spPr>
-        <p:txBody>
-          <a:bodyPr wrap="square" rtlCol="0" anchor="ctr"/>
-          <a:lstStyle/>
-          <a:p>
-            <a:pPr marL="0" indent="0">
-              <a:buNone/>
-            </a:pPr>
-            <a:r>
-              <a:rPr lang="en-US" sz="1600" b="1" dirty="0">
-                <a:solidFill>
-                  <a:srgbClr val="F3F6FB"/>
-                </a:solidFill>
-                <a:latin typeface="Segoe UI Semibold" pitchFamily="34" charset="0"/>
-                <a:ea typeface="Segoe UI Semibold" pitchFamily="34" charset="-122"/>
-                <a:cs typeface="Segoe UI Semibold" pitchFamily="34" charset="-120"/>
-              </a:rPr>
-              <a:t>A full audit trail</a:t>
-            </a:r>
-            <a:endParaRPr lang="en-US" sz="1600" dirty="0"/>
-          </a:p>
-        </p:txBody>
-      </p:sp>
-      <p:sp>
-        <p:nvSpPr>
-          <p:cNvPr id="9" name="Text 6"/>
-          <p:cNvSpPr/>
-          <p:nvPr/>
-        </p:nvSpPr>
-        <p:spPr>
-          <a:xfrm>
-            <a:off x="1572768" y="2798064"/>
-            <a:ext cx="4111600" cy="457200"/>
-          </a:xfrm>
-          <a:prstGeom prst="rect">
-            <a:avLst/>
-          </a:prstGeom>
-          <a:noFill/>
-          <a:ln/>
-        </p:spPr>
-        <p:txBody>
-          <a:bodyPr wrap="square" rtlCol="0" anchor="ctr"/>
-          <a:lstStyle/>
-          <a:p>
-            <a:pPr marL="0" indent="0">
-              <a:buNone/>
-            </a:pPr>
-            <a:r>
-              <a:rPr lang="en-US" sz="1250" dirty="0">
-                <a:solidFill>
-                  <a:srgbClr val="AAB6C7"/>
-                </a:solidFill>
-                <a:latin typeface="Segoe UI" pitchFamily="34" charset="0"/>
-                <a:ea typeface="Segoe UI" pitchFamily="34" charset="-122"/>
-                <a:cs typeface="Segoe UI" pitchFamily="34" charset="-120"/>
-              </a:rPr>
-              <a:t>Every action the co-worker takes is recorded, end to end.</a:t>
-            </a:r>
-            <a:endParaRPr lang="en-US" sz="1250" dirty="0"/>
-          </a:p>
-        </p:txBody>
-      </p:sp>
-      <p:sp>
-        <p:nvSpPr>
-          <p:cNvPr id="10" name="Shape 7"/>
-          <p:cNvSpPr/>
-          <p:nvPr/>
-        </p:nvSpPr>
-        <p:spPr>
-          <a:xfrm>
-            <a:off x="6278728" y="2194560"/>
-            <a:ext cx="5346040" cy="1188720"/>
-          </a:xfrm>
-          <a:prstGeom prst="roundRect">
-            <a:avLst>
-              <a:gd name="adj" fmla="val 6154"/>
-            </a:avLst>
-          </a:prstGeom>
-          <a:solidFill>
-            <a:srgbClr val="141A25"/>
-          </a:solidFill>
-          <a:ln w="13970">
-            <a:solidFill>
-              <a:srgbClr val="36414F"/>
-            </a:solidFill>
-            <a:prstDash val="solid"/>
-          </a:ln>
-        </p:spPr>
-        <p:txBody>
-          <a:bodyPr/>
-          <a:lstStyle/>
-          <a:p>
-            <a:endParaRPr lang="en-US"/>
-          </a:p>
-        </p:txBody>
-      </p:sp>
-      <p:sp>
-        <p:nvSpPr>
-          <p:cNvPr id="11" name="Shape 8"/>
-          <p:cNvSpPr/>
-          <p:nvPr/>
-        </p:nvSpPr>
-        <p:spPr>
-          <a:xfrm>
-            <a:off x="6534760" y="2496312"/>
-            <a:ext cx="566928" cy="566928"/>
-          </a:xfrm>
-          <a:prstGeom prst="roundRect">
-            <a:avLst>
-              <a:gd name="adj" fmla="val 17742"/>
-            </a:avLst>
-          </a:prstGeom>
-          <a:solidFill>
-            <a:srgbClr val="1B2330"/>
-          </a:solidFill>
-          <a:ln w="15240">
-            <a:solidFill>
-              <a:srgbClr val="3BE3E0"/>
-            </a:solidFill>
-            <a:prstDash val="solid"/>
-          </a:ln>
-        </p:spPr>
-        <p:txBody>
-          <a:bodyPr/>
-          <a:lstStyle/>
-          <a:p>
-            <a:endParaRPr lang="en-US"/>
-          </a:p>
-        </p:txBody>
-      </p:sp>
-      <p:pic>
-        <p:nvPicPr>
-          <p:cNvPr id="12" name="Image 1" descr="C:/Users/neuma_p1qrsic/Repo/agentic-ops1/.scratch/icons/shield.png"/>
-          <p:cNvPicPr>
-            <a:picLocks noChangeAspect="1"/>
-          </p:cNvPicPr>
-          <p:nvPr/>
-        </p:nvPicPr>
-        <p:blipFill>
-          <a:blip r:embed="rId4"/>
-          <a:stretch>
-            <a:fillRect/>
-          </a:stretch>
-        </p:blipFill>
-        <p:spPr>
-          <a:xfrm>
-            <a:off x="6670822" y="2632375"/>
-            <a:ext cx="294803" cy="294803"/>
-          </a:xfrm>
-          <a:prstGeom prst="rect">
-            <a:avLst/>
-          </a:prstGeom>
-        </p:spPr>
-      </p:pic>
-      <p:sp>
-        <p:nvSpPr>
-          <p:cNvPr id="13" name="Text 9"/>
-          <p:cNvSpPr/>
-          <p:nvPr/>
-        </p:nvSpPr>
-        <p:spPr>
-          <a:xfrm>
-            <a:off x="7284568" y="2414016"/>
-            <a:ext cx="4111600" cy="384048"/>
-          </a:xfrm>
-          <a:prstGeom prst="rect">
-            <a:avLst/>
-          </a:prstGeom>
-          <a:noFill/>
-          <a:ln/>
-        </p:spPr>
-        <p:txBody>
-          <a:bodyPr wrap="square" rtlCol="0" anchor="ctr"/>
-          <a:lstStyle/>
-          <a:p>
-            <a:pPr marL="0" indent="0">
-              <a:buNone/>
-            </a:pPr>
-            <a:r>
-              <a:rPr lang="en-US" sz="1600" b="1" dirty="0">
-                <a:solidFill>
-                  <a:srgbClr val="F3F6FB"/>
-                </a:solidFill>
-                <a:latin typeface="Segoe UI Semibold" pitchFamily="34" charset="0"/>
-                <a:ea typeface="Segoe UI Semibold" pitchFamily="34" charset="-122"/>
-                <a:cs typeface="Segoe UI Semibold" pitchFamily="34" charset="-120"/>
-              </a:rPr>
-              <a:t>Approvals where you want them</a:t>
-            </a:r>
-            <a:endParaRPr lang="en-US" sz="1600" dirty="0"/>
-          </a:p>
-        </p:txBody>
-      </p:sp>
-      <p:sp>
-        <p:nvSpPr>
-          <p:cNvPr id="14" name="Text 10"/>
-          <p:cNvSpPr/>
-          <p:nvPr/>
-        </p:nvSpPr>
-        <p:spPr>
-          <a:xfrm>
-            <a:off x="7284568" y="2798064"/>
-            <a:ext cx="4111600" cy="457200"/>
-          </a:xfrm>
-          <a:prstGeom prst="rect">
-            <a:avLst/>
-          </a:prstGeom>
-          <a:noFill/>
-          <a:ln/>
-        </p:spPr>
-        <p:txBody>
-          <a:bodyPr wrap="square" rtlCol="0" anchor="ctr"/>
-          <a:lstStyle/>
-          <a:p>
-            <a:pPr marL="0" indent="0">
-              <a:buNone/>
-            </a:pPr>
-            <a:r>
-              <a:rPr lang="en-US" sz="1250" dirty="0">
-                <a:solidFill>
-                  <a:srgbClr val="AAB6C7"/>
-                </a:solidFill>
-                <a:latin typeface="Segoe UI" pitchFamily="34" charset="0"/>
-                <a:ea typeface="Segoe UI" pitchFamily="34" charset="-122"/>
-                <a:cs typeface="Segoe UI" pitchFamily="34" charset="-120"/>
-              </a:rPr>
-              <a:t>The moves that matter wait for a person to sign off.</a:t>
-            </a:r>
-            <a:endParaRPr lang="en-US" sz="1250" dirty="0"/>
-          </a:p>
-        </p:txBody>
-      </p:sp>
-      <p:sp>
-        <p:nvSpPr>
-          <p:cNvPr id="15" name="Shape 11"/>
-          <p:cNvSpPr/>
-          <p:nvPr/>
-        </p:nvSpPr>
-        <p:spPr>
-          <a:xfrm>
-            <a:off x="566928" y="3547872"/>
-            <a:ext cx="5346040" cy="1188720"/>
-          </a:xfrm>
-          <a:prstGeom prst="roundRect">
-            <a:avLst>
-              <a:gd name="adj" fmla="val 6154"/>
-            </a:avLst>
-          </a:prstGeom>
-          <a:solidFill>
-            <a:srgbClr val="141A25"/>
-          </a:solidFill>
-          <a:ln w="13970">
-            <a:solidFill>
-              <a:srgbClr val="36414F"/>
-            </a:solidFill>
-            <a:prstDash val="solid"/>
-          </a:ln>
-        </p:spPr>
-        <p:txBody>
-          <a:bodyPr/>
-          <a:lstStyle/>
-          <a:p>
-            <a:endParaRPr lang="en-US"/>
-          </a:p>
-        </p:txBody>
-      </p:sp>
-      <p:sp>
-        <p:nvSpPr>
-          <p:cNvPr id="16" name="Shape 12"/>
-          <p:cNvSpPr/>
-          <p:nvPr/>
-        </p:nvSpPr>
-        <p:spPr>
-          <a:xfrm>
-            <a:off x="822960" y="3849624"/>
-            <a:ext cx="566928" cy="566928"/>
-          </a:xfrm>
-          <a:prstGeom prst="roundRect">
-            <a:avLst>
-              <a:gd name="adj" fmla="val 17742"/>
-            </a:avLst>
-          </a:prstGeom>
-          <a:solidFill>
-            <a:srgbClr val="1B2330"/>
-          </a:solidFill>
-          <a:ln w="15240">
-            <a:solidFill>
-              <a:srgbClr val="3BE3E0"/>
-            </a:solidFill>
-            <a:prstDash val="solid"/>
-          </a:ln>
-        </p:spPr>
-        <p:txBody>
-          <a:bodyPr/>
-          <a:lstStyle/>
-          <a:p>
-            <a:endParaRPr lang="en-US"/>
-          </a:p>
-        </p:txBody>
-      </p:sp>
-      <p:pic>
-        <p:nvPicPr>
-          <p:cNvPr id="17" name="Image 2" descr="C:/Users/neuma_p1qrsic/Repo/agentic-ops1/.scratch/icons/eye.png"/>
-          <p:cNvPicPr>
-            <a:picLocks noChangeAspect="1"/>
-          </p:cNvPicPr>
-          <p:nvPr/>
-        </p:nvPicPr>
-        <p:blipFill>
-          <a:blip r:embed="rId5"/>
-          <a:stretch>
-            <a:fillRect/>
-          </a:stretch>
-        </p:blipFill>
-        <p:spPr>
-          <a:xfrm>
-            <a:off x="959023" y="3985687"/>
-            <a:ext cx="294803" cy="294803"/>
-          </a:xfrm>
-          <a:prstGeom prst="rect">
-            <a:avLst/>
-          </a:prstGeom>
-        </p:spPr>
-      </p:pic>
-      <p:sp>
-        <p:nvSpPr>
-          <p:cNvPr id="18" name="Text 13"/>
-          <p:cNvSpPr/>
-          <p:nvPr/>
-        </p:nvSpPr>
-        <p:spPr>
-          <a:xfrm>
-            <a:off x="1572768" y="3767328"/>
-            <a:ext cx="4111600" cy="384048"/>
-          </a:xfrm>
-          <a:prstGeom prst="rect">
-            <a:avLst/>
-          </a:prstGeom>
-          <a:noFill/>
-          <a:ln/>
-        </p:spPr>
-        <p:txBody>
-          <a:bodyPr wrap="square" rtlCol="0" anchor="ctr"/>
-          <a:lstStyle/>
-          <a:p>
-            <a:pPr marL="0" indent="0">
-              <a:buNone/>
-            </a:pPr>
-            <a:r>
-              <a:rPr lang="en-US" sz="1600" b="1" dirty="0">
-                <a:solidFill>
-                  <a:srgbClr val="F3F6FB"/>
-                </a:solidFill>
-                <a:latin typeface="Segoe UI Semibold" pitchFamily="34" charset="0"/>
-                <a:ea typeface="Segoe UI Semibold" pitchFamily="34" charset="-122"/>
-                <a:cs typeface="Segoe UI Semibold" pitchFamily="34" charset="-120"/>
-              </a:rPr>
-              <a:t>Automatic checks</a:t>
-            </a:r>
-            <a:endParaRPr lang="en-US" sz="1600" dirty="0"/>
-          </a:p>
-        </p:txBody>
-      </p:sp>
-      <p:sp>
-        <p:nvSpPr>
-          <p:cNvPr id="19" name="Text 14"/>
-          <p:cNvSpPr/>
-          <p:nvPr/>
-        </p:nvSpPr>
-        <p:spPr>
-          <a:xfrm>
-            <a:off x="1572768" y="4151376"/>
-            <a:ext cx="4111600" cy="457200"/>
-          </a:xfrm>
-          <a:prstGeom prst="rect">
-            <a:avLst/>
-          </a:prstGeom>
-          <a:noFill/>
-          <a:ln/>
-        </p:spPr>
-        <p:txBody>
-          <a:bodyPr wrap="square" rtlCol="0" anchor="ctr"/>
-          <a:lstStyle/>
-          <a:p>
-            <a:pPr marL="0" indent="0">
-              <a:buNone/>
-            </a:pPr>
-            <a:r>
-              <a:rPr lang="en-US" sz="1250" dirty="0">
-                <a:solidFill>
-                  <a:srgbClr val="AAB6C7"/>
-                </a:solidFill>
-                <a:latin typeface="Segoe UI" pitchFamily="34" charset="0"/>
-                <a:ea typeface="Segoe UI" pitchFamily="34" charset="-122"/>
-                <a:cs typeface="Segoe UI" pitchFamily="34" charset="-120"/>
-              </a:rPr>
-              <a:t>Odd or bad data is caught before it reaches a system.</a:t>
-            </a:r>
-            <a:endParaRPr lang="en-US" sz="1250" dirty="0"/>
-          </a:p>
-        </p:txBody>
-      </p:sp>
-      <p:sp>
-        <p:nvSpPr>
-          <p:cNvPr id="20" name="Shape 15"/>
-          <p:cNvSpPr/>
-          <p:nvPr/>
-        </p:nvSpPr>
-        <p:spPr>
-          <a:xfrm>
-            <a:off x="6278728" y="3547872"/>
-            <a:ext cx="5346040" cy="1188720"/>
-          </a:xfrm>
-          <a:prstGeom prst="roundRect">
-            <a:avLst>
-              <a:gd name="adj" fmla="val 6154"/>
-            </a:avLst>
-          </a:prstGeom>
-          <a:solidFill>
-            <a:srgbClr val="141A25"/>
-          </a:solidFill>
-          <a:ln w="13970">
-            <a:solidFill>
-              <a:srgbClr val="36414F"/>
-            </a:solidFill>
-            <a:prstDash val="solid"/>
-          </a:ln>
-        </p:spPr>
-        <p:txBody>
-          <a:bodyPr/>
-          <a:lstStyle/>
-          <a:p>
-            <a:endParaRPr lang="en-US"/>
-          </a:p>
-        </p:txBody>
-      </p:sp>
-      <p:sp>
-        <p:nvSpPr>
-          <p:cNvPr id="21" name="Shape 16"/>
-          <p:cNvSpPr/>
-          <p:nvPr/>
-        </p:nvSpPr>
-        <p:spPr>
-          <a:xfrm>
-            <a:off x="6534760" y="3849624"/>
-            <a:ext cx="566928" cy="566928"/>
-          </a:xfrm>
-          <a:prstGeom prst="roundRect">
-            <a:avLst>
-              <a:gd name="adj" fmla="val 17742"/>
-            </a:avLst>
-          </a:prstGeom>
-          <a:solidFill>
-            <a:srgbClr val="1B2330"/>
-          </a:solidFill>
-          <a:ln w="15240">
-            <a:solidFill>
-              <a:srgbClr val="3BE3E0"/>
-            </a:solidFill>
-            <a:prstDash val="solid"/>
-          </a:ln>
-        </p:spPr>
-        <p:txBody>
-          <a:bodyPr/>
-          <a:lstStyle/>
-          <a:p>
-            <a:endParaRPr lang="en-US"/>
-          </a:p>
-        </p:txBody>
-      </p:sp>
-      <p:pic>
-        <p:nvPicPr>
-          <p:cNvPr id="22" name="Image 3" descr="C:/Users/neuma_p1qrsic/Repo/agentic-ops1/.scratch/icons/bell.png"/>
-          <p:cNvPicPr>
-            <a:picLocks noChangeAspect="1"/>
-          </p:cNvPicPr>
-          <p:nvPr/>
-        </p:nvPicPr>
-        <p:blipFill>
-          <a:blip r:embed="rId6"/>
-          <a:stretch>
-            <a:fillRect/>
-          </a:stretch>
-        </p:blipFill>
-        <p:spPr>
-          <a:xfrm>
-            <a:off x="6670822" y="3985687"/>
-            <a:ext cx="294803" cy="294803"/>
-          </a:xfrm>
-          <a:prstGeom prst="rect">
-            <a:avLst/>
-          </a:prstGeom>
-        </p:spPr>
-      </p:pic>
-      <p:sp>
-        <p:nvSpPr>
-          <p:cNvPr id="23" name="Text 17"/>
-          <p:cNvSpPr/>
-          <p:nvPr/>
-        </p:nvSpPr>
-        <p:spPr>
-          <a:xfrm>
-            <a:off x="7284568" y="3767328"/>
-            <a:ext cx="4111600" cy="384048"/>
-          </a:xfrm>
-          <a:prstGeom prst="rect">
-            <a:avLst/>
-          </a:prstGeom>
-          <a:noFill/>
-          <a:ln/>
-        </p:spPr>
-        <p:txBody>
-          <a:bodyPr wrap="square" rtlCol="0" anchor="ctr"/>
-          <a:lstStyle/>
-          <a:p>
-            <a:pPr marL="0" indent="0">
-              <a:buNone/>
-            </a:pPr>
-            <a:r>
-              <a:rPr lang="en-US" sz="1600" b="1" dirty="0">
-                <a:solidFill>
-                  <a:srgbClr val="F3F6FB"/>
-                </a:solidFill>
-                <a:latin typeface="Segoe UI Semibold" pitchFamily="34" charset="0"/>
-                <a:ea typeface="Segoe UI Semibold" pitchFamily="34" charset="-122"/>
-                <a:cs typeface="Segoe UI Semibold" pitchFamily="34" charset="-120"/>
-              </a:rPr>
-              <a:t>Alerts on exceptions</a:t>
-            </a:r>
-            <a:endParaRPr lang="en-US" sz="1600" dirty="0"/>
-          </a:p>
-        </p:txBody>
-      </p:sp>
-      <p:sp>
-        <p:nvSpPr>
-          <p:cNvPr id="24" name="Text 18"/>
-          <p:cNvSpPr/>
-          <p:nvPr/>
-        </p:nvSpPr>
-        <p:spPr>
-          <a:xfrm>
-            <a:off x="7284568" y="4151376"/>
-            <a:ext cx="4111600" cy="457200"/>
-          </a:xfrm>
-          <a:prstGeom prst="rect">
-            <a:avLst/>
-          </a:prstGeom>
-          <a:noFill/>
-          <a:ln/>
-        </p:spPr>
-        <p:txBody>
-          <a:bodyPr wrap="square" rtlCol="0" anchor="ctr"/>
-          <a:lstStyle/>
-          <a:p>
-            <a:pPr marL="0" indent="0">
-              <a:buNone/>
-            </a:pPr>
-            <a:r>
-              <a:rPr lang="en-US" sz="1250" dirty="0">
-                <a:solidFill>
-                  <a:srgbClr val="AAB6C7"/>
-                </a:solidFill>
-                <a:latin typeface="Segoe UI" pitchFamily="34" charset="0"/>
-                <a:ea typeface="Segoe UI" pitchFamily="34" charset="-122"/>
-                <a:cs typeface="Segoe UI" pitchFamily="34" charset="-120"/>
-              </a:rPr>
-              <a:t>You hear about the odd one out; the rest just runs.</a:t>
-            </a:r>
-            <a:endParaRPr lang="en-US" sz="1250" dirty="0"/>
-          </a:p>
-        </p:txBody>
-      </p:sp>
-      <p:sp>
-        <p:nvSpPr>
-          <p:cNvPr id="25" name="Shape 19"/>
-          <p:cNvSpPr/>
-          <p:nvPr/>
-        </p:nvSpPr>
-        <p:spPr>
-          <a:xfrm>
-            <a:off x="566928" y="4901184"/>
-            <a:ext cx="5346040" cy="1188720"/>
-          </a:xfrm>
-          <a:prstGeom prst="roundRect">
-            <a:avLst>
-              <a:gd name="adj" fmla="val 6154"/>
-            </a:avLst>
-          </a:prstGeom>
-          <a:solidFill>
-            <a:srgbClr val="141A25"/>
-          </a:solidFill>
-          <a:ln w="13970">
-            <a:solidFill>
-              <a:srgbClr val="36414F"/>
-            </a:solidFill>
-            <a:prstDash val="solid"/>
-          </a:ln>
-        </p:spPr>
-        <p:txBody>
-          <a:bodyPr/>
-          <a:lstStyle/>
-          <a:p>
-            <a:endParaRPr lang="en-US"/>
-          </a:p>
-        </p:txBody>
-      </p:sp>
-      <p:sp>
-        <p:nvSpPr>
-          <p:cNvPr id="26" name="Shape 20"/>
-          <p:cNvSpPr/>
-          <p:nvPr/>
-        </p:nvSpPr>
-        <p:spPr>
-          <a:xfrm>
-            <a:off x="822960" y="5202936"/>
-            <a:ext cx="566928" cy="566928"/>
-          </a:xfrm>
-          <a:prstGeom prst="roundRect">
-            <a:avLst>
-              <a:gd name="adj" fmla="val 17742"/>
-            </a:avLst>
-          </a:prstGeom>
-          <a:solidFill>
-            <a:srgbClr val="1B2330"/>
-          </a:solidFill>
-          <a:ln w="15240">
-            <a:solidFill>
-              <a:srgbClr val="3BE3E0"/>
-            </a:solidFill>
-            <a:prstDash val="solid"/>
-          </a:ln>
-        </p:spPr>
-        <p:txBody>
-          <a:bodyPr/>
-          <a:lstStyle/>
-          <a:p>
-            <a:endParaRPr lang="en-US"/>
-          </a:p>
-        </p:txBody>
-      </p:sp>
-      <p:pic>
-        <p:nvPicPr>
-          <p:cNvPr id="27" name="Image 4" descr="C:/Users/neuma_p1qrsic/Repo/agentic-ops1/.scratch/icons/blocks.png"/>
-          <p:cNvPicPr>
-            <a:picLocks noChangeAspect="1"/>
-          </p:cNvPicPr>
-          <p:nvPr/>
-        </p:nvPicPr>
-        <p:blipFill>
-          <a:blip r:embed="rId7"/>
-          <a:stretch>
-            <a:fillRect/>
-          </a:stretch>
-        </p:blipFill>
-        <p:spPr>
-          <a:xfrm>
-            <a:off x="959023" y="5338999"/>
-            <a:ext cx="294803" cy="294803"/>
-          </a:xfrm>
-          <a:prstGeom prst="rect">
-            <a:avLst/>
-          </a:prstGeom>
-        </p:spPr>
-      </p:pic>
-      <p:sp>
-        <p:nvSpPr>
-          <p:cNvPr id="28" name="Text 21"/>
-          <p:cNvSpPr/>
-          <p:nvPr/>
-        </p:nvSpPr>
-        <p:spPr>
-          <a:xfrm>
-            <a:off x="1572768" y="5120640"/>
-            <a:ext cx="4111600" cy="384048"/>
-          </a:xfrm>
-          <a:prstGeom prst="rect">
-            <a:avLst/>
-          </a:prstGeom>
-          <a:noFill/>
-          <a:ln/>
-        </p:spPr>
-        <p:txBody>
-          <a:bodyPr wrap="square" rtlCol="0" anchor="ctr"/>
-          <a:lstStyle/>
-          <a:p>
-            <a:pPr marL="0" indent="0">
-              <a:buNone/>
-            </a:pPr>
-            <a:r>
-              <a:rPr lang="en-US" sz="1600" b="1" dirty="0">
-                <a:solidFill>
-                  <a:srgbClr val="F3F6FB"/>
-                </a:solidFill>
-                <a:latin typeface="Segoe UI Semibold" pitchFamily="34" charset="0"/>
-                <a:ea typeface="Segoe UI Semibold" pitchFamily="34" charset="-122"/>
-                <a:cs typeface="Segoe UI Semibold" pitchFamily="34" charset="-120"/>
-              </a:rPr>
-              <a:t>No code to change it</a:t>
-            </a:r>
-            <a:endParaRPr lang="en-US" sz="1600" dirty="0"/>
-          </a:p>
-        </p:txBody>
-      </p:sp>
-      <p:sp>
-        <p:nvSpPr>
-          <p:cNvPr id="29" name="Text 22"/>
-          <p:cNvSpPr/>
-          <p:nvPr/>
-        </p:nvSpPr>
-        <p:spPr>
-          <a:xfrm>
-            <a:off x="1572768" y="5504688"/>
-            <a:ext cx="4111600" cy="457200"/>
-          </a:xfrm>
-          <a:prstGeom prst="rect">
-            <a:avLst/>
-          </a:prstGeom>
-          <a:noFill/>
-          <a:ln/>
-        </p:spPr>
-        <p:txBody>
-          <a:bodyPr wrap="square" rtlCol="0" anchor="ctr"/>
-          <a:lstStyle/>
-          <a:p>
-            <a:pPr marL="0" indent="0">
-              <a:buNone/>
-            </a:pPr>
-            <a:r>
-              <a:rPr lang="en-US" sz="1250" dirty="0">
-                <a:solidFill>
-                  <a:srgbClr val="AAB6C7"/>
-                </a:solidFill>
-                <a:latin typeface="Segoe UI" pitchFamily="34" charset="0"/>
-                <a:ea typeface="Segoe UI" pitchFamily="34" charset="-122"/>
-                <a:cs typeface="Segoe UI" pitchFamily="34" charset="-120"/>
-              </a:rPr>
-              <a:t>Your rules, changed by your team, no IT project.</a:t>
-            </a:r>
-            <a:endParaRPr lang="en-US" sz="1250" dirty="0"/>
-          </a:p>
-        </p:txBody>
-      </p:sp>
-      <p:sp>
-        <p:nvSpPr>
-          <p:cNvPr id="30" name="Shape 23"/>
-          <p:cNvSpPr/>
-          <p:nvPr/>
-        </p:nvSpPr>
-        <p:spPr>
-          <a:xfrm>
-            <a:off x="6278728" y="4901184"/>
-            <a:ext cx="5346040" cy="1188720"/>
-          </a:xfrm>
-          <a:prstGeom prst="roundRect">
-            <a:avLst>
-              <a:gd name="adj" fmla="val 6154"/>
-            </a:avLst>
-          </a:prstGeom>
-          <a:solidFill>
-            <a:srgbClr val="141A25"/>
-          </a:solidFill>
-          <a:ln w="13970">
-            <a:solidFill>
-              <a:srgbClr val="36414F"/>
-            </a:solidFill>
-            <a:prstDash val="solid"/>
-          </a:ln>
-        </p:spPr>
-        <p:txBody>
-          <a:bodyPr/>
-          <a:lstStyle/>
-          <a:p>
-            <a:endParaRPr lang="en-US"/>
-          </a:p>
-        </p:txBody>
-      </p:sp>
-      <p:sp>
-        <p:nvSpPr>
-          <p:cNvPr id="31" name="Shape 24"/>
-          <p:cNvSpPr/>
-          <p:nvPr/>
-        </p:nvSpPr>
-        <p:spPr>
-          <a:xfrm>
-            <a:off x="6534760" y="5202936"/>
-            <a:ext cx="566928" cy="566928"/>
-          </a:xfrm>
-          <a:prstGeom prst="roundRect">
-            <a:avLst>
-              <a:gd name="adj" fmla="val 17742"/>
-            </a:avLst>
-          </a:prstGeom>
-          <a:solidFill>
-            <a:srgbClr val="1B2330"/>
-          </a:solidFill>
-          <a:ln w="15240">
-            <a:solidFill>
-              <a:srgbClr val="3BE3E0"/>
-            </a:solidFill>
-            <a:prstDash val="solid"/>
-          </a:ln>
-        </p:spPr>
-        <p:txBody>
-          <a:bodyPr/>
-          <a:lstStyle/>
-          <a:p>
-            <a:endParaRPr lang="en-US"/>
-          </a:p>
-        </p:txBody>
-      </p:sp>
-      <p:pic>
-        <p:nvPicPr>
-          <p:cNvPr id="32" name="Image 5" descr="C:/Users/neuma_p1qrsic/Repo/agentic-ops1/.scratch/icons/lock.png"/>
-          <p:cNvPicPr>
-            <a:picLocks noChangeAspect="1"/>
-          </p:cNvPicPr>
-          <p:nvPr/>
-        </p:nvPicPr>
-        <p:blipFill>
-          <a:blip r:embed="rId8"/>
-          <a:stretch>
-            <a:fillRect/>
-          </a:stretch>
-        </p:blipFill>
-        <p:spPr>
-          <a:xfrm>
-            <a:off x="6670822" y="5338999"/>
-            <a:ext cx="294803" cy="294803"/>
-          </a:xfrm>
-          <a:prstGeom prst="rect">
-            <a:avLst/>
-          </a:prstGeom>
-        </p:spPr>
-      </p:pic>
-      <p:sp>
-        <p:nvSpPr>
-          <p:cNvPr id="33" name="Text 25"/>
-          <p:cNvSpPr/>
-          <p:nvPr/>
-        </p:nvSpPr>
-        <p:spPr>
-          <a:xfrm>
-            <a:off x="7284568" y="5120640"/>
-            <a:ext cx="4111600" cy="384048"/>
-          </a:xfrm>
-          <a:prstGeom prst="rect">
-            <a:avLst/>
-          </a:prstGeom>
-          <a:noFill/>
-          <a:ln/>
-        </p:spPr>
-        <p:txBody>
-          <a:bodyPr wrap="square" rtlCol="0" anchor="ctr"/>
-          <a:lstStyle/>
-          <a:p>
-            <a:pPr marL="0" indent="0">
-              <a:buNone/>
-            </a:pPr>
-            <a:r>
-              <a:rPr lang="en-US" sz="1600" b="1" dirty="0">
-                <a:solidFill>
-                  <a:srgbClr val="F3F6FB"/>
-                </a:solidFill>
-                <a:latin typeface="Segoe UI Semibold" pitchFamily="34" charset="0"/>
-                <a:ea typeface="Segoe UI Semibold" pitchFamily="34" charset="-122"/>
-                <a:cs typeface="Segoe UI Semibold" pitchFamily="34" charset="-120"/>
-              </a:rPr>
-              <a:t>ISO 27001 and SOC 1</a:t>
-            </a:r>
-            <a:endParaRPr lang="en-US" sz="1600" dirty="0"/>
-          </a:p>
-        </p:txBody>
-      </p:sp>
-      <p:sp>
-        <p:nvSpPr>
-          <p:cNvPr id="34" name="Text 26"/>
-          <p:cNvSpPr/>
-          <p:nvPr/>
-        </p:nvSpPr>
-        <p:spPr>
-          <a:xfrm>
-            <a:off x="7284568" y="5504688"/>
-            <a:ext cx="4111600" cy="457200"/>
-          </a:xfrm>
-          <a:prstGeom prst="rect">
-            <a:avLst/>
-          </a:prstGeom>
-          <a:noFill/>
-          <a:ln/>
-        </p:spPr>
-        <p:txBody>
-          <a:bodyPr wrap="square" rtlCol="0" anchor="ctr"/>
-          <a:lstStyle/>
-          <a:p>
-            <a:pPr marL="0" indent="0">
-              <a:buNone/>
-            </a:pPr>
-            <a:r>
-              <a:rPr lang="en-US" sz="1250" dirty="0">
-                <a:solidFill>
-                  <a:srgbClr val="AAB6C7"/>
-                </a:solidFill>
-                <a:latin typeface="Segoe UI" pitchFamily="34" charset="0"/>
-                <a:ea typeface="Segoe UI" pitchFamily="34" charset="-122"/>
-                <a:cs typeface="Segoe UI" pitchFamily="34" charset="-120"/>
-              </a:rPr>
-              <a:t>The security controls your auditors already expect.</a:t>
-            </a:r>
-            <a:endParaRPr lang="en-US" sz="1250" dirty="0"/>
-          </a:p>
-        </p:txBody>
-      </p:sp>
-      <p:sp>
-        <p:nvSpPr>
-          <p:cNvPr id="35" name="Text 27"/>
-          <p:cNvSpPr/>
-          <p:nvPr/>
-        </p:nvSpPr>
-        <p:spPr>
-          <a:xfrm>
-            <a:off x="566928" y="6400800"/>
-            <a:ext cx="8229600" cy="274320"/>
-          </a:xfrm>
-          <a:prstGeom prst="rect">
-            <a:avLst/>
-          </a:prstGeom>
-          <a:noFill/>
-          <a:ln/>
-        </p:spPr>
-        <p:txBody>
-          <a:bodyPr wrap="square" rtlCol="0" anchor="ctr"/>
-          <a:lstStyle/>
-          <a:p>
-            <a:pPr marL="0" indent="0" algn="l">
-              <a:buNone/>
-            </a:pPr>
-            <a:r>
-              <a:rPr lang="en-US" sz="900" b="1" dirty="0">
-                <a:solidFill>
-                  <a:srgbClr val="AAB6C7"/>
-                </a:solidFill>
-                <a:latin typeface="Segoe UI" pitchFamily="34" charset="0"/>
-                <a:ea typeface="Segoe UI" pitchFamily="34" charset="-122"/>
-                <a:cs typeface="Segoe UI" pitchFamily="34" charset="-120"/>
-              </a:rPr>
-              <a:t>Brisken</a:t>
-            </a:r>
-            <a:r>
-              <a:rPr lang="en-US" sz="900" dirty="0">
-                <a:solidFill>
-                  <a:srgbClr val="7C8A9B"/>
-                </a:solidFill>
-                <a:latin typeface="Segoe UI" pitchFamily="34" charset="0"/>
-                <a:ea typeface="Segoe UI" pitchFamily="34" charset="-122"/>
-                <a:cs typeface="Segoe UI" pitchFamily="34" charset="-120"/>
-              </a:rPr>
-              <a:t>   Digital Co-Worker, part of OnePilot</a:t>
-            </a:r>
-            <a:endParaRPr lang="en-US" sz="900" dirty="0"/>
-          </a:p>
-        </p:txBody>
-      </p:sp>
-      <p:sp>
-        <p:nvSpPr>
-          <p:cNvPr id="36" name="Text 28"/>
-          <p:cNvSpPr/>
-          <p:nvPr/>
-        </p:nvSpPr>
-        <p:spPr>
-          <a:xfrm>
-            <a:off x="10527487" y="6400800"/>
-            <a:ext cx="1097280" cy="274320"/>
-          </a:xfrm>
-          <a:prstGeom prst="rect">
-            <a:avLst/>
-          </a:prstGeom>
-          <a:noFill/>
-          <a:ln/>
-        </p:spPr>
-        <p:txBody>
-          <a:bodyPr wrap="square" rtlCol="0" anchor="ctr"/>
-          <a:lstStyle/>
-          <a:p>
-            <a:pPr marL="0" indent="0" algn="r">
-              <a:buNone/>
-            </a:pPr>
-            <a:r>
-              <a:rPr lang="en-US" sz="900" dirty="0">
-                <a:solidFill>
-                  <a:srgbClr val="AAB6C7"/>
-                </a:solidFill>
-                <a:latin typeface="Segoe UI" pitchFamily="34" charset="0"/>
-                <a:ea typeface="Segoe UI" pitchFamily="34" charset="-122"/>
-                <a:cs typeface="Segoe UI" pitchFamily="34" charset="-120"/>
-              </a:rPr>
-              <a:t>08 / 11</a:t>
-            </a:r>
-            <a:endParaRPr lang="en-US" sz="900" dirty="0"/>
-          </a:p>
-        </p:txBody>
-      </p:sp>
-      <p:sp>
-        <p:nvSpPr>
-          <p:cNvPr id="37" name="Shape 29"/>
-          <p:cNvSpPr/>
-          <p:nvPr/>
-        </p:nvSpPr>
-        <p:spPr>
-          <a:xfrm>
-            <a:off x="566928" y="6327648"/>
-            <a:ext cx="11057839" cy="0"/>
-          </a:xfrm>
-          <a:prstGeom prst="line">
-            <a:avLst/>
-          </a:prstGeom>
-          <a:noFill/>
-          <a:ln w="9525">
-            <a:solidFill>
-              <a:srgbClr val="36414F"/>
-            </a:solidFill>
-            <a:prstDash val="solid"/>
-          </a:ln>
-        </p:spPr>
-        <p:txBody>
-          <a:bodyPr/>
-          <a:lstStyle/>
-          <a:p>
-            <a:endParaRPr lang="en-US"/>
-          </a:p>
-        </p:txBody>
-      </p:sp>
-    </p:spTree>
-  </p:cSld>
-  <p:clrMapOvr>
-    <a:masterClrMapping/>
-  </p:clrMapOvr>
-</p:sld>
-</file>
-
-<file path=ppt/slides/slide9.xml><?xml version="1.0" encoding="utf-8"?>
-<p:sld xmlns:a="http://schemas.openxmlformats.org/drawingml/2006/main" xmlns:r="http://schemas.openxmlformats.org/officeDocument/2006/relationships" xmlns:p="http://schemas.openxmlformats.org/presentationml/2006/main">
-  <p:cSld name="Slide 9">
-    <p:bg>
-      <p:bgPr>
-        <a:solidFill>
-          <a:srgbClr val="0E121B"/>
-        </a:solidFill>
-        <a:effectLst/>
-      </p:bgPr>
-    </p:bg>
-    <p:spTree>
-      <p:nvGrpSpPr>
-        <p:cNvPr id="1" name=""/>
-        <p:cNvGrpSpPr/>
-        <p:nvPr/>
-      </p:nvGrpSpPr>
-      <p:grpSpPr>
-        <a:xfrm>
-          <a:off x="0" y="0"/>
-          <a:ext cx="0" cy="0"/>
-          <a:chOff x="0" y="0"/>
-          <a:chExt cx="0" cy="0"/>
-        </a:xfrm>
-      </p:grpSpPr>
-      <p:sp>
-        <p:nvSpPr>
-          <p:cNvPr id="2" name="Shape 0"/>
-          <p:cNvSpPr/>
-          <p:nvPr/>
-        </p:nvSpPr>
-        <p:spPr>
-          <a:xfrm>
-            <a:off x="566928" y="585216"/>
-            <a:ext cx="45720" cy="219456"/>
-          </a:xfrm>
-          <a:prstGeom prst="rect">
-            <a:avLst/>
-          </a:prstGeom>
-          <a:solidFill>
-            <a:srgbClr val="3BE3E0"/>
-          </a:solidFill>
-          <a:ln w="12700">
-            <a:solidFill>
-              <a:srgbClr val="333333"/>
-            </a:solidFill>
-            <a:prstDash val="solid"/>
-          </a:ln>
-        </p:spPr>
-        <p:txBody>
-          <a:bodyPr/>
-          <a:lstStyle/>
-          <a:p>
-            <a:endParaRPr lang="en-US"/>
-          </a:p>
-        </p:txBody>
-      </p:sp>
-      <p:sp>
-        <p:nvSpPr>
-          <p:cNvPr id="3" name="Text 1"/>
-          <p:cNvSpPr/>
-          <p:nvPr/>
-        </p:nvSpPr>
-        <p:spPr>
-          <a:xfrm>
-            <a:off x="713232" y="512064"/>
-            <a:ext cx="8229600" cy="329184"/>
-          </a:xfrm>
-          <a:prstGeom prst="rect">
-            <a:avLst/>
-          </a:prstGeom>
-          <a:noFill/>
-          <a:ln/>
-        </p:spPr>
-        <p:txBody>
-          <a:bodyPr wrap="square" rtlCol="0" anchor="ctr"/>
-          <a:lstStyle/>
-          <a:p>
-            <a:pPr marL="0" indent="0" algn="l">
-              <a:buNone/>
-            </a:pPr>
-            <a:r>
-              <a:rPr lang="en-US" sz="1200" b="1" kern="0" spc="200" dirty="0">
-                <a:solidFill>
-                  <a:srgbClr val="3BE3E0"/>
-                </a:solidFill>
-                <a:latin typeface="Segoe UI Semibold" pitchFamily="34" charset="0"/>
-                <a:ea typeface="Segoe UI Semibold" pitchFamily="34" charset="-122"/>
-                <a:cs typeface="Segoe UI Semibold" pitchFamily="34" charset="-120"/>
-              </a:rPr>
-              <a:t>WHAT IT RUNS ON</a:t>
-            </a:r>
-            <a:endParaRPr lang="en-US" sz="1200" dirty="0"/>
-          </a:p>
-        </p:txBody>
-      </p:sp>
-      <p:sp>
-        <p:nvSpPr>
-          <p:cNvPr id="4" name="Text 2"/>
-          <p:cNvSpPr/>
-          <p:nvPr/>
-        </p:nvSpPr>
-        <p:spPr>
-          <a:xfrm>
-            <a:off x="566928" y="960120"/>
-            <a:ext cx="10789920" cy="731520"/>
-          </a:xfrm>
-          <a:prstGeom prst="rect">
-            <a:avLst/>
-          </a:prstGeom>
-          <a:noFill/>
-          <a:ln/>
-        </p:spPr>
-        <p:txBody>
-          <a:bodyPr wrap="square" rtlCol="0" anchor="ctr"/>
-          <a:lstStyle/>
-          <a:p>
-            <a:pPr marL="0" indent="0">
-              <a:buNone/>
-            </a:pPr>
-            <a:r>
-              <a:rPr lang="en-US" sz="2900" b="1" dirty="0">
-                <a:solidFill>
-                  <a:srgbClr val="F3F6FB"/>
-                </a:solidFill>
-                <a:latin typeface="Segoe UI Semibold" pitchFamily="34" charset="0"/>
-                <a:ea typeface="Segoe UI Semibold" pitchFamily="34" charset="-122"/>
-                <a:cs typeface="Segoe UI Semibold" pitchFamily="34" charset="-120"/>
-              </a:rPr>
-              <a:t>Digital Co-Worker is one app on </a:t>
-            </a:r>
-            <a:r>
-              <a:rPr lang="en-US" sz="2900" b="1" dirty="0">
-                <a:solidFill>
-                  <a:srgbClr val="3BE3E0"/>
-                </a:solidFill>
-                <a:latin typeface="Segoe UI Semibold" pitchFamily="34" charset="0"/>
-                <a:ea typeface="Segoe UI Semibold" pitchFamily="34" charset="-122"/>
-                <a:cs typeface="Segoe UI Semibold" pitchFamily="34" charset="-120"/>
-              </a:rPr>
-              <a:t>OnePilot</a:t>
-            </a:r>
-            <a:r>
-              <a:rPr lang="en-US" sz="2900" b="1" dirty="0">
-                <a:solidFill>
-                  <a:srgbClr val="F3F6FB"/>
-                </a:solidFill>
-                <a:latin typeface="Segoe UI Semibold" pitchFamily="34" charset="0"/>
-                <a:ea typeface="Segoe UI Semibold" pitchFamily="34" charset="-122"/>
-                <a:cs typeface="Segoe UI Semibold" pitchFamily="34" charset="-120"/>
-              </a:rPr>
-              <a:t>.</a:t>
-            </a:r>
-            <a:endParaRPr lang="en-US" sz="2900" dirty="0"/>
-          </a:p>
-        </p:txBody>
-      </p:sp>
-      <p:sp>
-        <p:nvSpPr>
-          <p:cNvPr id="5" name="Text 3"/>
-          <p:cNvSpPr/>
-          <p:nvPr/>
-        </p:nvSpPr>
-        <p:spPr>
-          <a:xfrm>
-            <a:off x="566928" y="1828800"/>
-            <a:ext cx="10607040" cy="1051560"/>
-          </a:xfrm>
-          <a:prstGeom prst="rect">
-            <a:avLst/>
-          </a:prstGeom>
-          <a:noFill/>
-          <a:ln/>
-        </p:spPr>
-        <p:txBody>
-          <a:bodyPr wrap="square" rtlCol="0" anchor="ctr"/>
-          <a:lstStyle/>
-          <a:p>
-            <a:pPr marL="0" indent="0">
-              <a:lnSpc>
-                <a:spcPct val="130000"/>
-              </a:lnSpc>
-              <a:buNone/>
-            </a:pPr>
-            <a:r>
-              <a:rPr lang="en-US" sz="1600" dirty="0">
-                <a:solidFill>
-                  <a:srgbClr val="AAB6C7"/>
-                </a:solidFill>
-                <a:latin typeface="Segoe UI" pitchFamily="34" charset="0"/>
-                <a:ea typeface="Segoe UI" pitchFamily="34" charset="-122"/>
-                <a:cs typeface="Segoe UI" pitchFamily="34" charset="-120"/>
-              </a:rPr>
-              <a:t>OnePilot is the layer underneath. It moves your data cleanly between systems, both ways, across SAP and everything else, with the checks and the AI built in. One way to connect to all of it:</a:t>
-            </a:r>
-            <a:endParaRPr lang="en-US" sz="1600" dirty="0"/>
-          </a:p>
-        </p:txBody>
-      </p:sp>
-      <p:sp>
-        <p:nvSpPr>
-          <p:cNvPr id="6" name="Shape 4"/>
-          <p:cNvSpPr/>
-          <p:nvPr/>
-        </p:nvSpPr>
-        <p:spPr>
-          <a:xfrm>
-            <a:off x="566928" y="3246120"/>
-            <a:ext cx="1992112" cy="1554480"/>
-          </a:xfrm>
-          <a:prstGeom prst="roundRect">
-            <a:avLst>
-              <a:gd name="adj" fmla="val 5882"/>
-            </a:avLst>
-          </a:prstGeom>
-          <a:solidFill>
-            <a:srgbClr val="141A25"/>
-          </a:solidFill>
-          <a:ln w="13970">
-            <a:solidFill>
-              <a:srgbClr val="36414F"/>
-            </a:solidFill>
-            <a:prstDash val="solid"/>
-          </a:ln>
-        </p:spPr>
-        <p:txBody>
-          <a:bodyPr/>
-          <a:lstStyle/>
-          <a:p>
-            <a:endParaRPr lang="en-US"/>
-          </a:p>
-        </p:txBody>
-      </p:sp>
-      <p:pic>
-        <p:nvPicPr>
-          <p:cNvPr id="7" name="Image 0" descr="C:/Users/neuma_p1qrsic/Repo/agentic-ops1/.scratch/icons/database.png"/>
-          <p:cNvPicPr>
-            <a:picLocks noChangeAspect="1"/>
-          </p:cNvPicPr>
-          <p:nvPr/>
-        </p:nvPicPr>
-        <p:blipFill>
-          <a:blip r:embed="rId3"/>
-          <a:stretch>
-            <a:fillRect/>
-          </a:stretch>
-        </p:blipFill>
-        <p:spPr>
-          <a:xfrm>
-            <a:off x="1252088" y="3538728"/>
-            <a:ext cx="621792" cy="621792"/>
-          </a:xfrm>
-          <a:prstGeom prst="rect">
-            <a:avLst/>
-          </a:prstGeom>
-        </p:spPr>
-      </p:pic>
-      <p:sp>
-        <p:nvSpPr>
-          <p:cNvPr id="8" name="Text 5"/>
-          <p:cNvSpPr/>
-          <p:nvPr/>
-        </p:nvSpPr>
-        <p:spPr>
-          <a:xfrm>
-            <a:off x="640080" y="4233672"/>
-            <a:ext cx="1845808" cy="457200"/>
-          </a:xfrm>
-          <a:prstGeom prst="rect">
-            <a:avLst/>
-          </a:prstGeom>
-          <a:noFill/>
-          <a:ln/>
-        </p:spPr>
-        <p:txBody>
-          <a:bodyPr wrap="square" rtlCol="0" anchor="ctr"/>
-          <a:lstStyle/>
-          <a:p>
-            <a:pPr marL="0" indent="0" algn="ctr">
-              <a:buNone/>
-            </a:pPr>
-            <a:r>
-              <a:rPr lang="en-US" sz="1300" dirty="0">
-                <a:solidFill>
-                  <a:srgbClr val="F3F6FB"/>
-                </a:solidFill>
-                <a:latin typeface="Segoe UI" pitchFamily="34" charset="0"/>
-                <a:ea typeface="Segoe UI" pitchFamily="34" charset="-122"/>
-                <a:cs typeface="Segoe UI" pitchFamily="34" charset="-120"/>
-              </a:rPr>
-              <a:t>SAP systems</a:t>
-            </a:r>
-            <a:endParaRPr lang="en-US" sz="1300" dirty="0"/>
-          </a:p>
-        </p:txBody>
-      </p:sp>
-      <p:sp>
-        <p:nvSpPr>
-          <p:cNvPr id="9" name="Shape 6"/>
-          <p:cNvSpPr/>
-          <p:nvPr/>
-        </p:nvSpPr>
-        <p:spPr>
-          <a:xfrm>
-            <a:off x="2833360" y="3246120"/>
-            <a:ext cx="1992112" cy="1554480"/>
-          </a:xfrm>
-          <a:prstGeom prst="roundRect">
-            <a:avLst>
-              <a:gd name="adj" fmla="val 5882"/>
-            </a:avLst>
-          </a:prstGeom>
-          <a:solidFill>
-            <a:srgbClr val="141A25"/>
-          </a:solidFill>
-          <a:ln w="13970">
-            <a:solidFill>
-              <a:srgbClr val="36414F"/>
-            </a:solidFill>
-            <a:prstDash val="solid"/>
-          </a:ln>
-        </p:spPr>
-        <p:txBody>
-          <a:bodyPr/>
-          <a:lstStyle/>
-          <a:p>
-            <a:endParaRPr lang="en-US"/>
-          </a:p>
-        </p:txBody>
-      </p:sp>
-      <p:pic>
-        <p:nvPicPr>
-          <p:cNvPr id="10" name="Image 1" descr="C:/Users/neuma_p1qrsic/Repo/agentic-ops1/.scratch/icons/sheet.png"/>
-          <p:cNvPicPr>
-            <a:picLocks noChangeAspect="1"/>
-          </p:cNvPicPr>
-          <p:nvPr/>
-        </p:nvPicPr>
-        <p:blipFill>
-          <a:blip r:embed="rId4"/>
-          <a:stretch>
-            <a:fillRect/>
-          </a:stretch>
-        </p:blipFill>
-        <p:spPr>
-          <a:xfrm>
-            <a:off x="3518520" y="3538728"/>
-            <a:ext cx="621792" cy="621792"/>
-          </a:xfrm>
-          <a:prstGeom prst="rect">
-            <a:avLst/>
-          </a:prstGeom>
-        </p:spPr>
-      </p:pic>
-      <p:sp>
-        <p:nvSpPr>
-          <p:cNvPr id="11" name="Text 7"/>
-          <p:cNvSpPr/>
-          <p:nvPr/>
-        </p:nvSpPr>
-        <p:spPr>
-          <a:xfrm>
-            <a:off x="2906512" y="4233672"/>
-            <a:ext cx="1845808" cy="457200"/>
-          </a:xfrm>
-          <a:prstGeom prst="rect">
-            <a:avLst/>
-          </a:prstGeom>
-          <a:noFill/>
-          <a:ln/>
-        </p:spPr>
-        <p:txBody>
-          <a:bodyPr wrap="square" rtlCol="0" anchor="ctr"/>
-          <a:lstStyle/>
-          <a:p>
-            <a:pPr marL="0" indent="0" algn="ctr">
-              <a:buNone/>
-            </a:pPr>
-            <a:r>
-              <a:rPr lang="en-US" sz="1300" dirty="0">
-                <a:solidFill>
-                  <a:srgbClr val="F3F6FB"/>
-                </a:solidFill>
-                <a:latin typeface="Segoe UI" pitchFamily="34" charset="0"/>
-                <a:ea typeface="Segoe UI" pitchFamily="34" charset="-122"/>
-                <a:cs typeface="Segoe UI" pitchFamily="34" charset="-120"/>
-              </a:rPr>
-              <a:t>Spreadsheets &amp; files</a:t>
-            </a:r>
-            <a:endParaRPr lang="en-US" sz="1300" dirty="0"/>
-          </a:p>
-        </p:txBody>
-      </p:sp>
-      <p:sp>
-        <p:nvSpPr>
-          <p:cNvPr id="12" name="Shape 8"/>
-          <p:cNvSpPr/>
-          <p:nvPr/>
-        </p:nvSpPr>
-        <p:spPr>
-          <a:xfrm>
-            <a:off x="5099792" y="3246120"/>
-            <a:ext cx="1992112" cy="1554480"/>
-          </a:xfrm>
-          <a:prstGeom prst="roundRect">
-            <a:avLst>
-              <a:gd name="adj" fmla="val 5882"/>
-            </a:avLst>
-          </a:prstGeom>
-          <a:solidFill>
-            <a:srgbClr val="141A25"/>
-          </a:solidFill>
-          <a:ln w="13970">
-            <a:solidFill>
-              <a:srgbClr val="36414F"/>
-            </a:solidFill>
-            <a:prstDash val="solid"/>
-          </a:ln>
-        </p:spPr>
-        <p:txBody>
-          <a:bodyPr/>
-          <a:lstStyle/>
-          <a:p>
-            <a:endParaRPr lang="en-US"/>
-          </a:p>
-        </p:txBody>
-      </p:sp>
-      <p:pic>
-        <p:nvPicPr>
-          <p:cNvPr id="13" name="Image 2" descr="C:/Users/neuma_p1qrsic/Repo/agentic-ops1/.scratch/icons/mail.png"/>
-          <p:cNvPicPr>
-            <a:picLocks noChangeAspect="1"/>
-          </p:cNvPicPr>
-          <p:nvPr/>
-        </p:nvPicPr>
-        <p:blipFill>
-          <a:blip r:embed="rId5"/>
-          <a:stretch>
-            <a:fillRect/>
-          </a:stretch>
-        </p:blipFill>
-        <p:spPr>
-          <a:xfrm>
-            <a:off x="5784952" y="3538728"/>
-            <a:ext cx="621792" cy="621792"/>
-          </a:xfrm>
-          <a:prstGeom prst="rect">
-            <a:avLst/>
-          </a:prstGeom>
-        </p:spPr>
-      </p:pic>
-      <p:sp>
-        <p:nvSpPr>
-          <p:cNvPr id="14" name="Text 9"/>
-          <p:cNvSpPr/>
-          <p:nvPr/>
-        </p:nvSpPr>
-        <p:spPr>
-          <a:xfrm>
-            <a:off x="5172944" y="4233672"/>
-            <a:ext cx="1845808" cy="457200"/>
-          </a:xfrm>
-          <a:prstGeom prst="rect">
-            <a:avLst/>
-          </a:prstGeom>
-          <a:noFill/>
-          <a:ln/>
-        </p:spPr>
-        <p:txBody>
-          <a:bodyPr wrap="square" rtlCol="0" anchor="ctr"/>
-          <a:lstStyle/>
-          <a:p>
-            <a:pPr marL="0" indent="0" algn="ctr">
-              <a:buNone/>
-            </a:pPr>
-            <a:r>
-              <a:rPr lang="en-US" sz="1300" dirty="0">
-                <a:solidFill>
-                  <a:srgbClr val="F3F6FB"/>
-                </a:solidFill>
-                <a:latin typeface="Segoe UI" pitchFamily="34" charset="0"/>
-                <a:ea typeface="Segoe UI" pitchFamily="34" charset="-122"/>
-                <a:cs typeface="Segoe UI" pitchFamily="34" charset="-120"/>
-              </a:rPr>
-              <a:t>Email</a:t>
-            </a:r>
-            <a:endParaRPr lang="en-US" sz="1300" dirty="0"/>
-          </a:p>
-        </p:txBody>
-      </p:sp>
-      <p:sp>
-        <p:nvSpPr>
-          <p:cNvPr id="15" name="Shape 10"/>
-          <p:cNvSpPr/>
-          <p:nvPr/>
-        </p:nvSpPr>
-        <p:spPr>
-          <a:xfrm>
-            <a:off x="7366224" y="3246120"/>
-            <a:ext cx="1992112" cy="1554480"/>
-          </a:xfrm>
-          <a:prstGeom prst="roundRect">
-            <a:avLst>
-              <a:gd name="adj" fmla="val 5882"/>
-            </a:avLst>
-          </a:prstGeom>
-          <a:solidFill>
-            <a:srgbClr val="141A25"/>
-          </a:solidFill>
-          <a:ln w="13970">
-            <a:solidFill>
-              <a:srgbClr val="36414F"/>
-            </a:solidFill>
-            <a:prstDash val="solid"/>
-          </a:ln>
-        </p:spPr>
-        <p:txBody>
-          <a:bodyPr/>
-          <a:lstStyle/>
-          <a:p>
-            <a:endParaRPr lang="en-US"/>
-          </a:p>
-        </p:txBody>
-      </p:sp>
-      <p:pic>
-        <p:nvPicPr>
-          <p:cNvPr id="16" name="Image 3" descr="C:/Users/neuma_p1qrsic/Repo/agentic-ops1/.scratch/icons/globe.png"/>
-          <p:cNvPicPr>
-            <a:picLocks noChangeAspect="1"/>
-          </p:cNvPicPr>
-          <p:nvPr/>
-        </p:nvPicPr>
-        <p:blipFill>
-          <a:blip r:embed="rId6"/>
-          <a:stretch>
-            <a:fillRect/>
-          </a:stretch>
-        </p:blipFill>
-        <p:spPr>
-          <a:xfrm>
-            <a:off x="8051383" y="3538728"/>
-            <a:ext cx="621792" cy="621792"/>
-          </a:xfrm>
-          <a:prstGeom prst="rect">
-            <a:avLst/>
-          </a:prstGeom>
-        </p:spPr>
-      </p:pic>
-      <p:sp>
-        <p:nvSpPr>
-          <p:cNvPr id="17" name="Text 11"/>
-          <p:cNvSpPr/>
-          <p:nvPr/>
-        </p:nvSpPr>
-        <p:spPr>
-          <a:xfrm>
-            <a:off x="7439376" y="4233672"/>
-            <a:ext cx="1845808" cy="457200"/>
-          </a:xfrm>
-          <a:prstGeom prst="rect">
-            <a:avLst/>
-          </a:prstGeom>
-          <a:noFill/>
-          <a:ln/>
-        </p:spPr>
-        <p:txBody>
-          <a:bodyPr wrap="square" rtlCol="0" anchor="ctr"/>
-          <a:lstStyle/>
-          <a:p>
-            <a:pPr marL="0" indent="0" algn="ctr">
-              <a:buNone/>
-            </a:pPr>
-            <a:r>
-              <a:rPr lang="en-US" sz="1300" dirty="0">
-                <a:solidFill>
-                  <a:srgbClr val="F3F6FB"/>
-                </a:solidFill>
-                <a:latin typeface="Segoe UI" pitchFamily="34" charset="0"/>
-                <a:ea typeface="Segoe UI" pitchFamily="34" charset="-122"/>
-                <a:cs typeface="Segoe UI" pitchFamily="34" charset="-120"/>
-              </a:rPr>
-              <a:t>Web &amp; APIs</a:t>
-            </a:r>
-            <a:endParaRPr lang="en-US" sz="1300" dirty="0"/>
-          </a:p>
-        </p:txBody>
-      </p:sp>
-      <p:sp>
-        <p:nvSpPr>
-          <p:cNvPr id="18" name="Shape 12"/>
-          <p:cNvSpPr/>
-          <p:nvPr/>
-        </p:nvSpPr>
-        <p:spPr>
-          <a:xfrm>
-            <a:off x="9632655" y="3246120"/>
-            <a:ext cx="1992112" cy="1554480"/>
-          </a:xfrm>
-          <a:prstGeom prst="roundRect">
-            <a:avLst>
-              <a:gd name="adj" fmla="val 5882"/>
-            </a:avLst>
-          </a:prstGeom>
-          <a:solidFill>
-            <a:srgbClr val="141A25"/>
-          </a:solidFill>
-          <a:ln w="13970">
-            <a:solidFill>
-              <a:srgbClr val="36414F"/>
-            </a:solidFill>
-            <a:prstDash val="solid"/>
-          </a:ln>
-        </p:spPr>
-        <p:txBody>
-          <a:bodyPr/>
-          <a:lstStyle/>
-          <a:p>
-            <a:endParaRPr lang="en-US"/>
-          </a:p>
-        </p:txBody>
-      </p:sp>
-      <p:pic>
-        <p:nvPicPr>
-          <p:cNvPr id="19" name="Image 4" descr="C:/Users/neuma_p1qrsic/Repo/agentic-ops1/.scratch/icons/spark.png"/>
-          <p:cNvPicPr>
-            <a:picLocks noChangeAspect="1"/>
-          </p:cNvPicPr>
-          <p:nvPr/>
-        </p:nvPicPr>
-        <p:blipFill>
-          <a:blip r:embed="rId7"/>
-          <a:stretch>
-            <a:fillRect/>
-          </a:stretch>
-        </p:blipFill>
-        <p:spPr>
-          <a:xfrm>
-            <a:off x="10317815" y="3538728"/>
-            <a:ext cx="621792" cy="621792"/>
-          </a:xfrm>
-          <a:prstGeom prst="rect">
-            <a:avLst/>
-          </a:prstGeom>
-        </p:spPr>
-      </p:pic>
-      <p:sp>
-        <p:nvSpPr>
-          <p:cNvPr id="20" name="Text 13"/>
-          <p:cNvSpPr/>
-          <p:nvPr/>
-        </p:nvSpPr>
-        <p:spPr>
-          <a:xfrm>
-            <a:off x="9705807" y="4233672"/>
-            <a:ext cx="1845808" cy="457200"/>
-          </a:xfrm>
-          <a:prstGeom prst="rect">
-            <a:avLst/>
-          </a:prstGeom>
-          <a:noFill/>
-          <a:ln/>
-        </p:spPr>
-        <p:txBody>
-          <a:bodyPr wrap="square" rtlCol="0" anchor="ctr"/>
-          <a:lstStyle/>
-          <a:p>
-            <a:pPr marL="0" indent="0" algn="ctr">
-              <a:buNone/>
-            </a:pPr>
-            <a:r>
-              <a:rPr lang="en-US" sz="1300" dirty="0">
-                <a:solidFill>
-                  <a:srgbClr val="F3F6FB"/>
-                </a:solidFill>
-                <a:latin typeface="Segoe UI" pitchFamily="34" charset="0"/>
-                <a:ea typeface="Segoe UI" pitchFamily="34" charset="-122"/>
-                <a:cs typeface="Segoe UI" pitchFamily="34" charset="-120"/>
-              </a:rPr>
-              <a:t>AI</a:t>
-            </a:r>
-            <a:endParaRPr lang="en-US" sz="1300" dirty="0"/>
-          </a:p>
-        </p:txBody>
-      </p:sp>
-      <p:sp>
-        <p:nvSpPr>
-          <p:cNvPr id="21" name="Text 14"/>
-          <p:cNvSpPr/>
-          <p:nvPr/>
-        </p:nvSpPr>
-        <p:spPr>
-          <a:xfrm>
-            <a:off x="566928" y="5166360"/>
-            <a:ext cx="11057839" cy="457200"/>
-          </a:xfrm>
-          <a:prstGeom prst="rect">
-            <a:avLst/>
-          </a:prstGeom>
-          <a:noFill/>
-          <a:ln/>
-        </p:spPr>
-        <p:txBody>
-          <a:bodyPr wrap="square" rtlCol="0" anchor="ctr"/>
-          <a:lstStyle/>
-          <a:p>
-            <a:pPr marL="0" indent="0">
-              <a:buNone/>
-            </a:pPr>
-            <a:r>
-              <a:rPr lang="en-US" sz="1450" dirty="0">
-                <a:solidFill>
-                  <a:srgbClr val="3BE3E0"/>
-                </a:solidFill>
-                <a:latin typeface="Segoe UI" pitchFamily="34" charset="0"/>
-                <a:ea typeface="Segoe UI" pitchFamily="34" charset="-122"/>
-                <a:cs typeface="Segoe UI" pitchFamily="34" charset="-120"/>
-              </a:rPr>
-              <a:t>It reads and writes to each of them, so the work lands where it needs to with nothing re-typed.</a:t>
-            </a:r>
-            <a:endParaRPr lang="en-US" sz="1450" dirty="0"/>
-          </a:p>
-        </p:txBody>
-      </p:sp>
-      <p:sp>
-        <p:nvSpPr>
-          <p:cNvPr id="22" name="Text 15"/>
-          <p:cNvSpPr/>
-          <p:nvPr/>
-        </p:nvSpPr>
-        <p:spPr>
-          <a:xfrm>
-            <a:off x="566928" y="6400800"/>
-            <a:ext cx="8229600" cy="274320"/>
-          </a:xfrm>
-          <a:prstGeom prst="rect">
-            <a:avLst/>
-          </a:prstGeom>
-          <a:noFill/>
-          <a:ln/>
-        </p:spPr>
-        <p:txBody>
-          <a:bodyPr wrap="square" rtlCol="0" anchor="ctr"/>
-          <a:lstStyle/>
-          <a:p>
-            <a:pPr marL="0" indent="0" algn="l">
-              <a:buNone/>
-            </a:pPr>
-            <a:r>
-              <a:rPr lang="en-US" sz="900" b="1" dirty="0">
-                <a:solidFill>
-                  <a:srgbClr val="AAB6C7"/>
-                </a:solidFill>
-                <a:latin typeface="Segoe UI" pitchFamily="34" charset="0"/>
-                <a:ea typeface="Segoe UI" pitchFamily="34" charset="-122"/>
-                <a:cs typeface="Segoe UI" pitchFamily="34" charset="-120"/>
-              </a:rPr>
-              <a:t>Brisken</a:t>
-            </a:r>
-            <a:r>
-              <a:rPr lang="en-US" sz="900" dirty="0">
-                <a:solidFill>
-                  <a:srgbClr val="7C8A9B"/>
-                </a:solidFill>
-                <a:latin typeface="Segoe UI" pitchFamily="34" charset="0"/>
-                <a:ea typeface="Segoe UI" pitchFamily="34" charset="-122"/>
-                <a:cs typeface="Segoe UI" pitchFamily="34" charset="-120"/>
-              </a:rPr>
-              <a:t>   Digital Co-Worker, part of OnePilot</a:t>
-            </a:r>
-            <a:endParaRPr lang="en-US" sz="900" dirty="0"/>
-          </a:p>
-        </p:txBody>
-      </p:sp>
-      <p:sp>
-        <p:nvSpPr>
-          <p:cNvPr id="23" name="Text 16"/>
-          <p:cNvSpPr/>
-          <p:nvPr/>
-        </p:nvSpPr>
-        <p:spPr>
-          <a:xfrm>
-            <a:off x="10527487" y="6400800"/>
-            <a:ext cx="1097280" cy="274320"/>
-          </a:xfrm>
-          <a:prstGeom prst="rect">
-            <a:avLst/>
-          </a:prstGeom>
-          <a:noFill/>
-          <a:ln/>
-        </p:spPr>
-        <p:txBody>
-          <a:bodyPr wrap="square" rtlCol="0" anchor="ctr"/>
-          <a:lstStyle/>
-          <a:p>
-            <a:pPr marL="0" indent="0" algn="r">
-              <a:buNone/>
-            </a:pPr>
-            <a:r>
-              <a:rPr lang="en-US" sz="900" dirty="0">
-                <a:solidFill>
-                  <a:srgbClr val="AAB6C7"/>
-                </a:solidFill>
-                <a:latin typeface="Segoe UI" pitchFamily="34" charset="0"/>
-                <a:ea typeface="Segoe UI" pitchFamily="34" charset="-122"/>
-                <a:cs typeface="Segoe UI" pitchFamily="34" charset="-120"/>
-              </a:rPr>
-              <a:t>09 / 11</a:t>
-            </a:r>
-            <a:endParaRPr lang="en-US" sz="900" dirty="0"/>
-          </a:p>
-        </p:txBody>
-      </p:sp>
-      <p:sp>
-        <p:nvSpPr>
-          <p:cNvPr id="24" name="Shape 17"/>
           <p:cNvSpPr/>
           <p:nvPr/>
         </p:nvSpPr>
@@ -12251,28 +12102,6 @@
 </file>
 
 <file path=customXml/item1.xml><?xml version="1.0" encoding="utf-8"?>
-<p:properties xmlns:p="http://schemas.microsoft.com/office/2006/metadata/properties" xmlns:xsi="http://www.w3.org/2001/XMLSchema-instance" xmlns:pc="http://schemas.microsoft.com/office/infopath/2007/PartnerControls">
-  <documentManagement>
-    <_ip_UnifiedCompliancePolicyUIAction xmlns="http://schemas.microsoft.com/sharepoint/v3" xsi:nil="true"/>
-    <_ip_UnifiedCompliancePolicyProperties xmlns="http://schemas.microsoft.com/sharepoint/v3" xsi:nil="true"/>
-    <lcf76f155ced4ddcb4097134ff3c332f xmlns="f7c12939-211d-4aac-95d7-b8d38b675650">
-      <Terms xmlns="http://schemas.microsoft.com/office/infopath/2007/PartnerControls"/>
-    </lcf76f155ced4ddcb4097134ff3c332f>
-    <TaxCatchAll xmlns="e9089a15-9498-4149-a6f3-b4bc8e4d21ac" xsi:nil="true"/>
-  </documentManagement>
-</p:properties>
-</file>
-
-<file path=customXml/item2.xml><?xml version="1.0" encoding="utf-8"?>
-<?mso-contentType ?>
-<FormTemplates xmlns="http://schemas.microsoft.com/sharepoint/v3/contenttype/forms">
-  <Display>DocumentLibraryForm</Display>
-  <Edit>DocumentLibraryForm</Edit>
-  <New>DocumentLibraryForm</New>
-</FormTemplates>
-</file>
-
-<file path=customXml/item3.xml><?xml version="1.0" encoding="utf-8"?>
 <ct:contentTypeSchema xmlns:ct="http://schemas.microsoft.com/office/2006/metadata/contentType" xmlns:ma="http://schemas.microsoft.com/office/2006/metadata/properties/metaAttributes" ct:_="" ma:_="" ma:contentTypeName="Document" ma:contentTypeID="0x0101002E36004C6954FC41BFA5A9934AAC0872" ma:contentTypeVersion="24" ma:contentTypeDescription="Create a new document." ma:contentTypeScope="" ma:versionID="1cf73f14b085dc989d6ca704a5f7b696">
   <xsd:schema xmlns:xsd="http://www.w3.org/2001/XMLSchema" xmlns:xs="http://www.w3.org/2001/XMLSchema" xmlns:p="http://schemas.microsoft.com/office/2006/metadata/properties" xmlns:ns1="http://schemas.microsoft.com/sharepoint/v3" xmlns:ns2="f7c12939-211d-4aac-95d7-b8d38b675650" xmlns:ns3="e9089a15-9498-4149-a6f3-b4bc8e4d21ac" targetNamespace="http://schemas.microsoft.com/office/2006/metadata/properties" ma:root="true" ma:fieldsID="d257115e6736aa2126af141fdcd75720" ns1:_="" ns2:_="" ns3:_="">
     <xsd:import namespace="http://schemas.microsoft.com/sharepoint/v3"/>
@@ -12544,33 +12373,29 @@
 </ct:contentTypeSchema>
 </file>
 
-<file path=customXml/itemProps1.xml><?xml version="1.0" encoding="utf-8"?>
-<ds:datastoreItem xmlns:ds="http://schemas.openxmlformats.org/officeDocument/2006/customXml" ds:itemID="{F9EFA5C6-0C09-4163-A7B2-14E5D9BDE4B3}">
-  <ds:schemaRefs>
-    <ds:schemaRef ds:uri="http://schemas.microsoft.com/office/2006/metadata/properties"/>
-    <ds:schemaRef ds:uri="http://schemas.microsoft.com/office/infopath/2007/PartnerControls"/>
-    <ds:schemaRef ds:uri="http://purl.org/dc/elements/1.1/"/>
-    <ds:schemaRef ds:uri="http://schemas.microsoft.com/office/2006/documentManagement/types"/>
-    <ds:schemaRef ds:uri="http://schemas.microsoft.com/sharepoint/v3"/>
-    <ds:schemaRef ds:uri="http://purl.org/dc/terms/"/>
-    <ds:schemaRef ds:uri="http://schemas.openxmlformats.org/package/2006/metadata/core-properties"/>
-    <ds:schemaRef ds:uri="http://purl.org/dc/dcmitype/"/>
-    <ds:schemaRef ds:uri="e9089a15-9498-4149-a6f3-b4bc8e4d21ac"/>
-    <ds:schemaRef ds:uri="f7c12939-211d-4aac-95d7-b8d38b675650"/>
-    <ds:schemaRef ds:uri="http://www.w3.org/XML/1998/namespace"/>
-  </ds:schemaRefs>
-</ds:datastoreItem>
+<file path=customXml/item2.xml><?xml version="1.0" encoding="utf-8"?>
+<?mso-contentType ?>
+<FormTemplates xmlns="http://schemas.microsoft.com/sharepoint/v3/contenttype/forms">
+  <Display>DocumentLibraryForm</Display>
+  <Edit>DocumentLibraryForm</Edit>
+  <New>DocumentLibraryForm</New>
+</FormTemplates>
 </file>
 
-<file path=customXml/itemProps2.xml><?xml version="1.0" encoding="utf-8"?>
-<ds:datastoreItem xmlns:ds="http://schemas.openxmlformats.org/officeDocument/2006/customXml" ds:itemID="{F583481A-46EB-43A4-9D49-78D191929914}">
-  <ds:schemaRefs>
-    <ds:schemaRef ds:uri="http://schemas.microsoft.com/sharepoint/v3/contenttype/forms"/>
-  </ds:schemaRefs>
-</ds:datastoreItem>
+<file path=customXml/item3.xml><?xml version="1.0" encoding="utf-8"?>
+<p:properties xmlns:p="http://schemas.microsoft.com/office/2006/metadata/properties" xmlns:xsi="http://www.w3.org/2001/XMLSchema-instance" xmlns:pc="http://schemas.microsoft.com/office/infopath/2007/PartnerControls">
+  <documentManagement>
+    <_ip_UnifiedCompliancePolicyUIAction xmlns="http://schemas.microsoft.com/sharepoint/v3" xsi:nil="true"/>
+    <_ip_UnifiedCompliancePolicyProperties xmlns="http://schemas.microsoft.com/sharepoint/v3" xsi:nil="true"/>
+    <lcf76f155ced4ddcb4097134ff3c332f xmlns="f7c12939-211d-4aac-95d7-b8d38b675650">
+      <Terms xmlns="http://schemas.microsoft.com/office/infopath/2007/PartnerControls"/>
+    </lcf76f155ced4ddcb4097134ff3c332f>
+    <TaxCatchAll xmlns="e9089a15-9498-4149-a6f3-b4bc8e4d21ac" xsi:nil="true"/>
+  </documentManagement>
+</p:properties>
 </file>
 
-<file path=customXml/itemProps3.xml><?xml version="1.0" encoding="utf-8"?>
+<file path=customXml/itemProps1.xml><?xml version="1.0" encoding="utf-8"?>
 <ds:datastoreItem xmlns:ds="http://schemas.openxmlformats.org/officeDocument/2006/customXml" ds:itemID="{B3D00CFA-3D53-483F-AB50-906B0931AF1E}">
   <ds:schemaRefs>
     <ds:schemaRef ds:uri="http://schemas.microsoft.com/office/2006/metadata/contentType"/>
@@ -12590,6 +12415,32 @@
 </ds:datastoreItem>
 </file>
 
+<file path=customXml/itemProps2.xml><?xml version="1.0" encoding="utf-8"?>
+<ds:datastoreItem xmlns:ds="http://schemas.openxmlformats.org/officeDocument/2006/customXml" ds:itemID="{F583481A-46EB-43A4-9D49-78D191929914}">
+  <ds:schemaRefs>
+    <ds:schemaRef ds:uri="http://schemas.microsoft.com/sharepoint/v3/contenttype/forms"/>
+  </ds:schemaRefs>
+</ds:datastoreItem>
+</file>
+
+<file path=customXml/itemProps3.xml><?xml version="1.0" encoding="utf-8"?>
+<ds:datastoreItem xmlns:ds="http://schemas.openxmlformats.org/officeDocument/2006/customXml" ds:itemID="{F9EFA5C6-0C09-4163-A7B2-14E5D9BDE4B3}">
+  <ds:schemaRefs>
+    <ds:schemaRef ds:uri="http://www.w3.org/XML/1998/namespace"/>
+    <ds:schemaRef ds:uri="http://purl.org/dc/elements/1.1/"/>
+    <ds:schemaRef ds:uri="http://schemas.microsoft.com/office/2006/metadata/properties"/>
+    <ds:schemaRef ds:uri="http://purl.org/dc/dcmitype/"/>
+    <ds:schemaRef ds:uri="http://schemas.microsoft.com/office/2006/documentManagement/types"/>
+    <ds:schemaRef ds:uri="http://schemas.microsoft.com/sharepoint/v3"/>
+    <ds:schemaRef ds:uri="f7c12939-211d-4aac-95d7-b8d38b675650"/>
+    <ds:schemaRef ds:uri="http://schemas.openxmlformats.org/package/2006/metadata/core-properties"/>
+    <ds:schemaRef ds:uri="http://purl.org/dc/terms/"/>
+    <ds:schemaRef ds:uri="http://schemas.microsoft.com/office/infopath/2007/PartnerControls"/>
+    <ds:schemaRef ds:uri="e9089a15-9498-4149-a6f3-b4bc8e4d21ac"/>
+  </ds:schemaRefs>
+</ds:datastoreItem>
+</file>
+
 <file path=docMetadata/LabelInfo.xml><?xml version="1.0" encoding="utf-8"?>
 <clbl:labelList xmlns:clbl="http://schemas.microsoft.com/office/2020/mipLabelMetadata">
   <clbl:label id="{c5f3e595-28df-4b6d-866e-5db0c24f0139}" enabled="1" method="Standard" siteId="{aa3bd2bf-9c6e-4f49-9c4f-44f878ae9e74}" removed="0"/>
